--- a/mmacos/templates/30_instruments/bench_ctb/deck_ctb.pptx
+++ b/mmacos/templates/30_instruments/bench_ctb/deck_ctb.pptx
@@ -7860,7 +7860,7 @@
                 </a:solidFill>
                 <a:latin typeface="Arial"/>
               </a:rPr>
-              <a:t>•  Result: 2.9×10⁻⁷ → 8.1×10⁻⁹ (36×) in 19 iterations at 9.9/8.6 nm rms surface stroke. The best any linear solve of the measured matrix can reach is 4.5×10⁻⁹ at 11 nm — the loop lands within 2× of that with a matrix measured once at the flat state; re-measuring it around the corrected state is the next depth increment.</a:t>
+              <a:t>•  Result: 2.9×10⁻⁷ → 8.1×10⁻⁹ (36×) in 19 iterations at 9.9/8.6 nm rms surface stroke. The best any linear solve of the measured matrix can reach is 4.5×10⁻⁹ at 11 nm — the loop lands within 2× of that with a matrix measured once at the flat state; re-measuring it around the corrected state is the next depth increment. Restricted to DM1 alone, the same loop stalls at 1.3×10⁻⁷ (2.3×): the pupil mirror is phase-only control, and the full annulus also needs the amplitude lever the out-of-pupil DM2 supplies.</a:t>
             </a:r>
           </a:p>
           <a:p>
@@ -7897,8 +7897,8 @@
         </p:blipFill>
         <p:spPr>
           <a:xfrm>
-            <a:off x="2830010" y="3398520"/>
-            <a:ext cx="6531674" cy="1828292"/>
+            <a:off x="2682799" y="3992879"/>
+            <a:ext cx="6826095" cy="1526032"/>
           </a:xfrm>
           <a:prstGeom prst="rect">
             <a:avLst/>
@@ -7913,8 +7913,8 @@
         </p:nvSpPr>
         <p:spPr>
           <a:xfrm>
-            <a:off x="411480" y="5245100"/>
-            <a:ext cx="11368735" cy="229107"/>
+            <a:off x="411480" y="5537200"/>
+            <a:ext cx="11368735" cy="394208"/>
           </a:xfrm>
           <a:prstGeom prst="rect">
             <a:avLst/>
@@ -7939,7 +7939,7 @@
                 </a:solidFill>
                 <a:latin typeface="Arial"/>
               </a:rPr>
-              <a:t>Before and after at the camera, contrast versus iteration, and the DM1 stroke map; dashed circles mark the 3–15 λ/D zone.</a:t>
+              <a:t>Before and after at the camera; contrast versus iteration, with the DM1-only loop overlaid stalling two decades short; the stroke maps commanded on both DMs. Dashed circles mark the 3–15 λ/D zone.</a:t>
             </a:r>
           </a:p>
         </p:txBody>
@@ -7952,7 +7952,7 @@
         </p:nvSpPr>
         <p:spPr>
           <a:xfrm>
-            <a:off x="411480" y="5510784"/>
+            <a:off x="411480" y="5967984"/>
             <a:ext cx="11368735" cy="274320"/>
           </a:xfrm>
           <a:prstGeom prst="rect">

--- a/mmacos/templates/30_instruments/bench_ctb/deck_ctb.pptx
+++ b/mmacos/templates/30_instruments/bench_ctb/deck_ctb.pptx
@@ -22,6 +22,7 @@
     <p:sldId id="270" r:id="rId21"/>
     <p:sldId id="271" r:id="rId22"/>
     <p:sldId id="272" r:id="rId23"/>
+    <p:sldId id="273" r:id="rId24"/>
   </p:sldIdLst>
   <p:sldSz cx="12191695" cy="6858000" type="screen4x3"/>
   <p:notesSz cx="6858000" cy="9144000"/>
@@ -4264,8 +4265,8 @@
         </p:blipFill>
         <p:spPr>
           <a:xfrm>
-            <a:off x="1487795" y="1298448"/>
-            <a:ext cx="3653808" cy="2440432"/>
+            <a:off x="1426422" y="1298448"/>
+            <a:ext cx="3776554" cy="2440432"/>
           </a:xfrm>
           <a:prstGeom prst="rect">
             <a:avLst/>
@@ -4327,8 +4328,8 @@
         </p:blipFill>
         <p:spPr>
           <a:xfrm>
-            <a:off x="7170384" y="1298448"/>
-            <a:ext cx="3855791" cy="2440432"/>
+            <a:off x="7057750" y="1298448"/>
+            <a:ext cx="4081058" cy="2440432"/>
           </a:xfrm>
           <a:prstGeom prst="rect">
             <a:avLst/>
@@ -4426,7 +4427,7 @@
                 </a:solidFill>
                 <a:latin typeface="Arial"/>
               </a:rPr>
-              <a:t>Bare-optics agreement, and the bench</a:t>
+              <a:t>The vortex core: sampling set the floor</a:t>
             </a:r>
           </a:p>
           <a:p>
@@ -4442,7 +4443,7 @@
                 </a:solidFill>
                 <a:latin typeface="Arial"/>
               </a:rPr>
-              <a:t>The two prescriptions before any mask, and the geometric layout they share</a:t>
+              <a:t>An ideal-pupil probe with no bench reproduces the shipped 2.9×10⁻⁷ — and pixel-averaging removes it</a:t>
             </a:r>
           </a:p>
         </p:txBody>
@@ -4491,40 +4492,16 @@
           </a:p>
         </p:txBody>
       </p:sp>
-      <p:pic>
-        <p:nvPicPr>
-          <p:cNvPr id="4" name="Picture 3" descr="ctb_coro_compare_bare.png"/>
-          <p:cNvPicPr>
-            <a:picLocks noChangeAspect="1"/>
-          </p:cNvPicPr>
-          <p:nvPr/>
-        </p:nvPicPr>
-        <p:blipFill>
-          <a:blip r:embed="rId2"/>
-          <a:stretch>
-            <a:fillRect/>
-          </a:stretch>
-        </p:blipFill>
-        <p:spPr>
-          <a:xfrm>
-            <a:off x="2658845" y="1298448"/>
-            <a:ext cx="1311708" cy="2788411"/>
-          </a:xfrm>
-          <a:prstGeom prst="rect">
-            <a:avLst/>
-          </a:prstGeom>
-        </p:spPr>
-      </p:pic>
-      <p:sp>
-        <p:nvSpPr>
-          <p:cNvPr id="5" name="TextBox 4"/>
+      <p:sp>
+        <p:nvSpPr>
+          <p:cNvPr id="4" name="TextBox 3"/>
           <p:cNvSpPr txBox="1"/>
           <p:nvPr/>
         </p:nvSpPr>
         <p:spPr>
           <a:xfrm>
-            <a:off x="411480" y="4105147"/>
-            <a:ext cx="5806440" cy="229107"/>
+            <a:off x="411480" y="1298448"/>
+            <a:ext cx="5806440" cy="274320"/>
           </a:xfrm>
           <a:prstGeom prst="rect">
             <a:avLst/>
@@ -4537,57 +4514,65 @@
           </a:bodyPr>
           <a:lstStyle/>
           <a:p>
-            <a:pPr algn="ctr">
-              <a:spcAft>
-                <a:spcPts val="0"/>
-              </a:spcAft>
-            </a:pPr>
-            <a:r>
-              <a:rPr sz="1000" b="0">
-                <a:solidFill>
-                  <a:srgbClr val="6E6E6E"/>
-                </a:solidFill>
-                <a:latin typeface="Arial"/>
-              </a:rPr>
-              <a:t>Seven stations × two models, no masks: point images agree to 0.9989 correlation.</a:t>
-            </a:r>
-          </a:p>
-        </p:txBody>
-      </p:sp>
-      <p:pic>
-        <p:nvPicPr>
-          <p:cNvPr id="6" name="Picture 5" descr="ctb_planar_view_std.png"/>
-          <p:cNvPicPr>
-            <a:picLocks noChangeAspect="1"/>
-          </p:cNvPicPr>
-          <p:nvPr/>
-        </p:nvPicPr>
-        <p:blipFill>
-          <a:blip r:embed="rId3"/>
-          <a:stretch>
-            <a:fillRect/>
-          </a:stretch>
-        </p:blipFill>
-        <p:spPr>
-          <a:xfrm>
-            <a:off x="7415620" y="1298448"/>
-            <a:ext cx="3365318" cy="2348992"/>
-          </a:xfrm>
-          <a:prstGeom prst="rect">
-            <a:avLst/>
-          </a:prstGeom>
-        </p:spPr>
-      </p:pic>
-      <p:sp>
-        <p:nvSpPr>
-          <p:cNvPr id="7" name="TextBox 6"/>
+            <a:pPr>
+              <a:spcAft>
+                <a:spcPts val="600"/>
+              </a:spcAft>
+            </a:pPr>
+            <a:r>
+              <a:rPr sz="1200" b="0">
+                <a:solidFill>
+                  <a:srgbClr val="282828"/>
+                </a:solidFill>
+                <a:latin typeface="Arial"/>
+              </a:rPr>
+              <a:t>•  The probe: the same sampled charge-6 vortex in a pure Fourier chain on an ideal clear pupil (N=1024, 4 px per λ/D, Lyot 0.90) — no bench optics anywhere. Direct-sampled: 3.0×10⁻⁷, matching the shipped bench number. Supersampling the pupil edge changes nothing. The floor is the mask's own singular core: near the axis the phase wraps faster than the grid, and those mis-phased pixels sit exactly on the stellar image peak, scattering ~0.2% of the starlight back inside the Lyot.</a:t>
+            </a:r>
+          </a:p>
+          <a:p>
+            <a:pPr>
+              <a:spcAft>
+                <a:spcPts val="600"/>
+              </a:spcAft>
+            </a:pPr>
+            <a:r>
+              <a:rPr sz="1200" b="0">
+                <a:solidFill>
+                  <a:srgbClr val="282828"/>
+                </a:solidFill>
+                <a:latin typeface="Arial"/>
+              </a:rPr>
+              <a:t>•  Generate-at-K× and complex-bin cancels the core phasors (transmission 0 at the core pixel, a smooth ~1-px taper): 4× gives 3.4×10⁻⁹, 8× gives 3.0×10⁻⁹ (converged). An explicit 1 λ/D opaque core dot is worse (9.8×10⁻⁹ — its own edge diffracts). Charge 2 is the counterexample: the medicine is for even charge ≥ 4.</a:t>
+            </a:r>
+          </a:p>
+          <a:p>
+            <a:pPr>
+              <a:spcAft>
+                <a:spcPts val="600"/>
+              </a:spcAft>
+            </a:pPr>
+            <a:r>
+              <a:rPr sz="1200" b="0">
+                <a:solidFill>
+                  <a:srgbClr val="282828"/>
+                </a:solidFill>
+                <a:latin typeface="Arial"/>
+              </a:rPr>
+              <a:t>•  On the bench (8×-binned, charge 6, Lyot 0.90): 1.4×10⁻⁸ — the remaining gap to the ideal-pupil 3.0×10⁻⁹ is the bench's own residual, no longer the mask.</a:t>
+            </a:r>
+          </a:p>
+        </p:txBody>
+      </p:sp>
+      <p:sp>
+        <p:nvSpPr>
+          <p:cNvPr id="5" name="TextBox 4"/>
           <p:cNvSpPr txBox="1"/>
           <p:nvPr/>
         </p:nvSpPr>
         <p:spPr>
           <a:xfrm>
-            <a:off x="6400800" y="3665727"/>
-            <a:ext cx="5394960" cy="394208"/>
+            <a:off x="6400800" y="1298448"/>
+            <a:ext cx="5394960" cy="274320"/>
           </a:xfrm>
           <a:prstGeom prst="rect">
             <a:avLst/>
@@ -4600,19 +4585,446 @@
           </a:bodyPr>
           <a:lstStyle/>
           <a:p>
-            <a:pPr algn="ctr">
-              <a:spcAft>
-                <a:spcPts val="0"/>
-              </a:spcAft>
-            </a:pPr>
-            <a:r>
-              <a:rPr sz="1000" b="0">
-                <a:solidFill>
-                  <a:srgbClr val="6E6E6E"/>
-                </a:solidFill>
-                <a:latin typeface="Arial"/>
-              </a:rPr>
-              <a:t>The geometric bench: eight off-axis parabolas and two DMs, with the beam footprints the diffraction models inherit.</a:t>
+            <a:pPr>
+              <a:spcAft>
+                <a:spcPts val="600"/>
+              </a:spcAft>
+            </a:pPr>
+            <a:r>
+              <a:rPr sz="1200" b="0">
+                <a:solidFill>
+                  <a:srgbClr val="282828"/>
+                </a:solidFill>
+                <a:latin typeface="Arial"/>
+              </a:rPr>
+              <a:t>•  With the core fixed, flux inside the stop is 0.0–0.1% out to a 0.90 fraction — the analytic "all starlight outside the pupil" property, visible at last — and the Lyot fraction becomes a genuine depth-for-throughput trade (it used to look free because every fraction hit the same artifact floor):</a:t>
+            </a:r>
+          </a:p>
+        </p:txBody>
+      </p:sp>
+      <p:graphicFrame>
+        <p:nvGraphicFramePr>
+          <p:cNvPr id="6" name="Table 5"/>
+          <p:cNvGraphicFramePr>
+            <a:graphicFrameLocks noGrp="1"/>
+          </p:cNvGraphicFramePr>
+          <p:nvPr/>
+        </p:nvGraphicFramePr>
+        <p:xfrm>
+          <a:off x="6400800" y="2465831"/>
+          <a:ext cx="5394958" cy="1051560"/>
+        </p:xfrm>
+        <a:graphic>
+          <a:graphicData uri="http://schemas.openxmlformats.org/drawingml/2006/table">
+            <a:tbl>
+              <a:tblPr firstRow="1" bandRow="1">
+                <a:tableStyleId>{5C22544A-7EE6-4342-B048-85BDC9FD1C3A}</a:tableStyleId>
+              </a:tblPr>
+              <a:tblGrid>
+                <a:gridCol w="1710597"/>
+                <a:gridCol w="1184259"/>
+                <a:gridCol w="1184259"/>
+                <a:gridCol w="1315843"/>
+              </a:tblGrid>
+              <a:tr h="262890">
+                <a:tc>
+                  <a:txBody>
+                    <a:bodyPr wrap="square"/>
+                    <a:lstStyle/>
+                    <a:p>
+                      <a:r>
+                        <a:rPr sz="1000" b="1">
+                          <a:solidFill>
+                            <a:srgbClr val="FFFFFF"/>
+                          </a:solidFill>
+                          <a:latin typeface="Arial"/>
+                        </a:rPr>
+                        <a:t>Lyot fraction</a:t>
+                      </a:r>
+                    </a:p>
+                  </a:txBody>
+                  <a:tcPr marL="54864" marR="54864" marT="18288" marB="18288">
+                    <a:solidFill>
+                      <a:srgbClr val="1F4E79"/>
+                    </a:solidFill>
+                  </a:tcPr>
+                </a:tc>
+                <a:tc>
+                  <a:txBody>
+                    <a:bodyPr wrap="square"/>
+                    <a:lstStyle/>
+                    <a:p>
+                      <a:r>
+                        <a:rPr sz="1000" b="1">
+                          <a:solidFill>
+                            <a:srgbClr val="FFFFFF"/>
+                          </a:solidFill>
+                          <a:latin typeface="Arial"/>
+                        </a:rPr>
+                        <a:t>charge 4</a:t>
+                      </a:r>
+                    </a:p>
+                  </a:txBody>
+                  <a:tcPr marL="54864" marR="54864" marT="18288" marB="18288">
+                    <a:solidFill>
+                      <a:srgbClr val="1F4E79"/>
+                    </a:solidFill>
+                  </a:tcPr>
+                </a:tc>
+                <a:tc>
+                  <a:txBody>
+                    <a:bodyPr wrap="square"/>
+                    <a:lstStyle/>
+                    <a:p>
+                      <a:r>
+                        <a:rPr sz="1000" b="1">
+                          <a:solidFill>
+                            <a:srgbClr val="FFFFFF"/>
+                          </a:solidFill>
+                          <a:latin typeface="Arial"/>
+                        </a:rPr>
+                        <a:t>charge 6</a:t>
+                      </a:r>
+                    </a:p>
+                  </a:txBody>
+                  <a:tcPr marL="54864" marR="54864" marT="18288" marB="18288">
+                    <a:solidFill>
+                      <a:srgbClr val="1F4E79"/>
+                    </a:solidFill>
+                  </a:tcPr>
+                </a:tc>
+                <a:tc>
+                  <a:txBody>
+                    <a:bodyPr wrap="square"/>
+                    <a:lstStyle/>
+                    <a:p>
+                      <a:r>
+                        <a:rPr sz="1000" b="1">
+                          <a:solidFill>
+                            <a:srgbClr val="FFFFFF"/>
+                          </a:solidFill>
+                          <a:latin typeface="Arial"/>
+                        </a:rPr>
+                        <a:t>throughput</a:t>
+                      </a:r>
+                    </a:p>
+                  </a:txBody>
+                  <a:tcPr marL="54864" marR="54864" marT="18288" marB="18288">
+                    <a:solidFill>
+                      <a:srgbClr val="1F4E79"/>
+                    </a:solidFill>
+                  </a:tcPr>
+                </a:tc>
+              </a:tr>
+              <a:tr h="262890">
+                <a:tc>
+                  <a:txBody>
+                    <a:bodyPr wrap="square"/>
+                    <a:lstStyle/>
+                    <a:p>
+                      <a:r>
+                        <a:rPr sz="1000" b="0">
+                          <a:solidFill>
+                            <a:srgbClr val="282828"/>
+                          </a:solidFill>
+                          <a:latin typeface="Arial"/>
+                        </a:rPr>
+                        <a:t>0.50</a:t>
+                      </a:r>
+                    </a:p>
+                  </a:txBody>
+                  <a:tcPr marL="54864" marR="54864" marT="18288" marB="18288">
+                    <a:solidFill>
+                      <a:srgbClr val="FFFFFF"/>
+                    </a:solidFill>
+                  </a:tcPr>
+                </a:tc>
+                <a:tc>
+                  <a:txBody>
+                    <a:bodyPr wrap="square"/>
+                    <a:lstStyle/>
+                    <a:p>
+                      <a:r>
+                        <a:rPr sz="1000" b="0">
+                          <a:solidFill>
+                            <a:srgbClr val="282828"/>
+                          </a:solidFill>
+                          <a:latin typeface="Arial"/>
+                        </a:rPr>
+                        <a:t>6.6×10⁻¹¹</a:t>
+                      </a:r>
+                    </a:p>
+                  </a:txBody>
+                  <a:tcPr marL="54864" marR="54864" marT="18288" marB="18288">
+                    <a:solidFill>
+                      <a:srgbClr val="FFFFFF"/>
+                    </a:solidFill>
+                  </a:tcPr>
+                </a:tc>
+                <a:tc>
+                  <a:txBody>
+                    <a:bodyPr wrap="square"/>
+                    <a:lstStyle/>
+                    <a:p>
+                      <a:r>
+                        <a:rPr sz="1000" b="0">
+                          <a:solidFill>
+                            <a:srgbClr val="282828"/>
+                          </a:solidFill>
+                          <a:latin typeface="Arial"/>
+                        </a:rPr>
+                        <a:t>3.0×10⁻¹⁰</a:t>
+                      </a:r>
+                    </a:p>
+                  </a:txBody>
+                  <a:tcPr marL="54864" marR="54864" marT="18288" marB="18288">
+                    <a:solidFill>
+                      <a:srgbClr val="FFFFFF"/>
+                    </a:solidFill>
+                  </a:tcPr>
+                </a:tc>
+                <a:tc>
+                  <a:txBody>
+                    <a:bodyPr wrap="square"/>
+                    <a:lstStyle/>
+                    <a:p>
+                      <a:r>
+                        <a:rPr sz="1000" b="0">
+                          <a:solidFill>
+                            <a:srgbClr val="282828"/>
+                          </a:solidFill>
+                          <a:latin typeface="Arial"/>
+                        </a:rPr>
+                        <a:t>25%</a:t>
+                      </a:r>
+                    </a:p>
+                  </a:txBody>
+                  <a:tcPr marL="54864" marR="54864" marT="18288" marB="18288">
+                    <a:solidFill>
+                      <a:srgbClr val="FFFFFF"/>
+                    </a:solidFill>
+                  </a:tcPr>
+                </a:tc>
+              </a:tr>
+              <a:tr h="262890">
+                <a:tc>
+                  <a:txBody>
+                    <a:bodyPr wrap="square"/>
+                    <a:lstStyle/>
+                    <a:p>
+                      <a:r>
+                        <a:rPr sz="1000" b="0">
+                          <a:solidFill>
+                            <a:srgbClr val="282828"/>
+                          </a:solidFill>
+                          <a:latin typeface="Arial"/>
+                        </a:rPr>
+                        <a:t>0.80</a:t>
+                      </a:r>
+                    </a:p>
+                  </a:txBody>
+                  <a:tcPr marL="54864" marR="54864" marT="18288" marB="18288">
+                    <a:solidFill>
+                      <a:srgbClr val="ECF1F6"/>
+                    </a:solidFill>
+                  </a:tcPr>
+                </a:tc>
+                <a:tc>
+                  <a:txBody>
+                    <a:bodyPr wrap="square"/>
+                    <a:lstStyle/>
+                    <a:p>
+                      <a:r>
+                        <a:rPr sz="1000" b="0">
+                          <a:solidFill>
+                            <a:srgbClr val="282828"/>
+                          </a:solidFill>
+                          <a:latin typeface="Arial"/>
+                        </a:rPr>
+                        <a:t>1.9×10⁻⁹</a:t>
+                      </a:r>
+                    </a:p>
+                  </a:txBody>
+                  <a:tcPr marL="54864" marR="54864" marT="18288" marB="18288">
+                    <a:solidFill>
+                      <a:srgbClr val="ECF1F6"/>
+                    </a:solidFill>
+                  </a:tcPr>
+                </a:tc>
+                <a:tc>
+                  <a:txBody>
+                    <a:bodyPr wrap="square"/>
+                    <a:lstStyle/>
+                    <a:p>
+                      <a:r>
+                        <a:rPr sz="1000" b="0">
+                          <a:solidFill>
+                            <a:srgbClr val="282828"/>
+                          </a:solidFill>
+                          <a:latin typeface="Arial"/>
+                        </a:rPr>
+                        <a:t>6.4×10⁻⁹</a:t>
+                      </a:r>
+                    </a:p>
+                  </a:txBody>
+                  <a:tcPr marL="54864" marR="54864" marT="18288" marB="18288">
+                    <a:solidFill>
+                      <a:srgbClr val="ECF1F6"/>
+                    </a:solidFill>
+                  </a:tcPr>
+                </a:tc>
+                <a:tc>
+                  <a:txBody>
+                    <a:bodyPr wrap="square"/>
+                    <a:lstStyle/>
+                    <a:p>
+                      <a:r>
+                        <a:rPr sz="1000" b="0">
+                          <a:solidFill>
+                            <a:srgbClr val="282828"/>
+                          </a:solidFill>
+                          <a:latin typeface="Arial"/>
+                        </a:rPr>
+                        <a:t>64%</a:t>
+                      </a:r>
+                    </a:p>
+                  </a:txBody>
+                  <a:tcPr marL="54864" marR="54864" marT="18288" marB="18288">
+                    <a:solidFill>
+                      <a:srgbClr val="ECF1F6"/>
+                    </a:solidFill>
+                  </a:tcPr>
+                </a:tc>
+              </a:tr>
+              <a:tr h="262890">
+                <a:tc>
+                  <a:txBody>
+                    <a:bodyPr wrap="square"/>
+                    <a:lstStyle/>
+                    <a:p>
+                      <a:r>
+                        <a:rPr sz="1000" b="0">
+                          <a:solidFill>
+                            <a:srgbClr val="282828"/>
+                          </a:solidFill>
+                          <a:latin typeface="Arial"/>
+                        </a:rPr>
+                        <a:t>0.90</a:t>
+                      </a:r>
+                    </a:p>
+                  </a:txBody>
+                  <a:tcPr marL="54864" marR="54864" marT="18288" marB="18288">
+                    <a:solidFill>
+                      <a:srgbClr val="FFFFFF"/>
+                    </a:solidFill>
+                  </a:tcPr>
+                </a:tc>
+                <a:tc>
+                  <a:txBody>
+                    <a:bodyPr wrap="square"/>
+                    <a:lstStyle/>
+                    <a:p>
+                      <a:r>
+                        <a:rPr sz="1000" b="0">
+                          <a:solidFill>
+                            <a:srgbClr val="282828"/>
+                          </a:solidFill>
+                          <a:latin typeface="Arial"/>
+                        </a:rPr>
+                        <a:t>8.0×10⁻⁹</a:t>
+                      </a:r>
+                    </a:p>
+                  </a:txBody>
+                  <a:tcPr marL="54864" marR="54864" marT="18288" marB="18288">
+                    <a:solidFill>
+                      <a:srgbClr val="FFFFFF"/>
+                    </a:solidFill>
+                  </a:tcPr>
+                </a:tc>
+                <a:tc>
+                  <a:txBody>
+                    <a:bodyPr wrap="square"/>
+                    <a:lstStyle/>
+                    <a:p>
+                      <a:r>
+                        <a:rPr sz="1000" b="0">
+                          <a:solidFill>
+                            <a:srgbClr val="282828"/>
+                          </a:solidFill>
+                          <a:latin typeface="Arial"/>
+                        </a:rPr>
+                        <a:t>1.6×10⁻⁸</a:t>
+                      </a:r>
+                    </a:p>
+                  </a:txBody>
+                  <a:tcPr marL="54864" marR="54864" marT="18288" marB="18288">
+                    <a:solidFill>
+                      <a:srgbClr val="FFFFFF"/>
+                    </a:solidFill>
+                  </a:tcPr>
+                </a:tc>
+                <a:tc>
+                  <a:txBody>
+                    <a:bodyPr wrap="square"/>
+                    <a:lstStyle/>
+                    <a:p>
+                      <a:r>
+                        <a:rPr sz="1000" b="0">
+                          <a:solidFill>
+                            <a:srgbClr val="282828"/>
+                          </a:solidFill>
+                          <a:latin typeface="Arial"/>
+                        </a:rPr>
+                        <a:t>81%</a:t>
+                      </a:r>
+                    </a:p>
+                  </a:txBody>
+                  <a:tcPr marL="54864" marR="54864" marT="18288" marB="18288">
+                    <a:solidFill>
+                      <a:srgbClr val="FFFFFF"/>
+                    </a:solidFill>
+                  </a:tcPr>
+                </a:tc>
+              </a:tr>
+            </a:tbl>
+          </a:graphicData>
+        </a:graphic>
+      </p:graphicFrame>
+      <p:sp>
+        <p:nvSpPr>
+          <p:cNvPr id="7" name="TextBox 6"/>
+          <p:cNvSpPr txBox="1"/>
+          <p:nvPr/>
+        </p:nvSpPr>
+        <p:spPr>
+          <a:xfrm>
+            <a:off x="6400800" y="3663695"/>
+            <a:ext cx="5394960" cy="274320"/>
+          </a:xfrm>
+          <a:prstGeom prst="rect">
+            <a:avLst/>
+          </a:prstGeom>
+          <a:noFill/>
+        </p:spPr>
+        <p:txBody>
+          <a:bodyPr wrap="square">
+            <a:spAutoFit/>
+          </a:bodyPr>
+          <a:lstStyle/>
+          <a:p>
+            <a:pPr>
+              <a:spcAft>
+                <a:spcPts val="600"/>
+              </a:spcAft>
+            </a:pPr>
+            <a:r>
+              <a:rPr sz="1200" b="0">
+                <a:solidFill>
+                  <a:srgbClr val="282828"/>
+                </a:solidFill>
+                <a:latin typeface="Arial"/>
+              </a:rPr>
+              <a:t>•  Charge 4 at a 0.80 stop dominates the band-limited mask in both depth and throughput; at 0.50 it reaches the apodized-pupil Lyot's class.</a:t>
             </a:r>
           </a:p>
         </p:txBody>
@@ -4669,7 +5081,7 @@
                 </a:solidFill>
                 <a:latin typeface="Arial"/>
               </a:rPr>
-              <a:t>Per-leg replay check</a:t>
+              <a:t>Bare-optics agreement, and the bench</a:t>
             </a:r>
           </a:p>
           <a:p>
@@ -4685,7 +5097,7 @@
                 </a:solidFill>
                 <a:latin typeface="Arial"/>
               </a:rPr>
-              <a:t>Every station reproduced when each leg starts from the exported field</a:t>
+              <a:t>The two prescriptions before any mask, and the geometric layout they share</a:t>
             </a:r>
           </a:p>
         </p:txBody>
@@ -4736,7 +5148,7 @@
       </p:sp>
       <p:pic>
         <p:nvPicPr>
-          <p:cNvPr id="4" name="Picture 3" descr="proper_ctb_check_s2s.png"/>
+          <p:cNvPr id="4" name="Picture 3" descr="ctb_coro_compare_bare.png"/>
           <p:cNvPicPr>
             <a:picLocks noChangeAspect="1"/>
           </p:cNvPicPr>
@@ -4750,8 +5162,8 @@
         </p:blipFill>
         <p:spPr>
           <a:xfrm>
-            <a:off x="3103244" y="1298448"/>
-            <a:ext cx="5985206" cy="2879852"/>
+            <a:off x="2658845" y="1298448"/>
+            <a:ext cx="1311708" cy="2788411"/>
           </a:xfrm>
           <a:prstGeom prst="rect">
             <a:avLst/>
@@ -4766,8 +5178,8 @@
         </p:nvSpPr>
         <p:spPr>
           <a:xfrm>
-            <a:off x="411480" y="4196588"/>
-            <a:ext cx="11368735" cy="229107"/>
+            <a:off x="411480" y="4105147"/>
+            <a:ext cx="5806440" cy="229107"/>
           </a:xfrm>
           <a:prstGeom prst="rect">
             <a:avLst/>
@@ -4792,7 +5204,70 @@
                 </a:solidFill>
                 <a:latin typeface="Arial"/>
               </a:rPr>
-              <a:t>Station-by-station intensity correlation, per-leg replay mode: focus stations at correlation 1.000000, gated pupils ≥ 0.9998; grey bars are ungated mid-beam planes.</a:t>
+              <a:t>Seven stations × two models, no masks: point images agree to 0.9989 correlation.</a:t>
+            </a:r>
+          </a:p>
+        </p:txBody>
+      </p:sp>
+      <p:pic>
+        <p:nvPicPr>
+          <p:cNvPr id="6" name="Picture 5" descr="ctb_planar_view_std.png"/>
+          <p:cNvPicPr>
+            <a:picLocks noChangeAspect="1"/>
+          </p:cNvPicPr>
+          <p:nvPr/>
+        </p:nvPicPr>
+        <p:blipFill>
+          <a:blip r:embed="rId3"/>
+          <a:stretch>
+            <a:fillRect/>
+          </a:stretch>
+        </p:blipFill>
+        <p:spPr>
+          <a:xfrm>
+            <a:off x="7415620" y="1298448"/>
+            <a:ext cx="3365318" cy="2348992"/>
+          </a:xfrm>
+          <a:prstGeom prst="rect">
+            <a:avLst/>
+          </a:prstGeom>
+        </p:spPr>
+      </p:pic>
+      <p:sp>
+        <p:nvSpPr>
+          <p:cNvPr id="7" name="TextBox 6"/>
+          <p:cNvSpPr txBox="1"/>
+          <p:nvPr/>
+        </p:nvSpPr>
+        <p:spPr>
+          <a:xfrm>
+            <a:off x="6400800" y="3665727"/>
+            <a:ext cx="5394960" cy="394208"/>
+          </a:xfrm>
+          <a:prstGeom prst="rect">
+            <a:avLst/>
+          </a:prstGeom>
+          <a:noFill/>
+        </p:spPr>
+        <p:txBody>
+          <a:bodyPr wrap="square">
+            <a:spAutoFit/>
+          </a:bodyPr>
+          <a:lstStyle/>
+          <a:p>
+            <a:pPr algn="ctr">
+              <a:spcAft>
+                <a:spcPts val="0"/>
+              </a:spcAft>
+            </a:pPr>
+            <a:r>
+              <a:rPr sz="1000" b="0">
+                <a:solidFill>
+                  <a:srgbClr val="6E6E6E"/>
+                </a:solidFill>
+                <a:latin typeface="Arial"/>
+              </a:rPr>
+              <a:t>The geometric bench: eight off-axis parabolas and two DMs, with the beam footprints the diffraction models inherit.</a:t>
             </a:r>
           </a:p>
         </p:txBody>
@@ -4849,6 +5324,186 @@
                 </a:solidFill>
                 <a:latin typeface="Arial"/>
               </a:rPr>
+              <a:t>Per-leg replay check</a:t>
+            </a:r>
+          </a:p>
+          <a:p>
+            <a:pPr>
+              <a:spcAft>
+                <a:spcPts val="0"/>
+              </a:spcAft>
+            </a:pPr>
+            <a:r>
+              <a:rPr sz="1250" b="0">
+                <a:solidFill>
+                  <a:srgbClr val="6E6E6E"/>
+                </a:solidFill>
+                <a:latin typeface="Arial"/>
+              </a:rPr>
+              <a:t>Every station reproduced when each leg starts from the exported field</a:t>
+            </a:r>
+          </a:p>
+        </p:txBody>
+      </p:sp>
+      <p:sp>
+        <p:nvSpPr>
+          <p:cNvPr id="3" name="Rectangle 2"/>
+          <p:cNvSpPr/>
+          <p:nvPr/>
+        </p:nvSpPr>
+        <p:spPr>
+          <a:xfrm>
+            <a:off x="411480" y="1133856"/>
+            <a:ext cx="11368735" cy="20320"/>
+          </a:xfrm>
+          <a:prstGeom prst="rect">
+            <a:avLst/>
+          </a:prstGeom>
+          <a:solidFill>
+            <a:srgbClr val="B8C6D4"/>
+          </a:solidFill>
+          <a:ln>
+            <a:noFill/>
+          </a:ln>
+          <a:effectLst/>
+        </p:spPr>
+        <p:style>
+          <a:lnRef idx="1">
+            <a:schemeClr val="accent1"/>
+          </a:lnRef>
+          <a:fillRef idx="3">
+            <a:schemeClr val="accent1"/>
+          </a:fillRef>
+          <a:effectRef idx="2">
+            <a:schemeClr val="accent1"/>
+          </a:effectRef>
+          <a:fontRef idx="minor">
+            <a:schemeClr val="lt1"/>
+          </a:fontRef>
+        </p:style>
+        <p:txBody>
+          <a:bodyPr rtlCol="0" anchor="ctr"/>
+          <a:lstStyle/>
+          <a:p>
+            <a:pPr algn="ctr"/>
+          </a:p>
+        </p:txBody>
+      </p:sp>
+      <p:pic>
+        <p:nvPicPr>
+          <p:cNvPr id="4" name="Picture 3" descr="proper_ctb_check_s2s.png"/>
+          <p:cNvPicPr>
+            <a:picLocks noChangeAspect="1"/>
+          </p:cNvPicPr>
+          <p:nvPr/>
+        </p:nvPicPr>
+        <p:blipFill>
+          <a:blip r:embed="rId2"/>
+          <a:stretch>
+            <a:fillRect/>
+          </a:stretch>
+        </p:blipFill>
+        <p:spPr>
+          <a:xfrm>
+            <a:off x="3103244" y="1298448"/>
+            <a:ext cx="5985206" cy="2879852"/>
+          </a:xfrm>
+          <a:prstGeom prst="rect">
+            <a:avLst/>
+          </a:prstGeom>
+        </p:spPr>
+      </p:pic>
+      <p:sp>
+        <p:nvSpPr>
+          <p:cNvPr id="5" name="TextBox 4"/>
+          <p:cNvSpPr txBox="1"/>
+          <p:nvPr/>
+        </p:nvSpPr>
+        <p:spPr>
+          <a:xfrm>
+            <a:off x="411480" y="4196588"/>
+            <a:ext cx="11368735" cy="229107"/>
+          </a:xfrm>
+          <a:prstGeom prst="rect">
+            <a:avLst/>
+          </a:prstGeom>
+          <a:noFill/>
+        </p:spPr>
+        <p:txBody>
+          <a:bodyPr wrap="square">
+            <a:spAutoFit/>
+          </a:bodyPr>
+          <a:lstStyle/>
+          <a:p>
+            <a:pPr algn="ctr">
+              <a:spcAft>
+                <a:spcPts val="0"/>
+              </a:spcAft>
+            </a:pPr>
+            <a:r>
+              <a:rPr sz="1000" b="0">
+                <a:solidFill>
+                  <a:srgbClr val="6E6E6E"/>
+                </a:solidFill>
+                <a:latin typeface="Arial"/>
+              </a:rPr>
+              <a:t>Station-by-station intensity correlation, per-leg replay mode: focus stations at correlation 1.000000, gated pupils ≥ 0.9998; grey bars are ungated mid-beam planes.</a:t>
+            </a:r>
+          </a:p>
+        </p:txBody>
+      </p:sp>
+    </p:spTree>
+  </p:cSld>
+  <p:clrMapOvr>
+    <a:masterClrMapping/>
+  </p:clrMapOvr>
+</p:sld>
+</file>
+
+<file path=ppt/slides/slide18.xml><?xml version="1.0" encoding="utf-8"?>
+<p:sld xmlns:a="http://schemas.openxmlformats.org/drawingml/2006/main" xmlns:p="http://schemas.openxmlformats.org/presentationml/2006/main" xmlns:r="http://schemas.openxmlformats.org/officeDocument/2006/relationships">
+  <p:cSld>
+    <p:spTree>
+      <p:nvGrpSpPr>
+        <p:cNvPr id="1" name=""/>
+        <p:cNvGrpSpPr/>
+        <p:nvPr/>
+      </p:nvGrpSpPr>
+      <p:grpSpPr/>
+      <p:sp>
+        <p:nvSpPr>
+          <p:cNvPr id="2" name="TextBox 1"/>
+          <p:cNvSpPr txBox="1"/>
+          <p:nvPr/>
+        </p:nvSpPr>
+        <p:spPr>
+          <a:xfrm>
+            <a:off x="411480" y="201168"/>
+            <a:ext cx="11368735" cy="914400"/>
+          </a:xfrm>
+          <a:prstGeom prst="rect">
+            <a:avLst/>
+          </a:prstGeom>
+          <a:noFill/>
+        </p:spPr>
+        <p:txBody>
+          <a:bodyPr wrap="square">
+            <a:spAutoFit/>
+          </a:bodyPr>
+          <a:lstStyle/>
+          <a:p>
+            <a:pPr>
+              <a:spcAft>
+                <a:spcPts val="400"/>
+              </a:spcAft>
+            </a:pPr>
+            <a:r>
+              <a:rPr sz="2400" b="1">
+                <a:solidFill>
+                  <a:srgbClr val="1F4E79"/>
+                </a:solidFill>
+                <a:latin typeface="Arial"/>
+              </a:rPr>
               <a:t>Control-loop diagnostics</a:t>
             </a:r>
           </a:p>
@@ -6317,7 +6972,7 @@
                 </a:solidFill>
                 <a:latin typeface="Arial"/>
               </a:rPr>
-              <a:t>The apodized-pupil Lyot design is a thousand times deeper than the hard edge; the vortex trades depth for three times the throughput</a:t>
+              <a:t>The apodized-pupil Lyot design is deepest; the pixel-averaged vortex is second, at three times its throughput</a:t>
             </a:r>
           </a:p>
         </p:txBody>
@@ -6416,7 +7071,7 @@
                 </a:solidFill>
                 <a:latin typeface="Arial"/>
               </a:rPr>
-              <a:t>•  All six score on one grid, one annulus (3–15 λ/D), one normalization — the hard occulter of slide 3 re-scored on this common footing.</a:t>
+              <a:t>•  All six score on one grid, one annulus (3–15 λ/D), one normalization — the hard occulter of slide 3 re-scored on this common footing. Every mask is generated at 8× sub-pixel resolution and binned to the model grid (area-average for amplitude, complex-average for phase).</a:t>
             </a:r>
           </a:p>
         </p:txBody>
@@ -6430,7 +7085,7 @@
           <p:nvPr/>
         </p:nvGraphicFramePr>
         <p:xfrm>
-          <a:off x="411480" y="3002280"/>
+          <a:off x="411480" y="3398519"/>
           <a:ext cx="5806438" cy="1960245"/>
         </p:xfrm>
         <a:graphic>
@@ -6593,142 +7248,6 @@
                           </a:solidFill>
                           <a:latin typeface="Arial"/>
                         </a:rPr>
-                        <a:t>band-limited (4th order)</a:t>
-                      </a:r>
-                    </a:p>
-                  </a:txBody>
-                  <a:tcPr marL="54864" marR="54864" marT="18288" marB="18288">
-                    <a:solidFill>
-                      <a:srgbClr val="ECF1F6"/>
-                    </a:solidFill>
-                  </a:tcPr>
-                </a:tc>
-                <a:tc>
-                  <a:txBody>
-                    <a:bodyPr wrap="square"/>
-                    <a:lstStyle/>
-                    <a:p>
-                      <a:r>
-                        <a:rPr sz="1100" b="0">
-                          <a:solidFill>
-                            <a:srgbClr val="282828"/>
-                          </a:solidFill>
-                          <a:latin typeface="Arial"/>
-                        </a:rPr>
-                        <a:t>2.7×10⁻⁸</a:t>
-                      </a:r>
-                    </a:p>
-                  </a:txBody>
-                  <a:tcPr marL="54864" marR="54864" marT="18288" marB="18288">
-                    <a:solidFill>
-                      <a:srgbClr val="ECF1F6"/>
-                    </a:solidFill>
-                  </a:tcPr>
-                </a:tc>
-                <a:tc>
-                  <a:txBody>
-                    <a:bodyPr wrap="square"/>
-                    <a:lstStyle/>
-                    <a:p>
-                      <a:r>
-                        <a:rPr sz="1100" b="0">
-                          <a:solidFill>
-                            <a:srgbClr val="282828"/>
-                          </a:solidFill>
-                          <a:latin typeface="Arial"/>
-                        </a:rPr>
-                        <a:t>36%</a:t>
-                      </a:r>
-                    </a:p>
-                  </a:txBody>
-                  <a:tcPr marL="54864" marR="54864" marT="18288" marB="18288">
-                    <a:solidFill>
-                      <a:srgbClr val="ECF1F6"/>
-                    </a:solidFill>
-                  </a:tcPr>
-                </a:tc>
-              </a:tr>
-              <a:tr h="280035">
-                <a:tc>
-                  <a:txBody>
-                    <a:bodyPr wrap="square"/>
-                    <a:lstStyle/>
-                    <a:p>
-                      <a:r>
-                        <a:rPr sz="1100" b="0">
-                          <a:solidFill>
-                            <a:srgbClr val="282828"/>
-                          </a:solidFill>
-                          <a:latin typeface="Arial"/>
-                        </a:rPr>
-                        <a:t>hard occulter</a:t>
-                      </a:r>
-                    </a:p>
-                  </a:txBody>
-                  <a:tcPr marL="54864" marR="54864" marT="18288" marB="18288">
-                    <a:solidFill>
-                      <a:srgbClr val="FFFFFF"/>
-                    </a:solidFill>
-                  </a:tcPr>
-                </a:tc>
-                <a:tc>
-                  <a:txBody>
-                    <a:bodyPr wrap="square"/>
-                    <a:lstStyle/>
-                    <a:p>
-                      <a:r>
-                        <a:rPr sz="1100" b="0">
-                          <a:solidFill>
-                            <a:srgbClr val="282828"/>
-                          </a:solidFill>
-                          <a:latin typeface="Arial"/>
-                        </a:rPr>
-                        <a:t>2.5×10⁻⁷</a:t>
-                      </a:r>
-                    </a:p>
-                  </a:txBody>
-                  <a:tcPr marL="54864" marR="54864" marT="18288" marB="18288">
-                    <a:solidFill>
-                      <a:srgbClr val="FFFFFF"/>
-                    </a:solidFill>
-                  </a:tcPr>
-                </a:tc>
-                <a:tc>
-                  <a:txBody>
-                    <a:bodyPr wrap="square"/>
-                    <a:lstStyle/>
-                    <a:p>
-                      <a:r>
-                        <a:rPr sz="1100" b="0">
-                          <a:solidFill>
-                            <a:srgbClr val="282828"/>
-                          </a:solidFill>
-                          <a:latin typeface="Arial"/>
-                        </a:rPr>
-                        <a:t>25%</a:t>
-                      </a:r>
-                    </a:p>
-                  </a:txBody>
-                  <a:tcPr marL="54864" marR="54864" marT="18288" marB="18288">
-                    <a:solidFill>
-                      <a:srgbClr val="FFFFFF"/>
-                    </a:solidFill>
-                  </a:tcPr>
-                </a:tc>
-              </a:tr>
-              <a:tr h="280035">
-                <a:tc>
-                  <a:txBody>
-                    <a:bodyPr wrap="square"/>
-                    <a:lstStyle/>
-                    <a:p>
-                      <a:r>
-                        <a:rPr sz="1100" b="0">
-                          <a:solidFill>
-                            <a:srgbClr val="282828"/>
-                          </a:solidFill>
-                          <a:latin typeface="Arial"/>
-                        </a:rPr>
                         <a:t>vortex, matched Lyot</a:t>
                       </a:r>
                     </a:p>
@@ -6751,7 +7270,7 @@
                           </a:solidFill>
                           <a:latin typeface="Arial"/>
                         </a:rPr>
-                        <a:t>2.9×10⁻⁷</a:t>
+                        <a:t>1.4×10⁻⁸</a:t>
                       </a:r>
                     </a:p>
                   </a:txBody>
@@ -6797,6 +7316,142 @@
                           </a:solidFill>
                           <a:latin typeface="Arial"/>
                         </a:rPr>
+                        <a:t>band-limited (4th order)</a:t>
+                      </a:r>
+                    </a:p>
+                  </a:txBody>
+                  <a:tcPr marL="54864" marR="54864" marT="18288" marB="18288">
+                    <a:solidFill>
+                      <a:srgbClr val="FFFFFF"/>
+                    </a:solidFill>
+                  </a:tcPr>
+                </a:tc>
+                <a:tc>
+                  <a:txBody>
+                    <a:bodyPr wrap="square"/>
+                    <a:lstStyle/>
+                    <a:p>
+                      <a:r>
+                        <a:rPr sz="1100" b="0">
+                          <a:solidFill>
+                            <a:srgbClr val="282828"/>
+                          </a:solidFill>
+                          <a:latin typeface="Arial"/>
+                        </a:rPr>
+                        <a:t>2.7×10⁻⁸</a:t>
+                      </a:r>
+                    </a:p>
+                  </a:txBody>
+                  <a:tcPr marL="54864" marR="54864" marT="18288" marB="18288">
+                    <a:solidFill>
+                      <a:srgbClr val="FFFFFF"/>
+                    </a:solidFill>
+                  </a:tcPr>
+                </a:tc>
+                <a:tc>
+                  <a:txBody>
+                    <a:bodyPr wrap="square"/>
+                    <a:lstStyle/>
+                    <a:p>
+                      <a:r>
+                        <a:rPr sz="1100" b="0">
+                          <a:solidFill>
+                            <a:srgbClr val="282828"/>
+                          </a:solidFill>
+                          <a:latin typeface="Arial"/>
+                        </a:rPr>
+                        <a:t>36%</a:t>
+                      </a:r>
+                    </a:p>
+                  </a:txBody>
+                  <a:tcPr marL="54864" marR="54864" marT="18288" marB="18288">
+                    <a:solidFill>
+                      <a:srgbClr val="FFFFFF"/>
+                    </a:solidFill>
+                  </a:tcPr>
+                </a:tc>
+              </a:tr>
+              <a:tr h="280035">
+                <a:tc>
+                  <a:txBody>
+                    <a:bodyPr wrap="square"/>
+                    <a:lstStyle/>
+                    <a:p>
+                      <a:r>
+                        <a:rPr sz="1100" b="0">
+                          <a:solidFill>
+                            <a:srgbClr val="282828"/>
+                          </a:solidFill>
+                          <a:latin typeface="Arial"/>
+                        </a:rPr>
+                        <a:t>hard occulter</a:t>
+                      </a:r>
+                    </a:p>
+                  </a:txBody>
+                  <a:tcPr marL="54864" marR="54864" marT="18288" marB="18288">
+                    <a:solidFill>
+                      <a:srgbClr val="ECF1F6"/>
+                    </a:solidFill>
+                  </a:tcPr>
+                </a:tc>
+                <a:tc>
+                  <a:txBody>
+                    <a:bodyPr wrap="square"/>
+                    <a:lstStyle/>
+                    <a:p>
+                      <a:r>
+                        <a:rPr sz="1100" b="0">
+                          <a:solidFill>
+                            <a:srgbClr val="282828"/>
+                          </a:solidFill>
+                          <a:latin typeface="Arial"/>
+                        </a:rPr>
+                        <a:t>2.5×10⁻⁷</a:t>
+                      </a:r>
+                    </a:p>
+                  </a:txBody>
+                  <a:tcPr marL="54864" marR="54864" marT="18288" marB="18288">
+                    <a:solidFill>
+                      <a:srgbClr val="ECF1F6"/>
+                    </a:solidFill>
+                  </a:tcPr>
+                </a:tc>
+                <a:tc>
+                  <a:txBody>
+                    <a:bodyPr wrap="square"/>
+                    <a:lstStyle/>
+                    <a:p>
+                      <a:r>
+                        <a:rPr sz="1100" b="0">
+                          <a:solidFill>
+                            <a:srgbClr val="282828"/>
+                          </a:solidFill>
+                          <a:latin typeface="Arial"/>
+                        </a:rPr>
+                        <a:t>25%</a:t>
+                      </a:r>
+                    </a:p>
+                  </a:txBody>
+                  <a:tcPr marL="54864" marR="54864" marT="18288" marB="18288">
+                    <a:solidFill>
+                      <a:srgbClr val="ECF1F6"/>
+                    </a:solidFill>
+                  </a:tcPr>
+                </a:tc>
+              </a:tr>
+              <a:tr h="280035">
+                <a:tc>
+                  <a:txBody>
+                    <a:bodyPr wrap="square"/>
+                    <a:lstStyle/>
+                    <a:p>
+                      <a:r>
+                        <a:rPr sz="1100" b="0">
+                          <a:solidFill>
+                            <a:srgbClr val="282828"/>
+                          </a:solidFill>
+                          <a:latin typeface="Arial"/>
+                        </a:rPr>
                         <a:t>Roddier π-mask</a:t>
                       </a:r>
                     </a:p>
@@ -6819,7 +7474,7 @@
                           </a:solidFill>
                           <a:latin typeface="Arial"/>
                         </a:rPr>
-                        <a:t>3.2×10⁻⁶</a:t>
+                        <a:t>2.4×10⁻⁶</a:t>
                       </a:r>
                     </a:p>
                   </a:txBody>
@@ -6887,7 +7542,7 @@
                           </a:solidFill>
                           <a:latin typeface="Arial"/>
                         </a:rPr>
-                        <a:t>6.4×10⁻⁶</a:t>
+                        <a:t>6.8×10⁻⁶</a:t>
                       </a:r>
                     </a:p>
                   </a:txBody>
@@ -6932,7 +7587,7 @@
         </p:nvSpPr>
         <p:spPr>
           <a:xfrm>
-            <a:off x="411480" y="5108829"/>
+            <a:off x="411480" y="5505069"/>
             <a:ext cx="5806440" cy="274320"/>
           </a:xfrm>
           <a:prstGeom prst="rect">
@@ -6958,23 +7613,7 @@
                 </a:solidFill>
                 <a:latin typeface="Arial"/>
               </a:rPr>
-              <a:t>•  The vortex finding: an ideal vortex mask (a spiral phase; even winding number) on an unobstructed pupil sends the starlight outside the pupil entirely, so the Lyot stop opens to 90% — 3.2× the throughput of the earlier configuration (which had left the apodizer in and the Lyot undersized, and saw only a fraction of the effect).</a:t>
-            </a:r>
-          </a:p>
-          <a:p>
-            <a:pPr>
-              <a:spcAft>
-                <a:spcPts val="600"/>
-              </a:spcAft>
-            </a:pPr>
-            <a:r>
-              <a:rPr sz="1200" b="0">
-                <a:solidFill>
-                  <a:srgbClr val="282828"/>
-                </a:solidFill>
-                <a:latin typeface="Arial"/>
-              </a:rPr>
-              <a:t>•  The two phase masks are shallow here by physics, not by defect: both need their matched entrance-pupil apodizer to go deep, which is recorded in the mask builders.</a:t>
+              <a:t>•  The vortex row moved 21×: the direct-sampled mask's singular core — mis-phased pixels on the stellar image core, a sampling artifact, not vortex physics — had floored it at 2.9×10⁻⁷. Pixel-averaging cures it, and the Lyot becomes a real depth dial: charge 4 reaches 6.6×10⁻¹¹ at a 0.50 stop — apodized-pupil-Lyot class at the same 25% throughput. Full diagnosis in backup.</a:t>
             </a:r>
           </a:p>
         </p:txBody>
@@ -6995,8 +7634,8 @@
         </p:blipFill>
         <p:spPr>
           <a:xfrm>
-            <a:off x="6559510" y="1298448"/>
-            <a:ext cx="5077539" cy="2714752"/>
+            <a:off x="6720188" y="1298448"/>
+            <a:ext cx="4756183" cy="2549652"/>
           </a:xfrm>
           <a:prstGeom prst="rect">
             <a:avLst/>
@@ -7011,8 +7650,8 @@
         </p:nvSpPr>
         <p:spPr>
           <a:xfrm>
-            <a:off x="6400800" y="4031488"/>
-            <a:ext cx="5394960" cy="394208"/>
+            <a:off x="6400800" y="3866387"/>
+            <a:ext cx="5394960" cy="559307"/>
           </a:xfrm>
           <a:prstGeom prst="rect">
             <a:avLst/>
@@ -7037,7 +7676,7 @@
                 </a:solidFill>
                 <a:latin typeface="Arial"/>
               </a:rPr>
-              <a:t>Contrast against throughput for all six families — lower-right is better; the apodized-pupil Lyot stands three decades below the hard edge.</a:t>
+              <a:t>Contrast against throughput for all six families — lower-right is better; the apodized-pupil Lyot deepest, the pixel-averaged vortex second at three times its throughput.</a:t>
             </a:r>
           </a:p>
         </p:txBody>

--- a/mmacos/templates/30_instruments/bench_ctb/deck_ctb.pptx
+++ b/mmacos/templates/30_instruments/bench_ctb/deck_ctb.pptx
@@ -23,6 +23,7 @@
     <p:sldId id="271" r:id="rId22"/>
     <p:sldId id="272" r:id="rId23"/>
     <p:sldId id="273" r:id="rId24"/>
+    <p:sldId id="274" r:id="rId25"/>
   </p:sldIdLst>
   <p:sldSz cx="12191695" cy="6858000" type="screen4x3"/>
   <p:notesSz cx="6858000" cy="9144000"/>
@@ -3267,7 +3268,7 @@
                 </a:solidFill>
                 <a:latin typeface="Arial"/>
               </a:rPr>
-              <a:t>9 — Next</a:t>
+              <a:t>9 — The deformable mirrors close the loop</a:t>
             </a:r>
           </a:p>
           <a:p>
@@ -3283,7 +3284,7 @@
                 </a:solidFill>
                 <a:latin typeface="Arial"/>
               </a:rPr>
-              <a:t>Toward a real coronagraph model, in dependency order</a:t>
+              <a:t>Electric-field conjugation on the model itself: dark-zone mean 2.9×10⁻⁷ → 8.1×10⁻⁹ (36×) at 10 nm strokes</a:t>
             </a:r>
           </a:p>
         </p:txBody>
@@ -3341,7 +3342,7 @@
         <p:spPr>
           <a:xfrm>
             <a:off x="411480" y="1298448"/>
-            <a:ext cx="11368735" cy="274320"/>
+            <a:ext cx="5806440" cy="274320"/>
           </a:xfrm>
           <a:prstGeom prst="rect">
             <a:avLst/>
@@ -3366,7 +3367,7 @@
                 </a:solidFill>
                 <a:latin typeface="Arial"/>
               </a:rPr>
-              <a:t>•  Real mirror surfaces. Add measured-quality surface error maps to each of the eight parabolas — random roughness with realistic spatial statistics — so the model scatters light the way real optics do.</a:t>
+              <a:t>•  The DMs become controllable surfaces: each carries a 256-point displacement grid in its own element frame, driven by a 32×32 actuator lattice through Gaussian influence functions (12% nearest-neighbor coupling, 0.67 mm pitch = beam/32; 880 actuators of each DM sit inside the beam).</a:t>
             </a:r>
           </a:p>
           <a:p>
@@ -3382,55 +3383,7 @@
                 </a:solidFill>
                 <a:latin typeface="Arial"/>
               </a:rPr>
-              <a:t>•  Deeper control. The native loop is delivered (slide 8); next come re-measuring the control matrix around the corrected state, image-based field estimation (pairwise probing), and driving the same DMs with FALCO, the community's standard wavefront-control software — the hybrid Lyot mask enters there, since its design comes from that control loop.</a:t>
-            </a:r>
-          </a:p>
-          <a:p>
-            <a:pPr>
-              <a:spcAft>
-                <a:spcPts val="600"/>
-              </a:spcAft>
-            </a:pPr>
-            <a:r>
-              <a:rPr sz="1200" b="0">
-                <a:solidFill>
-                  <a:srgbClr val="282828"/>
-                </a:solidFill>
-                <a:latin typeface="Arial"/>
-              </a:rPr>
-              <a:t>•  Motion over time. Apply alignment drifts as a time series and report contrast versus time — how long the dark zone survives between corrections, now measurable against the delivered control loop.</a:t>
-            </a:r>
-          </a:p>
-          <a:p>
-            <a:pPr>
-              <a:spcAft>
-                <a:spcPts val="600"/>
-              </a:spcAft>
-            </a:pPr>
-            <a:r>
-              <a:rPr sz="1200" b="0">
-                <a:solidFill>
-                  <a:srgbClr val="282828"/>
-                </a:solidFill>
-                <a:latin typeface="Arial"/>
-              </a:rPr>
-              <a:t>•  Polarized light. Propagate the two polarization components separately, with the phase and amplitude changes each mirror coating imposes; polarization sets the contrast floor no deformable mirror can correct.</a:t>
-            </a:r>
-          </a:p>
-          <a:p>
-            <a:pPr>
-              <a:spcAft>
-                <a:spcPts val="600"/>
-              </a:spcAft>
-            </a:pPr>
-            <a:r>
-              <a:rPr sz="1200" b="0">
-                <a:solidFill>
-                  <a:srgbClr val="282828"/>
-                </a:solidFill>
-                <a:latin typeface="Arial"/>
-              </a:rPr>
-              <a:t>•  Validation against testbed data — the capstone. Needs a named dataset from a real bench and the measured (not design) parameters that produced it.</a:t>
+              <a:t>•  The control matrix is measured, not modeled: every actuator is poked 2 nm and propagated through the full masked chain — 1760 pokes, 11 minutes — so the correction solve has no model error to exploit. Each iteration re-propagates the model, scores the measured contrast, picks the regularization by that measurement, and stops itself when no step improves.</a:t>
             </a:r>
           </a:p>
         </p:txBody>
@@ -3443,8 +3396,8 @@
         </p:nvSpPr>
         <p:spPr>
           <a:xfrm>
-            <a:off x="411480" y="4017264"/>
-            <a:ext cx="11368735" cy="274320"/>
+            <a:off x="6400800" y="1298448"/>
+            <a:ext cx="5394960" cy="274320"/>
           </a:xfrm>
           <a:prstGeom prst="rect">
             <a:avLst/>
@@ -3463,13 +3416,131 @@
               </a:spcAft>
             </a:pPr>
             <a:r>
+              <a:rPr sz="1200" b="0">
+                <a:solidFill>
+                  <a:srgbClr val="282828"/>
+                </a:solidFill>
+                <a:latin typeface="Arial"/>
+              </a:rPr>
+              <a:t>•  Result: 2.9×10⁻⁷ → 8.1×10⁻⁹ (36×) in 19 iterations at 9.9/8.6 nm rms surface stroke. The best any linear solve of the measured matrix can reach is 4.5×10⁻⁹ at 11 nm — the loop lands within 2× of that with a matrix measured once at the flat state; re-measuring it around the corrected state is the next depth increment. Restricted to DM1 alone, the same loop stalls at 1.3×10⁻⁷ (2.3×): the pupil mirror is phase-only control, and the full annulus also needs the amplitude lever the out-of-pupil DM2 supplies.</a:t>
+            </a:r>
+          </a:p>
+          <a:p>
+            <a:pPr>
+              <a:spcAft>
+                <a:spcPts val="600"/>
+              </a:spcAft>
+            </a:pPr>
+            <a:r>
+              <a:rPr sz="1200" b="0">
+                <a:solidFill>
+                  <a:srgbClr val="282828"/>
+                </a:solidFill>
+                <a:latin typeface="Arial"/>
+              </a:rPr>
+              <a:t>•  Where the correction works hardest: with the 50% Lyot stop, 32 actuators steer light cleanly to about 8 λ/D on the final image scale — the inner half of the zone deepens 40×, the outer 25×, and the largest strokes ring the Lyot edge image on the mirror.</a:t>
+            </a:r>
+          </a:p>
+        </p:txBody>
+      </p:sp>
+      <p:pic>
+        <p:nvPicPr>
+          <p:cNvPr id="6" name="Picture 5" descr="ctb_efc.png"/>
+          <p:cNvPicPr>
+            <a:picLocks noChangeAspect="1"/>
+          </p:cNvPicPr>
+          <p:nvPr/>
+        </p:nvPicPr>
+        <p:blipFill>
+          <a:blip r:embed="rId2"/>
+          <a:stretch>
+            <a:fillRect/>
+          </a:stretch>
+        </p:blipFill>
+        <p:spPr>
+          <a:xfrm>
+            <a:off x="2682799" y="3992879"/>
+            <a:ext cx="6826095" cy="1526032"/>
+          </a:xfrm>
+          <a:prstGeom prst="rect">
+            <a:avLst/>
+          </a:prstGeom>
+        </p:spPr>
+      </p:pic>
+      <p:sp>
+        <p:nvSpPr>
+          <p:cNvPr id="7" name="TextBox 6"/>
+          <p:cNvSpPr txBox="1"/>
+          <p:nvPr/>
+        </p:nvSpPr>
+        <p:spPr>
+          <a:xfrm>
+            <a:off x="411480" y="5537200"/>
+            <a:ext cx="11368735" cy="394208"/>
+          </a:xfrm>
+          <a:prstGeom prst="rect">
+            <a:avLst/>
+          </a:prstGeom>
+          <a:noFill/>
+        </p:spPr>
+        <p:txBody>
+          <a:bodyPr wrap="square">
+            <a:spAutoFit/>
+          </a:bodyPr>
+          <a:lstStyle/>
+          <a:p>
+            <a:pPr algn="ctr">
+              <a:spcAft>
+                <a:spcPts val="0"/>
+              </a:spcAft>
+            </a:pPr>
+            <a:r>
+              <a:rPr sz="1000" b="0">
+                <a:solidFill>
+                  <a:srgbClr val="6E6E6E"/>
+                </a:solidFill>
+                <a:latin typeface="Arial"/>
+              </a:rPr>
+              <a:t>Before and after at the camera; contrast versus iteration, with the DM1-only loop overlaid stalling two decades short; the stroke maps commanded on both DMs. Dashed circles mark the 3–15 λ/D zone.</a:t>
+            </a:r>
+          </a:p>
+        </p:txBody>
+      </p:sp>
+      <p:sp>
+        <p:nvSpPr>
+          <p:cNvPr id="8" name="TextBox 7"/>
+          <p:cNvSpPr txBox="1"/>
+          <p:nvPr/>
+        </p:nvSpPr>
+        <p:spPr>
+          <a:xfrm>
+            <a:off x="411480" y="5967984"/>
+            <a:ext cx="11368735" cy="274320"/>
+          </a:xfrm>
+          <a:prstGeom prst="rect">
+            <a:avLst/>
+          </a:prstGeom>
+          <a:noFill/>
+        </p:spPr>
+        <p:txBody>
+          <a:bodyPr wrap="square">
+            <a:spAutoFit/>
+          </a:bodyPr>
+          <a:lstStyle/>
+          <a:p>
+            <a:pPr>
+              <a:spcAft>
+                <a:spcPts val="600"/>
+              </a:spcAft>
+            </a:pPr>
+            <a:r>
               <a:rPr sz="1050" b="0">
                 <a:solidFill>
                   <a:srgbClr val="6E6E6E"/>
                 </a:solidFill>
                 <a:latin typeface="Arial"/>
               </a:rPr>
-              <a:t>Mechanical layer delivered and merged: a prescription generator that reproduces both hand-built models to round-off, regression tests pinning the validated numbers (two suites, 16 checks green), the example README, and the exit-pupil-finder guard in the engine (pushed).</a:t>
+              <a:t>Sensing is assumed perfect — the loop reads the model's complex field directly. Estimating that field from camera images alone (pairwise probing, as a testbed must) is the next layer of realism.</a:t>
             </a:r>
           </a:p>
         </p:txBody>
@@ -3526,7 +3597,7 @@
                 </a:solidFill>
                 <a:latin typeface="Arial"/>
               </a:rPr>
-              <a:t>10 — References</a:t>
+              <a:t>10 — Next</a:t>
             </a:r>
           </a:p>
           <a:p>
@@ -3542,7 +3613,7 @@
                 </a:solidFill>
                 <a:latin typeface="Arial"/>
               </a:rPr>
-              <a:t>Sources for the mask families and the control method; every formula taken from the paper itself</a:t>
+              <a:t>Toward a real coronagraph model, in dependency order</a:t>
             </a:r>
           </a:p>
         </p:txBody>
@@ -3625,7 +3696,7 @@
                 </a:solidFill>
                 <a:latin typeface="Arial"/>
               </a:rPr>
-              <a:t>•  Band-limited masks: Kuchner &amp; Traub 2002, ApJ 570, 900 (4th order); Kuchner, Crepp &amp; Ge 2005, ApJ 628, 466 (8th order).</a:t>
+              <a:t>•  Real mirror surfaces. Add measured-quality surface error maps to each of the eight parabolas — random roughness with realistic spatial statistics — so the model scatters light the way real optics do.</a:t>
             </a:r>
           </a:p>
           <a:p>
@@ -3641,7 +3712,7 @@
                 </a:solidFill>
                 <a:latin typeface="Arial"/>
               </a:rPr>
-              <a:t>•  Apodized-pupil Lyot: Soummer 2005, ApJ 618, L161 (the prolate apodizer); Soummer et al. 2011, ApJ 729, 144 (the GPI instrument configuration used here).</a:t>
+              <a:t>•  Deeper control. The native loop is delivered (slide 9); next come re-measuring the control matrix around the corrected state, image-based field estimation (pairwise probing), and driving the same DMs with FALCO, the community's standard wavefront-control software — the hybrid Lyot mask enters there, since its design comes from that control loop.</a:t>
             </a:r>
           </a:p>
           <a:p>
@@ -3657,7 +3728,7 @@
                 </a:solidFill>
                 <a:latin typeface="Arial"/>
               </a:rPr>
-              <a:t>•  Phase masks: Roddier &amp; Roddier 1997, PASP 109, 815 (the π-spot); N'Diaye et al. 2012, A&amp;A 538, A55 (the achromatic dual-zone); Soummer, Dohlen &amp; Aime 2003, A&amp;A 403, 369.</a:t>
+              <a:t>•  Motion over time. Apply alignment drifts as a time series and report contrast versus time — how long the dark zone survives between corrections, now measurable against the delivered control loop.</a:t>
             </a:r>
           </a:p>
           <a:p>
@@ -3673,7 +3744,7 @@
                 </a:solidFill>
                 <a:latin typeface="Arial"/>
               </a:rPr>
-              <a:t>•  Vortex: Mawet et al. 2005, ApJ 633, 1191; Foo, Palacios &amp; Swartzlander 2005, Opt. Lett. 30, 3308; Jenkins 2008, MNRAS 384, 515 (the even-charge rejection property).</a:t>
+              <a:t>•  Polarized light. Propagate the two polarization components separately, with the phase and amplitude changes each mirror coating imposes; polarization sets the contrast floor no deformable mirror can correct.</a:t>
             </a:r>
           </a:p>
           <a:p>
@@ -3689,23 +3760,7 @@
                 </a:solidFill>
                 <a:latin typeface="Arial"/>
               </a:rPr>
-              <a:t>•  Wavefront control: Give'on et al. 2007, Proc. SPIE 6691 (electric-field conjugation, the correction solve of slide 8).</a:t>
-            </a:r>
-          </a:p>
-          <a:p>
-            <a:pPr>
-              <a:spcAft>
-                <a:spcPts val="600"/>
-              </a:spcAft>
-            </a:pPr>
-            <a:r>
-              <a:rPr sz="1200" b="0">
-                <a:solidFill>
-                  <a:srgbClr val="282828"/>
-                </a:solidFill>
-                <a:latin typeface="Arial"/>
-              </a:rPr>
-              <a:t>•  Diffraction reference code: PROPER — Krist 2007, Proc. SPIE 6675 (the arbiter for every propagation cross-check in this deck).</a:t>
+              <a:t>•  Validation against testbed data — the capstone. Needs a named dataset from a real bench and the measured (not design) parameters that produced it.</a:t>
             </a:r>
           </a:p>
         </p:txBody>
@@ -3718,7 +3773,7 @@
         </p:nvSpPr>
         <p:spPr>
           <a:xfrm>
-            <a:off x="411480" y="3959352"/>
+            <a:off x="411480" y="4017264"/>
             <a:ext cx="11368735" cy="274320"/>
           </a:xfrm>
           <a:prstGeom prst="rect">
@@ -3744,7 +3799,7 @@
                 </a:solidFill>
                 <a:latin typeface="Arial"/>
               </a:rPr>
-              <a:t>A companion three-slide deck (ctb_mask_families, committed beside the drivers) carries the code map: which script builds which mask, and the parameters a user can change.</a:t>
+              <a:t>Mechanical layer delivered and merged: a prescription generator that reproduces both hand-built models to round-off, regression tests pinning the validated numbers (two suites, 16 checks green), the example README, and the exit-pupil-finder guard in the engine (pushed).</a:t>
             </a:r>
           </a:p>
         </p:txBody>
@@ -3801,7 +3856,23 @@
                 </a:solidFill>
                 <a:latin typeface="Arial"/>
               </a:rPr>
-              <a:t>Backup Slides</a:t>
+              <a:t>11 — References</a:t>
+            </a:r>
+          </a:p>
+          <a:p>
+            <a:pPr>
+              <a:spcAft>
+                <a:spcPts val="0"/>
+              </a:spcAft>
+            </a:pPr>
+            <a:r>
+              <a:rPr sz="1250" b="0">
+                <a:solidFill>
+                  <a:srgbClr val="6E6E6E"/>
+                </a:solidFill>
+                <a:latin typeface="Arial"/>
+              </a:rPr>
+              <a:t>Sources for the mask families and the control method; every formula taken from the paper itself</a:t>
             </a:r>
           </a:p>
         </p:txBody>
@@ -3814,7 +3885,7 @@
         </p:nvSpPr>
         <p:spPr>
           <a:xfrm>
-            <a:off x="411480" y="914400"/>
+            <a:off x="411480" y="1133856"/>
             <a:ext cx="11368735" cy="20320"/>
           </a:xfrm>
           <a:prstGeom prst="rect">
@@ -3858,7 +3929,7 @@
         </p:nvSpPr>
         <p:spPr>
           <a:xfrm>
-            <a:off x="411480" y="1078992"/>
+            <a:off x="411480" y="1298448"/>
             <a:ext cx="11368735" cy="274320"/>
           </a:xfrm>
           <a:prstGeom prst="rect">
@@ -3884,7 +3955,126 @@
                 </a:solidFill>
                 <a:latin typeface="Arial"/>
               </a:rPr>
-              <a:t>•  Galleries, per-family detail, the per-leg replay check, and the control-loop diagnostics.</a:t>
+              <a:t>•  Band-limited masks: Kuchner &amp; Traub 2002, ApJ 570, 900 (4th order); Kuchner, Crepp &amp; Ge 2005, ApJ 628, 466 (8th order).</a:t>
+            </a:r>
+          </a:p>
+          <a:p>
+            <a:pPr>
+              <a:spcAft>
+                <a:spcPts val="600"/>
+              </a:spcAft>
+            </a:pPr>
+            <a:r>
+              <a:rPr sz="1200" b="0">
+                <a:solidFill>
+                  <a:srgbClr val="282828"/>
+                </a:solidFill>
+                <a:latin typeface="Arial"/>
+              </a:rPr>
+              <a:t>•  Apodized-pupil Lyot: Soummer 2005, ApJ 618, L161 (the prolate apodizer); Soummer et al. 2011, ApJ 729, 144 (the GPI instrument configuration used here).</a:t>
+            </a:r>
+          </a:p>
+          <a:p>
+            <a:pPr>
+              <a:spcAft>
+                <a:spcPts val="600"/>
+              </a:spcAft>
+            </a:pPr>
+            <a:r>
+              <a:rPr sz="1200" b="0">
+                <a:solidFill>
+                  <a:srgbClr val="282828"/>
+                </a:solidFill>
+                <a:latin typeface="Arial"/>
+              </a:rPr>
+              <a:t>•  Phase masks: Roddier &amp; Roddier 1997, PASP 109, 815 (the π-spot); N'Diaye et al. 2012, A&amp;A 538, A55 (the achromatic dual-zone); Soummer, Dohlen &amp; Aime 2003, A&amp;A 403, 369.</a:t>
+            </a:r>
+          </a:p>
+          <a:p>
+            <a:pPr>
+              <a:spcAft>
+                <a:spcPts val="600"/>
+              </a:spcAft>
+            </a:pPr>
+            <a:r>
+              <a:rPr sz="1200" b="0">
+                <a:solidFill>
+                  <a:srgbClr val="282828"/>
+                </a:solidFill>
+                <a:latin typeface="Arial"/>
+              </a:rPr>
+              <a:t>•  Vortex: Mawet et al. 2005, ApJ 633, 1191; Foo, Palacios &amp; Swartzlander 2005, Opt. Lett. 30, 3308; Jenkins 2008, MNRAS 384, 515 (the even-charge rejection property).</a:t>
+            </a:r>
+          </a:p>
+          <a:p>
+            <a:pPr>
+              <a:spcAft>
+                <a:spcPts val="600"/>
+              </a:spcAft>
+            </a:pPr>
+            <a:r>
+              <a:rPr sz="1200" b="0">
+                <a:solidFill>
+                  <a:srgbClr val="282828"/>
+                </a:solidFill>
+                <a:latin typeface="Arial"/>
+              </a:rPr>
+              <a:t>•  Wavefront control: Give'on et al. 2007, Proc. SPIE 6691 (electric-field conjugation, the correction solve of slide 9).</a:t>
+            </a:r>
+          </a:p>
+          <a:p>
+            <a:pPr>
+              <a:spcAft>
+                <a:spcPts val="600"/>
+              </a:spcAft>
+            </a:pPr>
+            <a:r>
+              <a:rPr sz="1200" b="0">
+                <a:solidFill>
+                  <a:srgbClr val="282828"/>
+                </a:solidFill>
+                <a:latin typeface="Arial"/>
+              </a:rPr>
+              <a:t>•  Diffraction reference code: PROPER — Krist 2007, Proc. SPIE 6675 (the arbiter for every propagation cross-check in this deck).</a:t>
+            </a:r>
+          </a:p>
+        </p:txBody>
+      </p:sp>
+      <p:sp>
+        <p:nvSpPr>
+          <p:cNvPr id="5" name="TextBox 4"/>
+          <p:cNvSpPr txBox="1"/>
+          <p:nvPr/>
+        </p:nvSpPr>
+        <p:spPr>
+          <a:xfrm>
+            <a:off x="411480" y="3959352"/>
+            <a:ext cx="11368735" cy="274320"/>
+          </a:xfrm>
+          <a:prstGeom prst="rect">
+            <a:avLst/>
+          </a:prstGeom>
+          <a:noFill/>
+        </p:spPr>
+        <p:txBody>
+          <a:bodyPr wrap="square">
+            <a:spAutoFit/>
+          </a:bodyPr>
+          <a:lstStyle/>
+          <a:p>
+            <a:pPr>
+              <a:spcAft>
+                <a:spcPts val="600"/>
+              </a:spcAft>
+            </a:pPr>
+            <a:r>
+              <a:rPr sz="1050" b="0">
+                <a:solidFill>
+                  <a:srgbClr val="6E6E6E"/>
+                </a:solidFill>
+                <a:latin typeface="Arial"/>
+              </a:rPr>
+              <a:t>A companion three-slide deck (ctb_mask_families, committed beside the drivers) carries the code map: which script builds which mask, and the parameters a user can change.</a:t>
             </a:r>
           </a:p>
         </p:txBody>
@@ -3941,23 +4131,7 @@
                 </a:solidFill>
                 <a:latin typeface="Arial"/>
               </a:rPr>
-              <a:t>The mask families, one by one (1 of 2)</a:t>
-            </a:r>
-          </a:p>
-          <a:p>
-            <a:pPr>
-              <a:spcAft>
-                <a:spcPts val="0"/>
-              </a:spcAft>
-            </a:pPr>
-            <a:r>
-              <a:rPr sz="1250" b="0">
-                <a:solidFill>
-                  <a:srgbClr val="6E6E6E"/>
-                </a:solidFill>
-                <a:latin typeface="Arial"/>
-              </a:rPr>
-              <a:t>Apodized-pupil Lyot and band-limited</a:t>
+              <a:t>Backup Slides</a:t>
             </a:r>
           </a:p>
         </p:txBody>
@@ -3970,7 +4144,7 @@
         </p:nvSpPr>
         <p:spPr>
           <a:xfrm>
-            <a:off x="411480" y="1133856"/>
+            <a:off x="411480" y="914400"/>
             <a:ext cx="11368735" cy="20320"/>
           </a:xfrm>
           <a:prstGeom prst="rect">
@@ -4006,40 +4180,16 @@
           </a:p>
         </p:txBody>
       </p:sp>
-      <p:pic>
-        <p:nvPicPr>
-          <p:cNvPr id="4" name="Picture 3" descr="ctb_aplc.png"/>
-          <p:cNvPicPr>
-            <a:picLocks noChangeAspect="1"/>
-          </p:cNvPicPr>
-          <p:nvPr/>
-        </p:nvPicPr>
-        <p:blipFill>
-          <a:blip r:embed="rId2"/>
-          <a:stretch>
-            <a:fillRect/>
-          </a:stretch>
-        </p:blipFill>
-        <p:spPr>
-          <a:xfrm>
-            <a:off x="1404046" y="1298448"/>
-            <a:ext cx="3821307" cy="2440432"/>
-          </a:xfrm>
-          <a:prstGeom prst="rect">
-            <a:avLst/>
-          </a:prstGeom>
-        </p:spPr>
-      </p:pic>
-      <p:sp>
-        <p:nvSpPr>
-          <p:cNvPr id="5" name="TextBox 4"/>
+      <p:sp>
+        <p:nvSpPr>
+          <p:cNvPr id="4" name="TextBox 3"/>
           <p:cNvSpPr txBox="1"/>
           <p:nvPr/>
         </p:nvSpPr>
         <p:spPr>
           <a:xfrm>
-            <a:off x="411480" y="3757167"/>
-            <a:ext cx="5806440" cy="394208"/>
+            <a:off x="411480" y="1078992"/>
+            <a:ext cx="11368735" cy="274320"/>
           </a:xfrm>
           <a:prstGeom prst="rect">
             <a:avLst/>
@@ -4052,82 +4202,19 @@
           </a:bodyPr>
           <a:lstStyle/>
           <a:p>
-            <a:pPr algn="ctr">
-              <a:spcAft>
-                <a:spcPts val="0"/>
-              </a:spcAft>
-            </a:pPr>
-            <a:r>
-              <a:rPr sz="1000" b="0">
-                <a:solidFill>
-                  <a:srgbClr val="6E6E6E"/>
-                </a:solidFill>
-                <a:latin typeface="Arial"/>
-              </a:rPr>
-              <a:t>The apodized-pupil Lyot configuration: prolate apodizer, occulter, Lyot stop, and its dark zone.</a:t>
-            </a:r>
-          </a:p>
-        </p:txBody>
-      </p:sp>
-      <p:pic>
-        <p:nvPicPr>
-          <p:cNvPr id="6" name="Picture 5" descr="ctb_bandlimited.png"/>
-          <p:cNvPicPr>
-            <a:picLocks noChangeAspect="1"/>
-          </p:cNvPicPr>
-          <p:nvPr/>
-        </p:nvPicPr>
-        <p:blipFill>
-          <a:blip r:embed="rId3"/>
-          <a:stretch>
-            <a:fillRect/>
-          </a:stretch>
-        </p:blipFill>
-        <p:spPr>
-          <a:xfrm>
-            <a:off x="6957009" y="1298448"/>
-            <a:ext cx="4282541" cy="2605532"/>
-          </a:xfrm>
-          <a:prstGeom prst="rect">
-            <a:avLst/>
-          </a:prstGeom>
-        </p:spPr>
-      </p:pic>
-      <p:sp>
-        <p:nvSpPr>
-          <p:cNvPr id="7" name="TextBox 6"/>
-          <p:cNvSpPr txBox="1"/>
-          <p:nvPr/>
-        </p:nvSpPr>
-        <p:spPr>
-          <a:xfrm>
-            <a:off x="6400800" y="3922267"/>
-            <a:ext cx="5394960" cy="229107"/>
-          </a:xfrm>
-          <a:prstGeom prst="rect">
-            <a:avLst/>
-          </a:prstGeom>
-          <a:noFill/>
-        </p:spPr>
-        <p:txBody>
-          <a:bodyPr wrap="square">
-            <a:spAutoFit/>
-          </a:bodyPr>
-          <a:lstStyle/>
-          <a:p>
-            <a:pPr algn="ctr">
-              <a:spcAft>
-                <a:spcPts val="0"/>
-              </a:spcAft>
-            </a:pPr>
-            <a:r>
-              <a:rPr sz="1000" b="0">
-                <a:solidFill>
-                  <a:srgbClr val="6E6E6E"/>
-                </a:solidFill>
-                <a:latin typeface="Arial"/>
-              </a:rPr>
-              <a:t>The 4th-order band-limited mask: amplitude profile and its dark zone.</a:t>
+            <a:pPr>
+              <a:spcAft>
+                <a:spcPts val="600"/>
+              </a:spcAft>
+            </a:pPr>
+            <a:r>
+              <a:rPr sz="1200" b="0">
+                <a:solidFill>
+                  <a:srgbClr val="282828"/>
+                </a:solidFill>
+                <a:latin typeface="Arial"/>
+              </a:rPr>
+              <a:t>•  Galleries, per-family detail, the per-leg replay check, and the control-loop diagnostics.</a:t>
             </a:r>
           </a:p>
         </p:txBody>
@@ -4184,7 +4271,7 @@
                 </a:solidFill>
                 <a:latin typeface="Arial"/>
               </a:rPr>
-              <a:t>The mask families, one by one (2 of 2)</a:t>
+              <a:t>The mask families, one by one (1 of 2)</a:t>
             </a:r>
           </a:p>
           <a:p>
@@ -4200,7 +4287,7 @@
                 </a:solidFill>
                 <a:latin typeface="Arial"/>
               </a:rPr>
-              <a:t>Phase masks and the vortex</a:t>
+              <a:t>Apodized-pupil Lyot and band-limited</a:t>
             </a:r>
           </a:p>
         </p:txBody>
@@ -4251,7 +4338,7 @@
       </p:sp>
       <p:pic>
         <p:nvPicPr>
-          <p:cNvPr id="4" name="Picture 3" descr="ctb_phase_masks.png"/>
+          <p:cNvPr id="4" name="Picture 3" descr="ctb_aplc.png"/>
           <p:cNvPicPr>
             <a:picLocks noChangeAspect="1"/>
           </p:cNvPicPr>
@@ -4265,8 +4352,8 @@
         </p:blipFill>
         <p:spPr>
           <a:xfrm>
-            <a:off x="1426422" y="1298448"/>
-            <a:ext cx="3776554" cy="2440432"/>
+            <a:off x="1404046" y="1298448"/>
+            <a:ext cx="3821307" cy="2440432"/>
           </a:xfrm>
           <a:prstGeom prst="rect">
             <a:avLst/>
@@ -4307,14 +4394,14 @@
                 </a:solidFill>
                 <a:latin typeface="Arial"/>
               </a:rPr>
-              <a:t>The Roddier π-spot and dual-zone phase masks; both need their matched entrance apodizer to go deep.</a:t>
+              <a:t>The apodized-pupil Lyot configuration: prolate apodizer, occulter, Lyot stop, and its dark zone.</a:t>
             </a:r>
           </a:p>
         </p:txBody>
       </p:sp>
       <p:pic>
         <p:nvPicPr>
-          <p:cNvPr id="6" name="Picture 5" descr="ctb_vortex_matched.png"/>
+          <p:cNvPr id="6" name="Picture 5" descr="ctb_bandlimited.png"/>
           <p:cNvPicPr>
             <a:picLocks noChangeAspect="1"/>
           </p:cNvPicPr>
@@ -4328,8 +4415,8 @@
         </p:blipFill>
         <p:spPr>
           <a:xfrm>
-            <a:off x="7057750" y="1298448"/>
-            <a:ext cx="4081058" cy="2440432"/>
+            <a:off x="6957009" y="1298448"/>
+            <a:ext cx="4282541" cy="2605532"/>
           </a:xfrm>
           <a:prstGeom prst="rect">
             <a:avLst/>
@@ -4344,8 +4431,8 @@
         </p:nvSpPr>
         <p:spPr>
           <a:xfrm>
-            <a:off x="6400800" y="3757167"/>
-            <a:ext cx="5394960" cy="394208"/>
+            <a:off x="6400800" y="3922267"/>
+            <a:ext cx="5394960" cy="229107"/>
           </a:xfrm>
           <a:prstGeom prst="rect">
             <a:avLst/>
@@ -4370,7 +4457,7 @@
                 </a:solidFill>
                 <a:latin typeface="Arial"/>
               </a:rPr>
-              <a:t>The vortex with matched Lyot: even winding number on a clear pupil sends starlight outside the reimaged pupil.</a:t>
+              <a:t>The 4th-order band-limited mask: amplitude profile and its dark zone.</a:t>
             </a:r>
           </a:p>
         </p:txBody>
@@ -4384,6 +4471,249 @@
 </file>
 
 <file path=ppt/slides/slide15.xml><?xml version="1.0" encoding="utf-8"?>
+<p:sld xmlns:a="http://schemas.openxmlformats.org/drawingml/2006/main" xmlns:p="http://schemas.openxmlformats.org/presentationml/2006/main" xmlns:r="http://schemas.openxmlformats.org/officeDocument/2006/relationships">
+  <p:cSld>
+    <p:spTree>
+      <p:nvGrpSpPr>
+        <p:cNvPr id="1" name=""/>
+        <p:cNvGrpSpPr/>
+        <p:nvPr/>
+      </p:nvGrpSpPr>
+      <p:grpSpPr/>
+      <p:sp>
+        <p:nvSpPr>
+          <p:cNvPr id="2" name="TextBox 1"/>
+          <p:cNvSpPr txBox="1"/>
+          <p:nvPr/>
+        </p:nvSpPr>
+        <p:spPr>
+          <a:xfrm>
+            <a:off x="411480" y="201168"/>
+            <a:ext cx="11368735" cy="914400"/>
+          </a:xfrm>
+          <a:prstGeom prst="rect">
+            <a:avLst/>
+          </a:prstGeom>
+          <a:noFill/>
+        </p:spPr>
+        <p:txBody>
+          <a:bodyPr wrap="square">
+            <a:spAutoFit/>
+          </a:bodyPr>
+          <a:lstStyle/>
+          <a:p>
+            <a:pPr>
+              <a:spcAft>
+                <a:spcPts val="400"/>
+              </a:spcAft>
+            </a:pPr>
+            <a:r>
+              <a:rPr sz="2400" b="1">
+                <a:solidFill>
+                  <a:srgbClr val="1F4E79"/>
+                </a:solidFill>
+                <a:latin typeface="Arial"/>
+              </a:rPr>
+              <a:t>The mask families, one by one (2 of 2)</a:t>
+            </a:r>
+          </a:p>
+          <a:p>
+            <a:pPr>
+              <a:spcAft>
+                <a:spcPts val="0"/>
+              </a:spcAft>
+            </a:pPr>
+            <a:r>
+              <a:rPr sz="1250" b="0">
+                <a:solidFill>
+                  <a:srgbClr val="6E6E6E"/>
+                </a:solidFill>
+                <a:latin typeface="Arial"/>
+              </a:rPr>
+              <a:t>Phase masks and the vortex</a:t>
+            </a:r>
+          </a:p>
+        </p:txBody>
+      </p:sp>
+      <p:sp>
+        <p:nvSpPr>
+          <p:cNvPr id="3" name="Rectangle 2"/>
+          <p:cNvSpPr/>
+          <p:nvPr/>
+        </p:nvSpPr>
+        <p:spPr>
+          <a:xfrm>
+            <a:off x="411480" y="1133856"/>
+            <a:ext cx="11368735" cy="20320"/>
+          </a:xfrm>
+          <a:prstGeom prst="rect">
+            <a:avLst/>
+          </a:prstGeom>
+          <a:solidFill>
+            <a:srgbClr val="B8C6D4"/>
+          </a:solidFill>
+          <a:ln>
+            <a:noFill/>
+          </a:ln>
+          <a:effectLst/>
+        </p:spPr>
+        <p:style>
+          <a:lnRef idx="1">
+            <a:schemeClr val="accent1"/>
+          </a:lnRef>
+          <a:fillRef idx="3">
+            <a:schemeClr val="accent1"/>
+          </a:fillRef>
+          <a:effectRef idx="2">
+            <a:schemeClr val="accent1"/>
+          </a:effectRef>
+          <a:fontRef idx="minor">
+            <a:schemeClr val="lt1"/>
+          </a:fontRef>
+        </p:style>
+        <p:txBody>
+          <a:bodyPr rtlCol="0" anchor="ctr"/>
+          <a:lstStyle/>
+          <a:p>
+            <a:pPr algn="ctr"/>
+          </a:p>
+        </p:txBody>
+      </p:sp>
+      <p:pic>
+        <p:nvPicPr>
+          <p:cNvPr id="4" name="Picture 3" descr="ctb_phase_masks.png"/>
+          <p:cNvPicPr>
+            <a:picLocks noChangeAspect="1"/>
+          </p:cNvPicPr>
+          <p:nvPr/>
+        </p:nvPicPr>
+        <p:blipFill>
+          <a:blip r:embed="rId2"/>
+          <a:stretch>
+            <a:fillRect/>
+          </a:stretch>
+        </p:blipFill>
+        <p:spPr>
+          <a:xfrm>
+            <a:off x="1426422" y="1298448"/>
+            <a:ext cx="3776554" cy="2440432"/>
+          </a:xfrm>
+          <a:prstGeom prst="rect">
+            <a:avLst/>
+          </a:prstGeom>
+        </p:spPr>
+      </p:pic>
+      <p:sp>
+        <p:nvSpPr>
+          <p:cNvPr id="5" name="TextBox 4"/>
+          <p:cNvSpPr txBox="1"/>
+          <p:nvPr/>
+        </p:nvSpPr>
+        <p:spPr>
+          <a:xfrm>
+            <a:off x="411480" y="3757167"/>
+            <a:ext cx="5806440" cy="394208"/>
+          </a:xfrm>
+          <a:prstGeom prst="rect">
+            <a:avLst/>
+          </a:prstGeom>
+          <a:noFill/>
+        </p:spPr>
+        <p:txBody>
+          <a:bodyPr wrap="square">
+            <a:spAutoFit/>
+          </a:bodyPr>
+          <a:lstStyle/>
+          <a:p>
+            <a:pPr algn="ctr">
+              <a:spcAft>
+                <a:spcPts val="0"/>
+              </a:spcAft>
+            </a:pPr>
+            <a:r>
+              <a:rPr sz="1000" b="0">
+                <a:solidFill>
+                  <a:srgbClr val="6E6E6E"/>
+                </a:solidFill>
+                <a:latin typeface="Arial"/>
+              </a:rPr>
+              <a:t>The Roddier π-spot and dual-zone phase masks; both need their matched entrance apodizer to go deep.</a:t>
+            </a:r>
+          </a:p>
+        </p:txBody>
+      </p:sp>
+      <p:pic>
+        <p:nvPicPr>
+          <p:cNvPr id="6" name="Picture 5" descr="ctb_vortex_matched.png"/>
+          <p:cNvPicPr>
+            <a:picLocks noChangeAspect="1"/>
+          </p:cNvPicPr>
+          <p:nvPr/>
+        </p:nvPicPr>
+        <p:blipFill>
+          <a:blip r:embed="rId3"/>
+          <a:stretch>
+            <a:fillRect/>
+          </a:stretch>
+        </p:blipFill>
+        <p:spPr>
+          <a:xfrm>
+            <a:off x="7057750" y="1298448"/>
+            <a:ext cx="4081058" cy="2440432"/>
+          </a:xfrm>
+          <a:prstGeom prst="rect">
+            <a:avLst/>
+          </a:prstGeom>
+        </p:spPr>
+      </p:pic>
+      <p:sp>
+        <p:nvSpPr>
+          <p:cNvPr id="7" name="TextBox 6"/>
+          <p:cNvSpPr txBox="1"/>
+          <p:nvPr/>
+        </p:nvSpPr>
+        <p:spPr>
+          <a:xfrm>
+            <a:off x="6400800" y="3757167"/>
+            <a:ext cx="5394960" cy="394208"/>
+          </a:xfrm>
+          <a:prstGeom prst="rect">
+            <a:avLst/>
+          </a:prstGeom>
+          <a:noFill/>
+        </p:spPr>
+        <p:txBody>
+          <a:bodyPr wrap="square">
+            <a:spAutoFit/>
+          </a:bodyPr>
+          <a:lstStyle/>
+          <a:p>
+            <a:pPr algn="ctr">
+              <a:spcAft>
+                <a:spcPts val="0"/>
+              </a:spcAft>
+            </a:pPr>
+            <a:r>
+              <a:rPr sz="1000" b="0">
+                <a:solidFill>
+                  <a:srgbClr val="6E6E6E"/>
+                </a:solidFill>
+                <a:latin typeface="Arial"/>
+              </a:rPr>
+              <a:t>The vortex with matched Lyot: even winding number on a clear pupil sends starlight outside the reimaged pupil.</a:t>
+            </a:r>
+          </a:p>
+        </p:txBody>
+      </p:sp>
+    </p:spTree>
+  </p:cSld>
+  <p:clrMapOvr>
+    <a:masterClrMapping/>
+  </p:clrMapOvr>
+</p:sld>
+</file>
+
+<file path=ppt/slides/slide16.xml><?xml version="1.0" encoding="utf-8"?>
 <p:sld xmlns:a="http://schemas.openxmlformats.org/drawingml/2006/main" xmlns:p="http://schemas.openxmlformats.org/presentationml/2006/main" xmlns:r="http://schemas.openxmlformats.org/officeDocument/2006/relationships">
   <p:cSld>
     <p:spTree>
@@ -5037,7 +5367,7 @@
 </p:sld>
 </file>
 
-<file path=ppt/slides/slide16.xml><?xml version="1.0" encoding="utf-8"?>
+<file path=ppt/slides/slide17.xml><?xml version="1.0" encoding="utf-8"?>
 <p:sld xmlns:a="http://schemas.openxmlformats.org/drawingml/2006/main" xmlns:p="http://schemas.openxmlformats.org/presentationml/2006/main" xmlns:r="http://schemas.openxmlformats.org/officeDocument/2006/relationships">
   <p:cSld>
     <p:spTree>
@@ -5280,7 +5610,7 @@
 </p:sld>
 </file>
 
-<file path=ppt/slides/slide17.xml><?xml version="1.0" encoding="utf-8"?>
+<file path=ppt/slides/slide18.xml><?xml version="1.0" encoding="utf-8"?>
 <p:sld xmlns:a="http://schemas.openxmlformats.org/drawingml/2006/main" xmlns:p="http://schemas.openxmlformats.org/presentationml/2006/main" xmlns:r="http://schemas.openxmlformats.org/officeDocument/2006/relationships">
   <p:cSld>
     <p:spTree>
@@ -5460,7 +5790,7 @@
 </p:sld>
 </file>
 
-<file path=ppt/slides/slide18.xml><?xml version="1.0" encoding="utf-8"?>
+<file path=ppt/slides/slide19.xml><?xml version="1.0" encoding="utf-8"?>
 <p:sld xmlns:a="http://schemas.openxmlformats.org/drawingml/2006/main" xmlns:p="http://schemas.openxmlformats.org/presentationml/2006/main" xmlns:r="http://schemas.openxmlformats.org/officeDocument/2006/relationships">
   <p:cSld>
     <p:spTree>
@@ -7772,7 +8102,7 @@
                 </a:solidFill>
                 <a:latin typeface="Arial"/>
               </a:rPr>
-              <a:t>6 — Phase-factor export</a:t>
+              <a:t>6 — The vortex against the Lyot stop</a:t>
             </a:r>
           </a:p>
           <a:p>
@@ -7788,7 +8118,7 @@
                 </a:solidFill>
                 <a:latin typeface="Arial"/>
               </a:rPr>
-              <a:t>External PROPER models can consume this model's planes, and check theirs against ours station by station</a:t>
+              <a:t>Charge 4 under-runs every fixed design at every throughput: 8.8×10⁻¹¹ at the band-limited mask's own 36%</a:t>
             </a:r>
           </a:p>
         </p:txBody>
@@ -7871,7 +8201,7 @@
                 </a:solidFill>
                 <a:latin typeface="Arial"/>
               </a:rPr>
-              <a:t>•  One self-describing file carries the full 44-element model: 18 stations (complex field, amplitude, OPD, grid pitch, all in metres), the 17 propagation legs, the 4 reference spheres, and 18 per-plane phase screens — with the sign, orientation, and centering conventions stamped inside. The orientation is measured, not asserted: a +X pupil phase ramp lands the image peak where the file says it will.</a:t>
+              <a:t>•  One mask, one dial: the vortex phase mask is fixed; only the Lyot stop fraction moves. Every point shares the head-to-head's grid, annulus (3–15 λ/D), and normalization, and the fixed-design markers are read from the committed comparison — the same footing, no re-scoring.</a:t>
             </a:r>
           </a:p>
           <a:p>
@@ -7887,7 +8217,7 @@
                 </a:solidFill>
                 <a:latin typeface="Arial"/>
               </a:rPr>
-              <a:t>•  A companion PROPER run script reads only the exported file — no macos — and replays the model two ways: every leg propagated, or handing off at the exported fields. Focus stations reproduce at correlation 1.000000 in both modes; gated pupil planes ≥ 0.9998 replayed, ≥ 0.96 handed off.</a:t>
+              <a:t>•  The trade the cured core revealed: the starlight the vortex rejects piles just outside the geometric pupil edge, so contrast rises steeply as the stop opens toward it — a genuine depth-for-throughput dial where each fixed design is a single point. Charge 4 runs about 4× deeper than charge 6 at every stop (the smaller pixel-averaged core).</a:t>
             </a:r>
           </a:p>
           <a:p>
@@ -7903,7 +8233,7 @@
                 </a:solidFill>
                 <a:latin typeface="Arial"/>
               </a:rPr>
-              <a:t>•  Rule 1, replaying a focus: start the PROPER propagation from the exported converging-sphere plane, not from the mirror before it. The focal-plane pixel size is set by the sphere's radius; starting at the mirror gives pixels 4.5× the wrong size, and nothing overlays.</a:t>
+              <a:t>•  Readings from the curve: at the apodized-pupil Lyot's operating point, charge 4 with a 0.60 stop is deeper (8.8×10⁻¹¹ vs 2.1×10⁻¹⁰) at more throughput (36% vs 27%) — with no apodizer to fabricate. At the band-limited mask's 36% it is 300× deeper; at 81% throughput it holds 8.0×10⁻⁹, thirty times below the hard occulter's contrast at three times its throughput.</a:t>
             </a:r>
           </a:p>
           <a:p>
@@ -7919,14 +8249,14 @@
                 </a:solidFill>
                 <a:latin typeface="Arial"/>
               </a:rPr>
-              <a:t>•  Rule 2, comparing between mirrors: compare intensities, not phase maps. The two codes measure phase from different baselines (this model from a flat plane, PROPER from its internal reference beam), so identical beams still show mismatched phase. Simplest: start each PROPER stage from the exported field at that plane — that agrees by construction.</a:t>
+              <a:t>•  The steep rise past 0.90 is the leak ring arriving inside the stop (flux inside grows 0.1% → 1%); the useful range of the dial is 0.50–0.90.</a:t>
             </a:r>
           </a:p>
         </p:txBody>
       </p:sp>
       <p:pic>
         <p:nvPicPr>
-          <p:cNvPr id="5" name="Picture 4" descr="proper_ctb_check_collapsed.png"/>
+          <p:cNvPr id="5" name="Picture 4" descr="ctb_vortex_lyot_sweep.png"/>
           <p:cNvPicPr>
             <a:picLocks noChangeAspect="1"/>
           </p:cNvPicPr>
@@ -7940,8 +8270,8 @@
         </p:blipFill>
         <p:spPr>
           <a:xfrm>
-            <a:off x="6733864" y="1298448"/>
-            <a:ext cx="4728830" cy="2275332"/>
+            <a:off x="7112465" y="1298448"/>
+            <a:ext cx="3971629" cy="2760472"/>
           </a:xfrm>
           <a:prstGeom prst="rect">
             <a:avLst/>
@@ -7956,8 +8286,8 @@
         </p:nvSpPr>
         <p:spPr>
           <a:xfrm>
-            <a:off x="6400800" y="3592068"/>
-            <a:ext cx="5394960" cy="559307"/>
+            <a:off x="6400800" y="4077208"/>
+            <a:ext cx="5394960" cy="394208"/>
           </a:xfrm>
           <a:prstGeom prst="rect">
             <a:avLst/>
@@ -7982,46 +8312,7 @@
                 </a:solidFill>
                 <a:latin typeface="Arial"/>
               </a:rPr>
-              <a:t>Station-by-station intensity correlation of the external PROPER replay against the exported fields (hand-off mode): focus planes at 1.0, gated pupils above 0.96; grey bars are ungated mid-beam planes.</a:t>
-            </a:r>
-          </a:p>
-        </p:txBody>
-      </p:sp>
-      <p:sp>
-        <p:nvSpPr>
-          <p:cNvPr id="7" name="TextBox 6"/>
-          <p:cNvSpPr txBox="1"/>
-          <p:nvPr/>
-        </p:nvSpPr>
-        <p:spPr>
-          <a:xfrm>
-            <a:off x="6400800" y="4187952"/>
-            <a:ext cx="5394960" cy="274320"/>
-          </a:xfrm>
-          <a:prstGeom prst="rect">
-            <a:avLst/>
-          </a:prstGeom>
-          <a:noFill/>
-        </p:spPr>
-        <p:txBody>
-          <a:bodyPr wrap="square">
-            <a:spAutoFit/>
-          </a:bodyPr>
-          <a:lstStyle/>
-          <a:p>
-            <a:pPr>
-              <a:spcAft>
-                <a:spcPts val="600"/>
-              </a:spcAft>
-            </a:pPr>
-            <a:r>
-              <a:rPr sz="1050" b="0">
-                <a:solidFill>
-                  <a:srgbClr val="6E6E6E"/>
-                </a:solidFill>
-                <a:latin typeface="Arial"/>
-              </a:rPr>
-              <a:t>Export ≈320 MB, kept out of git: the committed truth is an 87 KB fingerprint plus a 3 MB downsampled preview, with one-command regeneration. Single wavelength; the exported OPD is wrapped (the complex field is the primary carrier). Per-wavelength export composes with the bandpass machinery when needed.</a:t>
+              <a:t>Dark-zone mean contrast against throughput: the swept vortex (point labels = Lyot fraction) against the three fixed designs from the head-to-head.</a:t>
             </a:r>
           </a:p>
         </p:txBody>
@@ -8078,7 +8369,7 @@
                 </a:solidFill>
                 <a:latin typeface="Arial"/>
               </a:rPr>
-              <a:t>7 — External hand-off: a pure-PROPER run</a:t>
+              <a:t>7 — Phase-factor export</a:t>
             </a:r>
           </a:p>
           <a:p>
@@ -8094,7 +8385,7 @@
                 </a:solidFill>
                 <a:latin typeface="Arial"/>
               </a:rPr>
-              <a:t>From the exported data alone, PROPER reproduces the bare image exactly and forms the same dark zone</a:t>
+              <a:t>External PROPER models can consume this model's planes, and check theirs against ours station by station</a:t>
             </a:r>
           </a:p>
         </p:txBody>
@@ -8177,7 +8468,7 @@
                 </a:solidFill>
                 <a:latin typeface="Arial"/>
               </a:rPr>
-              <a:t>•  The package is three files: the exported model (fields, legs, spheres, per-plane screens, mask arrays, all conventions stamped inside), a per-plane check script, and a run script that reads only the export plus PROPER — no macos anywhere. It asserts the orientation probe before trusting any comparison.</a:t>
+              <a:t>•  One self-describing file carries the full 44-element model: 18 stations (complex field, amplitude, OPD, grid pitch, all in metres), the 17 propagation legs, the 4 reference spheres, and 18 per-plane phase screens — with the sign, orientation, and centering conventions stamped inside. The orientation is measured, not asserted: a +X pupil phase ramp lands the image peak where the file says it will.</a:t>
             </a:r>
           </a:p>
           <a:p>
@@ -8193,7 +8484,7 @@
                 </a:solidFill>
                 <a:latin typeface="Arial"/>
               </a:rPr>
-              <a:t>•  A finding that shapes any external reconstruction: one single continuous PROPER beam cannot reproduce this model (focal pitch ratio 0.71, correlation 0.005). The model samples every intermediate focus at the system exit-pupil Fraunhofer pitch — set by the exit-pupil sphere radii, not by each parabola's own focal length — and one grid cannot carry both the pupil pitch and that focal pitch across a focus-to-focus relay. The shipped form is one pure-PROPER script seeded from the exported fields.</a:t>
+              <a:t>•  A companion PROPER run script reads only the exported file — no macos — and replays the model two ways: every leg propagated, or handing off at the exported fields. Focus stations reproduce at correlation 1.000000 in both modes; gated pupil planes ≥ 0.9998 replayed, ≥ 0.96 handed off.</a:t>
             </a:r>
           </a:p>
           <a:p>
@@ -8209,7 +8500,7 @@
                 </a:solidFill>
                 <a:latin typeface="Arial"/>
               </a:rPr>
-              <a:t>•  Bare image: focal pixel pitch ratio 1.0000, intensity correlation 1.000000 — the exported and PROPER images are identical.</a:t>
+              <a:t>•  Rule 1, replaying a focus: start the PROPER propagation from the exported converging-sphere plane, not from the mirror before it. The focal-plane pixel size is set by the sphere's radius; starting at the mirror gives pixels 4.5× the wrong size, and nothing overlays.</a:t>
             </a:r>
           </a:p>
           <a:p>
@@ -8225,14 +8516,14 @@
                 </a:solidFill>
                 <a:latin typeface="Arial"/>
               </a:rPr>
-              <a:t>•  Coronagraph: the PROPER cascade reaches dark-zone mean 1.4×10⁻⁸ over 3–15 λ/D. The check is one-sided by design: the idealized relay seeded at the apodizer carries the upstream aberration but omits the downstream real-mirror figure that scatters light in the full model, so it runs legitimately deeper than the shipped 2.9×10⁻⁷; the bound that matters is that it lands within 2× above the shipped value.</a:t>
+              <a:t>•  Rule 2, comparing between mirrors: compare intensities, not phase maps. The two codes measure phase from different baselines (this model from a flat plane, PROPER from its internal reference beam), so identical beams still show mismatched phase. Simplest: start each PROPER stage from the exported field at that plane — that agrees by construction.</a:t>
             </a:r>
           </a:p>
         </p:txBody>
       </p:sp>
       <p:pic>
         <p:nvPicPr>
-          <p:cNvPr id="5" name="Picture 4" descr="proper_ctb_run.png"/>
+          <p:cNvPr id="5" name="Picture 4" descr="proper_ctb_check_collapsed.png"/>
           <p:cNvPicPr>
             <a:picLocks noChangeAspect="1"/>
           </p:cNvPicPr>
@@ -8246,8 +8537,8 @@
         </p:blipFill>
         <p:spPr>
           <a:xfrm>
-            <a:off x="7628569" y="1298448"/>
-            <a:ext cx="2939420" cy="2669032"/>
+            <a:off x="6733864" y="1298448"/>
+            <a:ext cx="4728830" cy="2275332"/>
           </a:xfrm>
           <a:prstGeom prst="rect">
             <a:avLst/>
@@ -8262,8 +8553,8 @@
         </p:nvSpPr>
         <p:spPr>
           <a:xfrm>
-            <a:off x="6400800" y="3985767"/>
-            <a:ext cx="5394960" cy="394208"/>
+            <a:off x="6400800" y="3592068"/>
+            <a:ext cx="5394960" cy="559307"/>
           </a:xfrm>
           <a:prstGeom prst="rect">
             <a:avLst/>
@@ -8288,7 +8579,46 @@
                 </a:solidFill>
                 <a:latin typeface="Arial"/>
               </a:rPr>
-              <a:t>Exported (macos) beside pure-PROPER: bare images identical (correlation 1.000000); the PROPER coronagraph forms the dark zone with the shipped macos level marked.</a:t>
+              <a:t>Station-by-station intensity correlation of the external PROPER replay against the exported fields (hand-off mode): focus planes at 1.0, gated pupils above 0.96; grey bars are ungated mid-beam planes.</a:t>
+            </a:r>
+          </a:p>
+        </p:txBody>
+      </p:sp>
+      <p:sp>
+        <p:nvSpPr>
+          <p:cNvPr id="7" name="TextBox 6"/>
+          <p:cNvSpPr txBox="1"/>
+          <p:nvPr/>
+        </p:nvSpPr>
+        <p:spPr>
+          <a:xfrm>
+            <a:off x="6400800" y="4187952"/>
+            <a:ext cx="5394960" cy="274320"/>
+          </a:xfrm>
+          <a:prstGeom prst="rect">
+            <a:avLst/>
+          </a:prstGeom>
+          <a:noFill/>
+        </p:spPr>
+        <p:txBody>
+          <a:bodyPr wrap="square">
+            <a:spAutoFit/>
+          </a:bodyPr>
+          <a:lstStyle/>
+          <a:p>
+            <a:pPr>
+              <a:spcAft>
+                <a:spcPts val="600"/>
+              </a:spcAft>
+            </a:pPr>
+            <a:r>
+              <a:rPr sz="1050" b="0">
+                <a:solidFill>
+                  <a:srgbClr val="6E6E6E"/>
+                </a:solidFill>
+                <a:latin typeface="Arial"/>
+              </a:rPr>
+              <a:t>Export ≈320 MB, kept out of git: the committed truth is an 87 KB fingerprint plus a 3 MB downsampled preview, with one-command regeneration. Single wavelength; the exported OPD is wrapped (the complex field is the primary carrier). Per-wavelength export composes with the bandpass machinery when needed.</a:t>
             </a:r>
           </a:p>
         </p:txBody>
@@ -8345,7 +8675,7 @@
                 </a:solidFill>
                 <a:latin typeface="Arial"/>
               </a:rPr>
-              <a:t>8 — The deformable mirrors close the loop</a:t>
+              <a:t>8 — External hand-off: a pure-PROPER run</a:t>
             </a:r>
           </a:p>
           <a:p>
@@ -8361,7 +8691,7 @@
                 </a:solidFill>
                 <a:latin typeface="Arial"/>
               </a:rPr>
-              <a:t>Electric-field conjugation on the model itself: dark-zone mean 2.9×10⁻⁷ → 8.1×10⁻⁹ (36×) at 10 nm strokes</a:t>
+              <a:t>From the exported data alone, PROPER reproduces the bare image exactly and forms the same dark zone</a:t>
             </a:r>
           </a:p>
         </p:txBody>
@@ -8444,7 +8774,7 @@
                 </a:solidFill>
                 <a:latin typeface="Arial"/>
               </a:rPr>
-              <a:t>•  The DMs become controllable surfaces: each carries a 256-point displacement grid in its own element frame, driven by a 32×32 actuator lattice through Gaussian influence functions (12% nearest-neighbor coupling, 0.67 mm pitch = beam/32; 880 actuators of each DM sit inside the beam).</a:t>
+              <a:t>•  The package is three files: the exported model (fields, legs, spheres, per-plane screens, mask arrays, all conventions stamped inside), a per-plane check script, and a run script that reads only the export plus PROPER — no macos anywhere. It asserts the orientation probe before trusting any comparison.</a:t>
             </a:r>
           </a:p>
           <a:p>
@@ -8460,32 +8790,9 @@
                 </a:solidFill>
                 <a:latin typeface="Arial"/>
               </a:rPr>
-              <a:t>•  The control matrix is measured, not modeled: every actuator is poked 2 nm and propagated through the full masked chain — 1760 pokes, 11 minutes — so the correction solve has no model error to exploit. Each iteration re-propagates the model, scores the measured contrast, picks the regularization by that measurement, and stops itself when no step improves.</a:t>
-            </a:r>
-          </a:p>
-        </p:txBody>
-      </p:sp>
-      <p:sp>
-        <p:nvSpPr>
-          <p:cNvPr id="5" name="TextBox 4"/>
-          <p:cNvSpPr txBox="1"/>
-          <p:nvPr/>
-        </p:nvSpPr>
-        <p:spPr>
-          <a:xfrm>
-            <a:off x="6400800" y="1298448"/>
-            <a:ext cx="5394960" cy="274320"/>
-          </a:xfrm>
-          <a:prstGeom prst="rect">
-            <a:avLst/>
-          </a:prstGeom>
-          <a:noFill/>
-        </p:spPr>
-        <p:txBody>
-          <a:bodyPr wrap="square">
-            <a:spAutoFit/>
-          </a:bodyPr>
-          <a:lstStyle/>
+              <a:t>•  A finding that shapes any external reconstruction: one single continuous PROPER beam cannot reproduce this model (focal pitch ratio 0.71, correlation 0.005). The model samples every intermediate focus at the system exit-pupil Fraunhofer pitch — set by the exit-pupil sphere radii, not by each parabola's own focal length — and one grid cannot carry both the pupil pitch and that focal pitch across a focus-to-focus relay. The shipped form is one pure-PROPER script seeded from the exported fields.</a:t>
+            </a:r>
+          </a:p>
           <a:p>
             <a:pPr>
               <a:spcAft>
@@ -8499,7 +8806,7 @@
                 </a:solidFill>
                 <a:latin typeface="Arial"/>
               </a:rPr>
-              <a:t>•  Result: 2.9×10⁻⁷ → 8.1×10⁻⁹ (36×) in 19 iterations at 9.9/8.6 nm rms surface stroke. The best any linear solve of the measured matrix can reach is 4.5×10⁻⁹ at 11 nm — the loop lands within 2× of that with a matrix measured once at the flat state; re-measuring it around the corrected state is the next depth increment. Restricted to DM1 alone, the same loop stalls at 1.3×10⁻⁷ (2.3×): the pupil mirror is phase-only control, and the full annulus also needs the amplitude lever the out-of-pupil DM2 supplies.</a:t>
+              <a:t>•  Bare image: focal pixel pitch ratio 1.0000, intensity correlation 1.000000 — the exported and PROPER images are identical.</a:t>
             </a:r>
           </a:p>
           <a:p>
@@ -8515,14 +8822,14 @@
                 </a:solidFill>
                 <a:latin typeface="Arial"/>
               </a:rPr>
-              <a:t>•  Where the correction works hardest: with the 50% Lyot stop, 32 actuators steer light cleanly to about 8 λ/D on the final image scale — the inner half of the zone deepens 40×, the outer 25×, and the largest strokes ring the Lyot edge image on the mirror.</a:t>
+              <a:t>•  Coronagraph: the PROPER cascade reaches dark-zone mean 1.4×10⁻⁸ over 3–15 λ/D. The check is one-sided by design: the idealized relay seeded at the apodizer carries the upstream aberration but omits the downstream real-mirror figure that scatters light in the full model, so it runs legitimately deeper than the shipped 2.9×10⁻⁷; the bound that matters is that it lands within 2× above the shipped value.</a:t>
             </a:r>
           </a:p>
         </p:txBody>
       </p:sp>
       <p:pic>
         <p:nvPicPr>
-          <p:cNvPr id="6" name="Picture 5" descr="ctb_efc.png"/>
+          <p:cNvPr id="5" name="Picture 4" descr="proper_ctb_run.png"/>
           <p:cNvPicPr>
             <a:picLocks noChangeAspect="1"/>
           </p:cNvPicPr>
@@ -8536,8 +8843,8 @@
         </p:blipFill>
         <p:spPr>
           <a:xfrm>
-            <a:off x="2682799" y="3992879"/>
-            <a:ext cx="6826095" cy="1526032"/>
+            <a:off x="7628569" y="1298448"/>
+            <a:ext cx="2939420" cy="2669032"/>
           </a:xfrm>
           <a:prstGeom prst="rect">
             <a:avLst/>
@@ -8546,14 +8853,14 @@
       </p:pic>
       <p:sp>
         <p:nvSpPr>
-          <p:cNvPr id="7" name="TextBox 6"/>
+          <p:cNvPr id="6" name="TextBox 5"/>
           <p:cNvSpPr txBox="1"/>
           <p:nvPr/>
         </p:nvSpPr>
         <p:spPr>
           <a:xfrm>
-            <a:off x="411480" y="5537200"/>
-            <a:ext cx="11368735" cy="394208"/>
+            <a:off x="6400800" y="3985767"/>
+            <a:ext cx="5394960" cy="394208"/>
           </a:xfrm>
           <a:prstGeom prst="rect">
             <a:avLst/>
@@ -8578,46 +8885,7 @@
                 </a:solidFill>
                 <a:latin typeface="Arial"/>
               </a:rPr>
-              <a:t>Before and after at the camera; contrast versus iteration, with the DM1-only loop overlaid stalling two decades short; the stroke maps commanded on both DMs. Dashed circles mark the 3–15 λ/D zone.</a:t>
-            </a:r>
-          </a:p>
-        </p:txBody>
-      </p:sp>
-      <p:sp>
-        <p:nvSpPr>
-          <p:cNvPr id="8" name="TextBox 7"/>
-          <p:cNvSpPr txBox="1"/>
-          <p:nvPr/>
-        </p:nvSpPr>
-        <p:spPr>
-          <a:xfrm>
-            <a:off x="411480" y="5967984"/>
-            <a:ext cx="11368735" cy="274320"/>
-          </a:xfrm>
-          <a:prstGeom prst="rect">
-            <a:avLst/>
-          </a:prstGeom>
-          <a:noFill/>
-        </p:spPr>
-        <p:txBody>
-          <a:bodyPr wrap="square">
-            <a:spAutoFit/>
-          </a:bodyPr>
-          <a:lstStyle/>
-          <a:p>
-            <a:pPr>
-              <a:spcAft>
-                <a:spcPts val="600"/>
-              </a:spcAft>
-            </a:pPr>
-            <a:r>
-              <a:rPr sz="1050" b="0">
-                <a:solidFill>
-                  <a:srgbClr val="6E6E6E"/>
-                </a:solidFill>
-                <a:latin typeface="Arial"/>
-              </a:rPr>
-              <a:t>Sensing is assumed perfect — the loop reads the model's complex field directly. Estimating that field from camera images alone (pairwise probing, as a testbed must) is the next layer of realism.</a:t>
+              <a:t>Exported (macos) beside pure-PROPER: bare images identical (correlation 1.000000); the PROPER coronagraph forms the dark zone with the shipped macos level marked.</a:t>
             </a:r>
           </a:p>
         </p:txBody>

--- a/mmacos/templates/30_instruments/bench_ctb/deck_ctb.pptx
+++ b/mmacos/templates/30_instruments/bench_ctb/deck_ctb.pptx
@@ -24,6 +24,7 @@
     <p:sldId id="272" r:id="rId23"/>
     <p:sldId id="273" r:id="rId24"/>
     <p:sldId id="274" r:id="rId25"/>
+    <p:sldId id="275" r:id="rId26"/>
   </p:sldIdLst>
   <p:sldSz cx="12191695" cy="6858000" type="screen4x3"/>
   <p:notesSz cx="6858000" cy="9144000"/>
@@ -3597,7 +3598,7 @@
                 </a:solidFill>
                 <a:latin typeface="Arial"/>
               </a:rPr>
-              <a:t>10 — Next</a:t>
+              <a:t>10 — Deeper: the loop on the vortex chain</a:t>
             </a:r>
           </a:p>
           <a:p>
@@ -3613,7 +3614,7 @@
                 </a:solidFill>
                 <a:latin typeface="Arial"/>
               </a:rPr>
-              <a:t>Toward a real coronagraph model, in dependency order</a:t>
+              <a:t>1.7×10⁻⁸ → 6.8×10⁻¹⁵ at half-nanometer strokes — this chain leaves nothing the mirrors cannot remove</a:t>
             </a:r>
           </a:p>
         </p:txBody>
@@ -3671,7 +3672,7 @@
         <p:spPr>
           <a:xfrm>
             <a:off x="411480" y="1298448"/>
-            <a:ext cx="11368735" cy="274320"/>
+            <a:ext cx="5806440" cy="274320"/>
           </a:xfrm>
           <a:prstGeom prst="rect">
             <a:avLst/>
@@ -3696,7 +3697,7 @@
                 </a:solidFill>
                 <a:latin typeface="Arial"/>
               </a:rPr>
-              <a:t>•  Real mirror surfaces. Add measured-quality surface error maps to each of the eight parabolas — random roughness with realistic spatial statistics — so the model scatters light the way real optics do.</a:t>
+              <a:t>•  The same loop pointed at the slide-6 configuration: charge-4 vortex, Lyot 0.60, no apodizer. Control runs at N=512, where this chain's static floor is 1.7×10⁻⁸ (the slide-6 sweep is N=1024 — the pixel-averaged core covers more of the λ/D scale at coarser sampling).</a:t>
             </a:r>
           </a:p>
           <a:p>
@@ -3712,7 +3713,7 @@
                 </a:solidFill>
                 <a:latin typeface="Arial"/>
               </a:rPr>
-              <a:t>•  Deeper control. The native loop is delivered (slide 9); next come re-measuring the control matrix around the corrected state, image-based field estimation (pairwise probing), and driving the same DMs with FALCO, the community's standard wavefront-control software — the hybrid Lyot mask enters there, since its design comes from that control loop.</a:t>
+              <a:t>•  The first iteration removes 300×, and commands never exceed ~0.5 nm rms: the residual field is so small that the measured control matrix is nearly exact, and the solve lands where it points.</a:t>
             </a:r>
           </a:p>
           <a:p>
@@ -3728,7 +3729,7 @@
                 </a:solidFill>
                 <a:latin typeface="Arial"/>
               </a:rPr>
-              <a:t>•  Motion over time. Apply alignment drifts as a time series and report contrast versus time — how long the dark zone survives between corrections, now measurable against the delivered control loop.</a:t>
+              <a:t>•  Going deeper is one re-measurement: rebuild the control matrix about the corrected state (7 minutes of pokes) and continue. The hard-occulter chain gains 2.1× to 3.8×10⁻⁹ and converges — consistent with its linear bound of 4.5×10⁻⁹ — while the vortex chain gains another 86× to 6.8×10⁻¹⁵.</a:t>
             </a:r>
           </a:p>
           <a:p>
@@ -3744,37 +3745,319 @@
                 </a:solidFill>
                 <a:latin typeface="Arial"/>
               </a:rPr>
-              <a:t>•  Polarized light. Propagate the two polarization components separately, with the phase and amplitude changes each mirror coating imposes; polarization sets the contrast floor no deformable mirror can correct.</a:t>
-            </a:r>
-          </a:p>
-          <a:p>
-            <a:pPr>
-              <a:spcAft>
-                <a:spcPts val="600"/>
-              </a:spcAft>
-            </a:pPr>
-            <a:r>
-              <a:rPr sz="1200" b="0">
-                <a:solidFill>
-                  <a:srgbClr val="282828"/>
-                </a:solidFill>
-                <a:latin typeface="Arial"/>
-              </a:rPr>
-              <a:t>•  Validation against testbed data — the capstone. Needs a named dataset from a real bench and the measured (not design) parameters that produced it.</a:t>
-            </a:r>
-          </a:p>
-        </p:txBody>
-      </p:sp>
-      <p:sp>
-        <p:nvSpPr>
-          <p:cNvPr id="5" name="TextBox 4"/>
+              <a:t>•  The reading: the hard occulter's floor is physics — occulter-edge diffraction the mirrors cannot represent. The vortex chain's floor is arithmetic — the residual field is ~3×10⁻⁸ of the peak amplitude, the roundoff of double-precision propagation. A real bench stops far earlier, at sensing noise and drift; those are the next layers of realism.</a:t>
+            </a:r>
+          </a:p>
+        </p:txBody>
+      </p:sp>
+      <p:graphicFrame>
+        <p:nvGraphicFramePr>
+          <p:cNvPr id="5" name="Table 4"/>
+          <p:cNvGraphicFramePr>
+            <a:graphicFrameLocks noGrp="1"/>
+          </p:cNvGraphicFramePr>
+          <p:nvPr/>
+        </p:nvGraphicFramePr>
+        <p:xfrm>
+          <a:off x="6400800" y="1298448"/>
+          <a:ext cx="5394958" cy="788670"/>
+        </p:xfrm>
+        <a:graphic>
+          <a:graphicData uri="http://schemas.openxmlformats.org/drawingml/2006/table">
+            <a:tbl>
+              <a:tblPr firstRow="1" bandRow="1">
+                <a:tableStyleId>{5C22544A-7EE6-4342-B048-85BDC9FD1C3A}</a:tableStyleId>
+              </a:tblPr>
+              <a:tblGrid>
+                <a:gridCol w="2460858"/>
+                <a:gridCol w="757187"/>
+                <a:gridCol w="1135781"/>
+                <a:gridCol w="1041132"/>
+              </a:tblGrid>
+              <a:tr h="262890">
+                <a:tc>
+                  <a:txBody>
+                    <a:bodyPr wrap="square"/>
+                    <a:lstStyle/>
+                    <a:p>
+                      <a:r>
+                        <a:rPr sz="1000" b="1">
+                          <a:solidFill>
+                            <a:srgbClr val="FFFFFF"/>
+                          </a:solidFill>
+                          <a:latin typeface="Arial"/>
+                        </a:rPr>
+                        <a:t>chain</a:t>
+                      </a:r>
+                    </a:p>
+                  </a:txBody>
+                  <a:tcPr marL="54864" marR="54864" marT="18288" marB="18288">
+                    <a:solidFill>
+                      <a:srgbClr val="1F4E79"/>
+                    </a:solidFill>
+                  </a:tcPr>
+                </a:tc>
+                <a:tc>
+                  <a:txBody>
+                    <a:bodyPr wrap="square"/>
+                    <a:lstStyle/>
+                    <a:p>
+                      <a:r>
+                        <a:rPr sz="1000" b="1">
+                          <a:solidFill>
+                            <a:srgbClr val="FFFFFF"/>
+                          </a:solidFill>
+                          <a:latin typeface="Arial"/>
+                        </a:rPr>
+                        <a:t>static</a:t>
+                      </a:r>
+                    </a:p>
+                  </a:txBody>
+                  <a:tcPr marL="54864" marR="54864" marT="18288" marB="18288">
+                    <a:solidFill>
+                      <a:srgbClr val="1F4E79"/>
+                    </a:solidFill>
+                  </a:tcPr>
+                </a:tc>
+                <a:tc>
+                  <a:txBody>
+                    <a:bodyPr wrap="square"/>
+                    <a:lstStyle/>
+                    <a:p>
+                      <a:r>
+                        <a:rPr sz="1000" b="1">
+                          <a:solidFill>
+                            <a:srgbClr val="FFFFFF"/>
+                          </a:solidFill>
+                          <a:latin typeface="Arial"/>
+                        </a:rPr>
+                        <a:t>fixed matrix</a:t>
+                      </a:r>
+                    </a:p>
+                  </a:txBody>
+                  <a:tcPr marL="54864" marR="54864" marT="18288" marB="18288">
+                    <a:solidFill>
+                      <a:srgbClr val="1F4E79"/>
+                    </a:solidFill>
+                  </a:tcPr>
+                </a:tc>
+                <a:tc>
+                  <a:txBody>
+                    <a:bodyPr wrap="square"/>
+                    <a:lstStyle/>
+                    <a:p>
+                      <a:r>
+                        <a:rPr sz="1000" b="1">
+                          <a:solidFill>
+                            <a:srgbClr val="FFFFFF"/>
+                          </a:solidFill>
+                          <a:latin typeface="Arial"/>
+                        </a:rPr>
+                        <a:t>re-measured</a:t>
+                      </a:r>
+                    </a:p>
+                  </a:txBody>
+                  <a:tcPr marL="54864" marR="54864" marT="18288" marB="18288">
+                    <a:solidFill>
+                      <a:srgbClr val="1F4E79"/>
+                    </a:solidFill>
+                  </a:tcPr>
+                </a:tc>
+              </a:tr>
+              <a:tr h="262890">
+                <a:tc>
+                  <a:txBody>
+                    <a:bodyPr wrap="square"/>
+                    <a:lstStyle/>
+                    <a:p>
+                      <a:r>
+                        <a:rPr sz="1000" b="0">
+                          <a:solidFill>
+                            <a:srgbClr val="282828"/>
+                          </a:solidFill>
+                          <a:latin typeface="Arial"/>
+                        </a:rPr>
+                        <a:t>hard occulter, Lyot 0.50</a:t>
+                      </a:r>
+                    </a:p>
+                  </a:txBody>
+                  <a:tcPr marL="54864" marR="54864" marT="18288" marB="18288">
+                    <a:solidFill>
+                      <a:srgbClr val="FFFFFF"/>
+                    </a:solidFill>
+                  </a:tcPr>
+                </a:tc>
+                <a:tc>
+                  <a:txBody>
+                    <a:bodyPr wrap="square"/>
+                    <a:lstStyle/>
+                    <a:p>
+                      <a:r>
+                        <a:rPr sz="1000" b="0">
+                          <a:solidFill>
+                            <a:srgbClr val="282828"/>
+                          </a:solidFill>
+                          <a:latin typeface="Arial"/>
+                        </a:rPr>
+                        <a:t>2.9×10⁻⁷</a:t>
+                      </a:r>
+                    </a:p>
+                  </a:txBody>
+                  <a:tcPr marL="54864" marR="54864" marT="18288" marB="18288">
+                    <a:solidFill>
+                      <a:srgbClr val="FFFFFF"/>
+                    </a:solidFill>
+                  </a:tcPr>
+                </a:tc>
+                <a:tc>
+                  <a:txBody>
+                    <a:bodyPr wrap="square"/>
+                    <a:lstStyle/>
+                    <a:p>
+                      <a:r>
+                        <a:rPr sz="1000" b="0">
+                          <a:solidFill>
+                            <a:srgbClr val="282828"/>
+                          </a:solidFill>
+                          <a:latin typeface="Arial"/>
+                        </a:rPr>
+                        <a:t>8.1×10⁻⁹</a:t>
+                      </a:r>
+                    </a:p>
+                  </a:txBody>
+                  <a:tcPr marL="54864" marR="54864" marT="18288" marB="18288">
+                    <a:solidFill>
+                      <a:srgbClr val="FFFFFF"/>
+                    </a:solidFill>
+                  </a:tcPr>
+                </a:tc>
+                <a:tc>
+                  <a:txBody>
+                    <a:bodyPr wrap="square"/>
+                    <a:lstStyle/>
+                    <a:p>
+                      <a:r>
+                        <a:rPr sz="1000" b="0">
+                          <a:solidFill>
+                            <a:srgbClr val="282828"/>
+                          </a:solidFill>
+                          <a:latin typeface="Arial"/>
+                        </a:rPr>
+                        <a:t>3.8×10⁻⁹</a:t>
+                      </a:r>
+                    </a:p>
+                  </a:txBody>
+                  <a:tcPr marL="54864" marR="54864" marT="18288" marB="18288">
+                    <a:solidFill>
+                      <a:srgbClr val="FFFFFF"/>
+                    </a:solidFill>
+                  </a:tcPr>
+                </a:tc>
+              </a:tr>
+              <a:tr h="262890">
+                <a:tc>
+                  <a:txBody>
+                    <a:bodyPr wrap="square"/>
+                    <a:lstStyle/>
+                    <a:p>
+                      <a:r>
+                        <a:rPr sz="1000" b="0">
+                          <a:solidFill>
+                            <a:srgbClr val="282828"/>
+                          </a:solidFill>
+                          <a:latin typeface="Arial"/>
+                        </a:rPr>
+                        <a:t>vortex charge 4, Lyot 0.60</a:t>
+                      </a:r>
+                    </a:p>
+                  </a:txBody>
+                  <a:tcPr marL="54864" marR="54864" marT="18288" marB="18288">
+                    <a:solidFill>
+                      <a:srgbClr val="ECF1F6"/>
+                    </a:solidFill>
+                  </a:tcPr>
+                </a:tc>
+                <a:tc>
+                  <a:txBody>
+                    <a:bodyPr wrap="square"/>
+                    <a:lstStyle/>
+                    <a:p>
+                      <a:r>
+                        <a:rPr sz="1000" b="0">
+                          <a:solidFill>
+                            <a:srgbClr val="282828"/>
+                          </a:solidFill>
+                          <a:latin typeface="Arial"/>
+                        </a:rPr>
+                        <a:t>1.7×10⁻⁸</a:t>
+                      </a:r>
+                    </a:p>
+                  </a:txBody>
+                  <a:tcPr marL="54864" marR="54864" marT="18288" marB="18288">
+                    <a:solidFill>
+                      <a:srgbClr val="ECF1F6"/>
+                    </a:solidFill>
+                  </a:tcPr>
+                </a:tc>
+                <a:tc>
+                  <a:txBody>
+                    <a:bodyPr wrap="square"/>
+                    <a:lstStyle/>
+                    <a:p>
+                      <a:r>
+                        <a:rPr sz="1000" b="0">
+                          <a:solidFill>
+                            <a:srgbClr val="282828"/>
+                          </a:solidFill>
+                          <a:latin typeface="Arial"/>
+                        </a:rPr>
+                        <a:t>5.8×10⁻¹³</a:t>
+                      </a:r>
+                    </a:p>
+                  </a:txBody>
+                  <a:tcPr marL="54864" marR="54864" marT="18288" marB="18288">
+                    <a:solidFill>
+                      <a:srgbClr val="ECF1F6"/>
+                    </a:solidFill>
+                  </a:tcPr>
+                </a:tc>
+                <a:tc>
+                  <a:txBody>
+                    <a:bodyPr wrap="square"/>
+                    <a:lstStyle/>
+                    <a:p>
+                      <a:r>
+                        <a:rPr sz="1000" b="0">
+                          <a:solidFill>
+                            <a:srgbClr val="282828"/>
+                          </a:solidFill>
+                          <a:latin typeface="Arial"/>
+                        </a:rPr>
+                        <a:t>6.8×10⁻¹⁵</a:t>
+                      </a:r>
+                    </a:p>
+                  </a:txBody>
+                  <a:tcPr marL="54864" marR="54864" marT="18288" marB="18288">
+                    <a:solidFill>
+                      <a:srgbClr val="ECF1F6"/>
+                    </a:solidFill>
+                  </a:tcPr>
+                </a:tc>
+              </a:tr>
+            </a:tbl>
+          </a:graphicData>
+        </a:graphic>
+      </p:graphicFrame>
+      <p:sp>
+        <p:nvSpPr>
+          <p:cNvPr id="6" name="TextBox 5"/>
           <p:cNvSpPr txBox="1"/>
           <p:nvPr/>
         </p:nvSpPr>
         <p:spPr>
           <a:xfrm>
-            <a:off x="411480" y="4017264"/>
-            <a:ext cx="11368735" cy="274320"/>
+            <a:off x="6400800" y="2233422"/>
+            <a:ext cx="5394960" cy="274320"/>
           </a:xfrm>
           <a:prstGeom prst="rect">
             <a:avLst/>
@@ -3793,13 +4076,76 @@
               </a:spcAft>
             </a:pPr>
             <a:r>
-              <a:rPr sz="1050" b="0">
+              <a:rPr sz="1200" b="0">
+                <a:solidFill>
+                  <a:srgbClr val="282828"/>
+                </a:solidFill>
+                <a:latin typeface="Arial"/>
+              </a:rPr>
+              <a:t>•  Strokes at the floor: 9.9/8.6 nm rms (hard chain), 0.49/0.55 nm rms (vortex chain, before/after re-measurement). Dark zone 3–15 λ/D, both chains, same annulus and normalization throughout.</a:t>
+            </a:r>
+          </a:p>
+        </p:txBody>
+      </p:sp>
+      <p:pic>
+        <p:nvPicPr>
+          <p:cNvPr id="7" name="Picture 6" descr="ctb_efc_vortex.png"/>
+          <p:cNvPicPr>
+            <a:picLocks noChangeAspect="1"/>
+          </p:cNvPicPr>
+          <p:nvPr/>
+        </p:nvPicPr>
+        <p:blipFill>
+          <a:blip r:embed="rId2"/>
+          <a:stretch>
+            <a:fillRect/>
+          </a:stretch>
+        </p:blipFill>
+        <p:spPr>
+          <a:xfrm>
+            <a:off x="2966871" y="5065776"/>
+            <a:ext cx="6257952" cy="1398524"/>
+          </a:xfrm>
+          <a:prstGeom prst="rect">
+            <a:avLst/>
+          </a:prstGeom>
+        </p:spPr>
+      </p:pic>
+      <p:sp>
+        <p:nvSpPr>
+          <p:cNvPr id="8" name="TextBox 7"/>
+          <p:cNvSpPr txBox="1"/>
+          <p:nvPr/>
+        </p:nvSpPr>
+        <p:spPr>
+          <a:xfrm>
+            <a:off x="411480" y="6482588"/>
+            <a:ext cx="11368735" cy="229107"/>
+          </a:xfrm>
+          <a:prstGeom prst="rect">
+            <a:avLst/>
+          </a:prstGeom>
+          <a:noFill/>
+        </p:spPr>
+        <p:txBody>
+          <a:bodyPr wrap="square">
+            <a:spAutoFit/>
+          </a:bodyPr>
+          <a:lstStyle/>
+          <a:p>
+            <a:pPr algn="ctr">
+              <a:spcAft>
+                <a:spcPts val="0"/>
+              </a:spcAft>
+            </a:pPr>
+            <a:r>
+              <a:rPr sz="1000" b="0">
                 <a:solidFill>
                   <a:srgbClr val="6E6E6E"/>
                 </a:solidFill>
                 <a:latin typeface="Arial"/>
               </a:rPr>
-              <a:t>Mechanical layer delivered and merged: a prescription generator that reproduces both hand-built models to round-off, regression tests pinning the validated numbers (two suites, 16 checks green), the example README, and the exit-pupil-finder guard in the engine (pushed).</a:t>
+              <a:t>The vortex-chain dark hole: before and after (note the color floor at 10⁻¹⁴), convergence, and the sub-nanometer command maps.</a:t>
             </a:r>
           </a:p>
         </p:txBody>
@@ -3856,7 +4202,7 @@
                 </a:solidFill>
                 <a:latin typeface="Arial"/>
               </a:rPr>
-              <a:t>11 — References</a:t>
+              <a:t>11 — Next</a:t>
             </a:r>
           </a:p>
           <a:p>
@@ -3872,7 +4218,7 @@
                 </a:solidFill>
                 <a:latin typeface="Arial"/>
               </a:rPr>
-              <a:t>Sources for the mask families and the control method; every formula taken from the paper itself</a:t>
+              <a:t>Toward a real coronagraph model, in dependency order</a:t>
             </a:r>
           </a:p>
         </p:txBody>
@@ -3955,7 +4301,7 @@
                 </a:solidFill>
                 <a:latin typeface="Arial"/>
               </a:rPr>
-              <a:t>•  Band-limited masks: Kuchner &amp; Traub 2002, ApJ 570, 900 (4th order); Kuchner, Crepp &amp; Ge 2005, ApJ 628, 466 (8th order).</a:t>
+              <a:t>•  Real mirror surfaces. Add measured-quality surface error maps to each of the eight parabolas — random roughness with realistic spatial statistics — so the model scatters light the way real optics do.</a:t>
             </a:r>
           </a:p>
           <a:p>
@@ -3971,7 +4317,7 @@
                 </a:solidFill>
                 <a:latin typeface="Arial"/>
               </a:rPr>
-              <a:t>•  Apodized-pupil Lyot: Soummer 2005, ApJ 618, L161 (the prolate apodizer); Soummer et al. 2011, ApJ 729, 144 (the GPI instrument configuration used here).</a:t>
+              <a:t>•  Deeper control. The native loop is delivered (slide 9); next come re-measuring the control matrix around the corrected state, image-based field estimation (pairwise probing), and driving the same DMs with FALCO, the community's standard wavefront-control software — the hybrid Lyot mask enters there, since its design comes from that control loop.</a:t>
             </a:r>
           </a:p>
           <a:p>
@@ -3987,7 +4333,7 @@
                 </a:solidFill>
                 <a:latin typeface="Arial"/>
               </a:rPr>
-              <a:t>•  Phase masks: Roddier &amp; Roddier 1997, PASP 109, 815 (the π-spot); N'Diaye et al. 2012, A&amp;A 538, A55 (the achromatic dual-zone); Soummer, Dohlen &amp; Aime 2003, A&amp;A 403, 369.</a:t>
+              <a:t>•  Motion over time. Apply alignment drifts as a time series and report contrast versus time — how long the dark zone survives between corrections, now measurable against the delivered control loop.</a:t>
             </a:r>
           </a:p>
           <a:p>
@@ -4003,7 +4349,7 @@
                 </a:solidFill>
                 <a:latin typeface="Arial"/>
               </a:rPr>
-              <a:t>•  Vortex: Mawet et al. 2005, ApJ 633, 1191; Foo, Palacios &amp; Swartzlander 2005, Opt. Lett. 30, 3308; Jenkins 2008, MNRAS 384, 515 (the even-charge rejection property).</a:t>
+              <a:t>•  Polarized light. Propagate the two polarization components separately, with the phase and amplitude changes each mirror coating imposes; polarization sets the contrast floor no deformable mirror can correct.</a:t>
             </a:r>
           </a:p>
           <a:p>
@@ -4019,23 +4365,7 @@
                 </a:solidFill>
                 <a:latin typeface="Arial"/>
               </a:rPr>
-              <a:t>•  Wavefront control: Give'on et al. 2007, Proc. SPIE 6691 (electric-field conjugation, the correction solve of slide 9).</a:t>
-            </a:r>
-          </a:p>
-          <a:p>
-            <a:pPr>
-              <a:spcAft>
-                <a:spcPts val="600"/>
-              </a:spcAft>
-            </a:pPr>
-            <a:r>
-              <a:rPr sz="1200" b="0">
-                <a:solidFill>
-                  <a:srgbClr val="282828"/>
-                </a:solidFill>
-                <a:latin typeface="Arial"/>
-              </a:rPr>
-              <a:t>•  Diffraction reference code: PROPER — Krist 2007, Proc. SPIE 6675 (the arbiter for every propagation cross-check in this deck).</a:t>
+              <a:t>•  Validation against testbed data — the capstone. Needs a named dataset from a real bench and the measured (not design) parameters that produced it.</a:t>
             </a:r>
           </a:p>
         </p:txBody>
@@ -4048,7 +4378,7 @@
         </p:nvSpPr>
         <p:spPr>
           <a:xfrm>
-            <a:off x="411480" y="3959352"/>
+            <a:off x="411480" y="4017264"/>
             <a:ext cx="11368735" cy="274320"/>
           </a:xfrm>
           <a:prstGeom prst="rect">
@@ -4074,7 +4404,7 @@
                 </a:solidFill>
                 <a:latin typeface="Arial"/>
               </a:rPr>
-              <a:t>A companion three-slide deck (ctb_mask_families, committed beside the drivers) carries the code map: which script builds which mask, and the parameters a user can change.</a:t>
+              <a:t>Mechanical layer delivered and merged: a prescription generator that reproduces both hand-built models to round-off, regression tests pinning the validated numbers (two suites, 16 checks green), the example README, and the exit-pupil-finder guard in the engine (pushed).</a:t>
             </a:r>
           </a:p>
         </p:txBody>
@@ -4131,7 +4461,23 @@
                 </a:solidFill>
                 <a:latin typeface="Arial"/>
               </a:rPr>
-              <a:t>Backup Slides</a:t>
+              <a:t>12 — References</a:t>
+            </a:r>
+          </a:p>
+          <a:p>
+            <a:pPr>
+              <a:spcAft>
+                <a:spcPts val="0"/>
+              </a:spcAft>
+            </a:pPr>
+            <a:r>
+              <a:rPr sz="1250" b="0">
+                <a:solidFill>
+                  <a:srgbClr val="6E6E6E"/>
+                </a:solidFill>
+                <a:latin typeface="Arial"/>
+              </a:rPr>
+              <a:t>Sources for the mask families and the control method; every formula taken from the paper itself</a:t>
             </a:r>
           </a:p>
         </p:txBody>
@@ -4144,7 +4490,7 @@
         </p:nvSpPr>
         <p:spPr>
           <a:xfrm>
-            <a:off x="411480" y="914400"/>
+            <a:off x="411480" y="1133856"/>
             <a:ext cx="11368735" cy="20320"/>
           </a:xfrm>
           <a:prstGeom prst="rect">
@@ -4188,7 +4534,7 @@
         </p:nvSpPr>
         <p:spPr>
           <a:xfrm>
-            <a:off x="411480" y="1078992"/>
+            <a:off x="411480" y="1298448"/>
             <a:ext cx="11368735" cy="274320"/>
           </a:xfrm>
           <a:prstGeom prst="rect">
@@ -4214,7 +4560,126 @@
                 </a:solidFill>
                 <a:latin typeface="Arial"/>
               </a:rPr>
-              <a:t>•  Galleries, per-family detail, the per-leg replay check, and the control-loop diagnostics.</a:t>
+              <a:t>•  Band-limited masks: Kuchner &amp; Traub 2002, ApJ 570, 900 (4th order); Kuchner, Crepp &amp; Ge 2005, ApJ 628, 466 (8th order).</a:t>
+            </a:r>
+          </a:p>
+          <a:p>
+            <a:pPr>
+              <a:spcAft>
+                <a:spcPts val="600"/>
+              </a:spcAft>
+            </a:pPr>
+            <a:r>
+              <a:rPr sz="1200" b="0">
+                <a:solidFill>
+                  <a:srgbClr val="282828"/>
+                </a:solidFill>
+                <a:latin typeface="Arial"/>
+              </a:rPr>
+              <a:t>•  Apodized-pupil Lyot: Soummer 2005, ApJ 618, L161 (the prolate apodizer); Soummer et al. 2011, ApJ 729, 144 (the GPI instrument configuration used here).</a:t>
+            </a:r>
+          </a:p>
+          <a:p>
+            <a:pPr>
+              <a:spcAft>
+                <a:spcPts val="600"/>
+              </a:spcAft>
+            </a:pPr>
+            <a:r>
+              <a:rPr sz="1200" b="0">
+                <a:solidFill>
+                  <a:srgbClr val="282828"/>
+                </a:solidFill>
+                <a:latin typeface="Arial"/>
+              </a:rPr>
+              <a:t>•  Phase masks: Roddier &amp; Roddier 1997, PASP 109, 815 (the π-spot); N'Diaye et al. 2012, A&amp;A 538, A55 (the achromatic dual-zone); Soummer, Dohlen &amp; Aime 2003, A&amp;A 403, 369.</a:t>
+            </a:r>
+          </a:p>
+          <a:p>
+            <a:pPr>
+              <a:spcAft>
+                <a:spcPts val="600"/>
+              </a:spcAft>
+            </a:pPr>
+            <a:r>
+              <a:rPr sz="1200" b="0">
+                <a:solidFill>
+                  <a:srgbClr val="282828"/>
+                </a:solidFill>
+                <a:latin typeface="Arial"/>
+              </a:rPr>
+              <a:t>•  Vortex: Mawet et al. 2005, ApJ 633, 1191; Foo, Palacios &amp; Swartzlander 2005, Opt. Lett. 30, 3308; Jenkins 2008, MNRAS 384, 515 (the even-charge rejection property).</a:t>
+            </a:r>
+          </a:p>
+          <a:p>
+            <a:pPr>
+              <a:spcAft>
+                <a:spcPts val="600"/>
+              </a:spcAft>
+            </a:pPr>
+            <a:r>
+              <a:rPr sz="1200" b="0">
+                <a:solidFill>
+                  <a:srgbClr val="282828"/>
+                </a:solidFill>
+                <a:latin typeface="Arial"/>
+              </a:rPr>
+              <a:t>•  Wavefront control: Give'on et al. 2007, Proc. SPIE 6691 (electric-field conjugation, the correction solve of slide 9).</a:t>
+            </a:r>
+          </a:p>
+          <a:p>
+            <a:pPr>
+              <a:spcAft>
+                <a:spcPts val="600"/>
+              </a:spcAft>
+            </a:pPr>
+            <a:r>
+              <a:rPr sz="1200" b="0">
+                <a:solidFill>
+                  <a:srgbClr val="282828"/>
+                </a:solidFill>
+                <a:latin typeface="Arial"/>
+              </a:rPr>
+              <a:t>•  Diffraction reference code: PROPER — Krist 2007, Proc. SPIE 6675 (the arbiter for every propagation cross-check in this deck).</a:t>
+            </a:r>
+          </a:p>
+        </p:txBody>
+      </p:sp>
+      <p:sp>
+        <p:nvSpPr>
+          <p:cNvPr id="5" name="TextBox 4"/>
+          <p:cNvSpPr txBox="1"/>
+          <p:nvPr/>
+        </p:nvSpPr>
+        <p:spPr>
+          <a:xfrm>
+            <a:off x="411480" y="3959352"/>
+            <a:ext cx="11368735" cy="274320"/>
+          </a:xfrm>
+          <a:prstGeom prst="rect">
+            <a:avLst/>
+          </a:prstGeom>
+          <a:noFill/>
+        </p:spPr>
+        <p:txBody>
+          <a:bodyPr wrap="square">
+            <a:spAutoFit/>
+          </a:bodyPr>
+          <a:lstStyle/>
+          <a:p>
+            <a:pPr>
+              <a:spcAft>
+                <a:spcPts val="600"/>
+              </a:spcAft>
+            </a:pPr>
+            <a:r>
+              <a:rPr sz="1050" b="0">
+                <a:solidFill>
+                  <a:srgbClr val="6E6E6E"/>
+                </a:solidFill>
+                <a:latin typeface="Arial"/>
+              </a:rPr>
+              <a:t>A companion three-slide deck (ctb_mask_families, committed beside the drivers) carries the code map: which script builds which mask, and the parameters a user can change.</a:t>
             </a:r>
           </a:p>
         </p:txBody>
@@ -4271,23 +4736,7 @@
                 </a:solidFill>
                 <a:latin typeface="Arial"/>
               </a:rPr>
-              <a:t>The mask families, one by one (1 of 2)</a:t>
-            </a:r>
-          </a:p>
-          <a:p>
-            <a:pPr>
-              <a:spcAft>
-                <a:spcPts val="0"/>
-              </a:spcAft>
-            </a:pPr>
-            <a:r>
-              <a:rPr sz="1250" b="0">
-                <a:solidFill>
-                  <a:srgbClr val="6E6E6E"/>
-                </a:solidFill>
-                <a:latin typeface="Arial"/>
-              </a:rPr>
-              <a:t>Apodized-pupil Lyot and band-limited</a:t>
+              <a:t>Backup Slides</a:t>
             </a:r>
           </a:p>
         </p:txBody>
@@ -4300,7 +4749,7 @@
         </p:nvSpPr>
         <p:spPr>
           <a:xfrm>
-            <a:off x="411480" y="1133856"/>
+            <a:off x="411480" y="914400"/>
             <a:ext cx="11368735" cy="20320"/>
           </a:xfrm>
           <a:prstGeom prst="rect">
@@ -4336,40 +4785,16 @@
           </a:p>
         </p:txBody>
       </p:sp>
-      <p:pic>
-        <p:nvPicPr>
-          <p:cNvPr id="4" name="Picture 3" descr="ctb_aplc.png"/>
-          <p:cNvPicPr>
-            <a:picLocks noChangeAspect="1"/>
-          </p:cNvPicPr>
-          <p:nvPr/>
-        </p:nvPicPr>
-        <p:blipFill>
-          <a:blip r:embed="rId2"/>
-          <a:stretch>
-            <a:fillRect/>
-          </a:stretch>
-        </p:blipFill>
-        <p:spPr>
-          <a:xfrm>
-            <a:off x="1404046" y="1298448"/>
-            <a:ext cx="3821307" cy="2440432"/>
-          </a:xfrm>
-          <a:prstGeom prst="rect">
-            <a:avLst/>
-          </a:prstGeom>
-        </p:spPr>
-      </p:pic>
-      <p:sp>
-        <p:nvSpPr>
-          <p:cNvPr id="5" name="TextBox 4"/>
+      <p:sp>
+        <p:nvSpPr>
+          <p:cNvPr id="4" name="TextBox 3"/>
           <p:cNvSpPr txBox="1"/>
           <p:nvPr/>
         </p:nvSpPr>
         <p:spPr>
           <a:xfrm>
-            <a:off x="411480" y="3757167"/>
-            <a:ext cx="5806440" cy="394208"/>
+            <a:off x="411480" y="1078992"/>
+            <a:ext cx="11368735" cy="274320"/>
           </a:xfrm>
           <a:prstGeom prst="rect">
             <a:avLst/>
@@ -4382,82 +4807,19 @@
           </a:bodyPr>
           <a:lstStyle/>
           <a:p>
-            <a:pPr algn="ctr">
-              <a:spcAft>
-                <a:spcPts val="0"/>
-              </a:spcAft>
-            </a:pPr>
-            <a:r>
-              <a:rPr sz="1000" b="0">
-                <a:solidFill>
-                  <a:srgbClr val="6E6E6E"/>
-                </a:solidFill>
-                <a:latin typeface="Arial"/>
-              </a:rPr>
-              <a:t>The apodized-pupil Lyot configuration: prolate apodizer, occulter, Lyot stop, and its dark zone.</a:t>
-            </a:r>
-          </a:p>
-        </p:txBody>
-      </p:sp>
-      <p:pic>
-        <p:nvPicPr>
-          <p:cNvPr id="6" name="Picture 5" descr="ctb_bandlimited.png"/>
-          <p:cNvPicPr>
-            <a:picLocks noChangeAspect="1"/>
-          </p:cNvPicPr>
-          <p:nvPr/>
-        </p:nvPicPr>
-        <p:blipFill>
-          <a:blip r:embed="rId3"/>
-          <a:stretch>
-            <a:fillRect/>
-          </a:stretch>
-        </p:blipFill>
-        <p:spPr>
-          <a:xfrm>
-            <a:off x="6957009" y="1298448"/>
-            <a:ext cx="4282541" cy="2605532"/>
-          </a:xfrm>
-          <a:prstGeom prst="rect">
-            <a:avLst/>
-          </a:prstGeom>
-        </p:spPr>
-      </p:pic>
-      <p:sp>
-        <p:nvSpPr>
-          <p:cNvPr id="7" name="TextBox 6"/>
-          <p:cNvSpPr txBox="1"/>
-          <p:nvPr/>
-        </p:nvSpPr>
-        <p:spPr>
-          <a:xfrm>
-            <a:off x="6400800" y="3922267"/>
-            <a:ext cx="5394960" cy="229107"/>
-          </a:xfrm>
-          <a:prstGeom prst="rect">
-            <a:avLst/>
-          </a:prstGeom>
-          <a:noFill/>
-        </p:spPr>
-        <p:txBody>
-          <a:bodyPr wrap="square">
-            <a:spAutoFit/>
-          </a:bodyPr>
-          <a:lstStyle/>
-          <a:p>
-            <a:pPr algn="ctr">
-              <a:spcAft>
-                <a:spcPts val="0"/>
-              </a:spcAft>
-            </a:pPr>
-            <a:r>
-              <a:rPr sz="1000" b="0">
-                <a:solidFill>
-                  <a:srgbClr val="6E6E6E"/>
-                </a:solidFill>
-                <a:latin typeface="Arial"/>
-              </a:rPr>
-              <a:t>The 4th-order band-limited mask: amplitude profile and its dark zone.</a:t>
+            <a:pPr>
+              <a:spcAft>
+                <a:spcPts val="600"/>
+              </a:spcAft>
+            </a:pPr>
+            <a:r>
+              <a:rPr sz="1200" b="0">
+                <a:solidFill>
+                  <a:srgbClr val="282828"/>
+                </a:solidFill>
+                <a:latin typeface="Arial"/>
+              </a:rPr>
+              <a:t>•  Galleries, per-family detail, the per-leg replay check, and the control-loop diagnostics.</a:t>
             </a:r>
           </a:p>
         </p:txBody>
@@ -4514,7 +4876,7 @@
                 </a:solidFill>
                 <a:latin typeface="Arial"/>
               </a:rPr>
-              <a:t>The mask families, one by one (2 of 2)</a:t>
+              <a:t>The mask families, one by one (1 of 2)</a:t>
             </a:r>
           </a:p>
           <a:p>
@@ -4530,7 +4892,7 @@
                 </a:solidFill>
                 <a:latin typeface="Arial"/>
               </a:rPr>
-              <a:t>Phase masks and the vortex</a:t>
+              <a:t>Apodized-pupil Lyot and band-limited</a:t>
             </a:r>
           </a:p>
         </p:txBody>
@@ -4581,7 +4943,7 @@
       </p:sp>
       <p:pic>
         <p:nvPicPr>
-          <p:cNvPr id="4" name="Picture 3" descr="ctb_phase_masks.png"/>
+          <p:cNvPr id="4" name="Picture 3" descr="ctb_aplc.png"/>
           <p:cNvPicPr>
             <a:picLocks noChangeAspect="1"/>
           </p:cNvPicPr>
@@ -4595,8 +4957,8 @@
         </p:blipFill>
         <p:spPr>
           <a:xfrm>
-            <a:off x="1426422" y="1298448"/>
-            <a:ext cx="3776554" cy="2440432"/>
+            <a:off x="1404046" y="1298448"/>
+            <a:ext cx="3821307" cy="2440432"/>
           </a:xfrm>
           <a:prstGeom prst="rect">
             <a:avLst/>
@@ -4637,14 +4999,14 @@
                 </a:solidFill>
                 <a:latin typeface="Arial"/>
               </a:rPr>
-              <a:t>The Roddier π-spot and dual-zone phase masks; both need their matched entrance apodizer to go deep.</a:t>
+              <a:t>The apodized-pupil Lyot configuration: prolate apodizer, occulter, Lyot stop, and its dark zone.</a:t>
             </a:r>
           </a:p>
         </p:txBody>
       </p:sp>
       <p:pic>
         <p:nvPicPr>
-          <p:cNvPr id="6" name="Picture 5" descr="ctb_vortex_matched.png"/>
+          <p:cNvPr id="6" name="Picture 5" descr="ctb_bandlimited.png"/>
           <p:cNvPicPr>
             <a:picLocks noChangeAspect="1"/>
           </p:cNvPicPr>
@@ -4658,8 +5020,8 @@
         </p:blipFill>
         <p:spPr>
           <a:xfrm>
-            <a:off x="7057750" y="1298448"/>
-            <a:ext cx="4081058" cy="2440432"/>
+            <a:off x="6957009" y="1298448"/>
+            <a:ext cx="4282541" cy="2605532"/>
           </a:xfrm>
           <a:prstGeom prst="rect">
             <a:avLst/>
@@ -4674,8 +5036,8 @@
         </p:nvSpPr>
         <p:spPr>
           <a:xfrm>
-            <a:off x="6400800" y="3757167"/>
-            <a:ext cx="5394960" cy="394208"/>
+            <a:off x="6400800" y="3922267"/>
+            <a:ext cx="5394960" cy="229107"/>
           </a:xfrm>
           <a:prstGeom prst="rect">
             <a:avLst/>
@@ -4700,7 +5062,7 @@
                 </a:solidFill>
                 <a:latin typeface="Arial"/>
               </a:rPr>
-              <a:t>The vortex with matched Lyot: even winding number on a clear pupil sends starlight outside the reimaged pupil.</a:t>
+              <a:t>The 4th-order band-limited mask: amplitude profile and its dark zone.</a:t>
             </a:r>
           </a:p>
         </p:txBody>
@@ -4714,6 +5076,249 @@
 </file>
 
 <file path=ppt/slides/slide16.xml><?xml version="1.0" encoding="utf-8"?>
+<p:sld xmlns:a="http://schemas.openxmlformats.org/drawingml/2006/main" xmlns:p="http://schemas.openxmlformats.org/presentationml/2006/main" xmlns:r="http://schemas.openxmlformats.org/officeDocument/2006/relationships">
+  <p:cSld>
+    <p:spTree>
+      <p:nvGrpSpPr>
+        <p:cNvPr id="1" name=""/>
+        <p:cNvGrpSpPr/>
+        <p:nvPr/>
+      </p:nvGrpSpPr>
+      <p:grpSpPr/>
+      <p:sp>
+        <p:nvSpPr>
+          <p:cNvPr id="2" name="TextBox 1"/>
+          <p:cNvSpPr txBox="1"/>
+          <p:nvPr/>
+        </p:nvSpPr>
+        <p:spPr>
+          <a:xfrm>
+            <a:off x="411480" y="201168"/>
+            <a:ext cx="11368735" cy="914400"/>
+          </a:xfrm>
+          <a:prstGeom prst="rect">
+            <a:avLst/>
+          </a:prstGeom>
+          <a:noFill/>
+        </p:spPr>
+        <p:txBody>
+          <a:bodyPr wrap="square">
+            <a:spAutoFit/>
+          </a:bodyPr>
+          <a:lstStyle/>
+          <a:p>
+            <a:pPr>
+              <a:spcAft>
+                <a:spcPts val="400"/>
+              </a:spcAft>
+            </a:pPr>
+            <a:r>
+              <a:rPr sz="2400" b="1">
+                <a:solidFill>
+                  <a:srgbClr val="1F4E79"/>
+                </a:solidFill>
+                <a:latin typeface="Arial"/>
+              </a:rPr>
+              <a:t>The mask families, one by one (2 of 2)</a:t>
+            </a:r>
+          </a:p>
+          <a:p>
+            <a:pPr>
+              <a:spcAft>
+                <a:spcPts val="0"/>
+              </a:spcAft>
+            </a:pPr>
+            <a:r>
+              <a:rPr sz="1250" b="0">
+                <a:solidFill>
+                  <a:srgbClr val="6E6E6E"/>
+                </a:solidFill>
+                <a:latin typeface="Arial"/>
+              </a:rPr>
+              <a:t>Phase masks and the vortex</a:t>
+            </a:r>
+          </a:p>
+        </p:txBody>
+      </p:sp>
+      <p:sp>
+        <p:nvSpPr>
+          <p:cNvPr id="3" name="Rectangle 2"/>
+          <p:cNvSpPr/>
+          <p:nvPr/>
+        </p:nvSpPr>
+        <p:spPr>
+          <a:xfrm>
+            <a:off x="411480" y="1133856"/>
+            <a:ext cx="11368735" cy="20320"/>
+          </a:xfrm>
+          <a:prstGeom prst="rect">
+            <a:avLst/>
+          </a:prstGeom>
+          <a:solidFill>
+            <a:srgbClr val="B8C6D4"/>
+          </a:solidFill>
+          <a:ln>
+            <a:noFill/>
+          </a:ln>
+          <a:effectLst/>
+        </p:spPr>
+        <p:style>
+          <a:lnRef idx="1">
+            <a:schemeClr val="accent1"/>
+          </a:lnRef>
+          <a:fillRef idx="3">
+            <a:schemeClr val="accent1"/>
+          </a:fillRef>
+          <a:effectRef idx="2">
+            <a:schemeClr val="accent1"/>
+          </a:effectRef>
+          <a:fontRef idx="minor">
+            <a:schemeClr val="lt1"/>
+          </a:fontRef>
+        </p:style>
+        <p:txBody>
+          <a:bodyPr rtlCol="0" anchor="ctr"/>
+          <a:lstStyle/>
+          <a:p>
+            <a:pPr algn="ctr"/>
+          </a:p>
+        </p:txBody>
+      </p:sp>
+      <p:pic>
+        <p:nvPicPr>
+          <p:cNvPr id="4" name="Picture 3" descr="ctb_phase_masks.png"/>
+          <p:cNvPicPr>
+            <a:picLocks noChangeAspect="1"/>
+          </p:cNvPicPr>
+          <p:nvPr/>
+        </p:nvPicPr>
+        <p:blipFill>
+          <a:blip r:embed="rId2"/>
+          <a:stretch>
+            <a:fillRect/>
+          </a:stretch>
+        </p:blipFill>
+        <p:spPr>
+          <a:xfrm>
+            <a:off x="1426422" y="1298448"/>
+            <a:ext cx="3776554" cy="2440432"/>
+          </a:xfrm>
+          <a:prstGeom prst="rect">
+            <a:avLst/>
+          </a:prstGeom>
+        </p:spPr>
+      </p:pic>
+      <p:sp>
+        <p:nvSpPr>
+          <p:cNvPr id="5" name="TextBox 4"/>
+          <p:cNvSpPr txBox="1"/>
+          <p:nvPr/>
+        </p:nvSpPr>
+        <p:spPr>
+          <a:xfrm>
+            <a:off x="411480" y="3757167"/>
+            <a:ext cx="5806440" cy="394208"/>
+          </a:xfrm>
+          <a:prstGeom prst="rect">
+            <a:avLst/>
+          </a:prstGeom>
+          <a:noFill/>
+        </p:spPr>
+        <p:txBody>
+          <a:bodyPr wrap="square">
+            <a:spAutoFit/>
+          </a:bodyPr>
+          <a:lstStyle/>
+          <a:p>
+            <a:pPr algn="ctr">
+              <a:spcAft>
+                <a:spcPts val="0"/>
+              </a:spcAft>
+            </a:pPr>
+            <a:r>
+              <a:rPr sz="1000" b="0">
+                <a:solidFill>
+                  <a:srgbClr val="6E6E6E"/>
+                </a:solidFill>
+                <a:latin typeface="Arial"/>
+              </a:rPr>
+              <a:t>The Roddier π-spot and dual-zone phase masks; both need their matched entrance apodizer to go deep.</a:t>
+            </a:r>
+          </a:p>
+        </p:txBody>
+      </p:sp>
+      <p:pic>
+        <p:nvPicPr>
+          <p:cNvPr id="6" name="Picture 5" descr="ctb_vortex_matched.png"/>
+          <p:cNvPicPr>
+            <a:picLocks noChangeAspect="1"/>
+          </p:cNvPicPr>
+          <p:nvPr/>
+        </p:nvPicPr>
+        <p:blipFill>
+          <a:blip r:embed="rId3"/>
+          <a:stretch>
+            <a:fillRect/>
+          </a:stretch>
+        </p:blipFill>
+        <p:spPr>
+          <a:xfrm>
+            <a:off x="7057750" y="1298448"/>
+            <a:ext cx="4081058" cy="2440432"/>
+          </a:xfrm>
+          <a:prstGeom prst="rect">
+            <a:avLst/>
+          </a:prstGeom>
+        </p:spPr>
+      </p:pic>
+      <p:sp>
+        <p:nvSpPr>
+          <p:cNvPr id="7" name="TextBox 6"/>
+          <p:cNvSpPr txBox="1"/>
+          <p:nvPr/>
+        </p:nvSpPr>
+        <p:spPr>
+          <a:xfrm>
+            <a:off x="6400800" y="3757167"/>
+            <a:ext cx="5394960" cy="394208"/>
+          </a:xfrm>
+          <a:prstGeom prst="rect">
+            <a:avLst/>
+          </a:prstGeom>
+          <a:noFill/>
+        </p:spPr>
+        <p:txBody>
+          <a:bodyPr wrap="square">
+            <a:spAutoFit/>
+          </a:bodyPr>
+          <a:lstStyle/>
+          <a:p>
+            <a:pPr algn="ctr">
+              <a:spcAft>
+                <a:spcPts val="0"/>
+              </a:spcAft>
+            </a:pPr>
+            <a:r>
+              <a:rPr sz="1000" b="0">
+                <a:solidFill>
+                  <a:srgbClr val="6E6E6E"/>
+                </a:solidFill>
+                <a:latin typeface="Arial"/>
+              </a:rPr>
+              <a:t>The vortex with matched Lyot: even winding number on a clear pupil sends starlight outside the reimaged pupil.</a:t>
+            </a:r>
+          </a:p>
+        </p:txBody>
+      </p:sp>
+    </p:spTree>
+  </p:cSld>
+  <p:clrMapOvr>
+    <a:masterClrMapping/>
+  </p:clrMapOvr>
+</p:sld>
+</file>
+
+<file path=ppt/slides/slide17.xml><?xml version="1.0" encoding="utf-8"?>
 <p:sld xmlns:a="http://schemas.openxmlformats.org/drawingml/2006/main" xmlns:p="http://schemas.openxmlformats.org/presentationml/2006/main" xmlns:r="http://schemas.openxmlformats.org/officeDocument/2006/relationships">
   <p:cSld>
     <p:spTree>
@@ -5367,7 +5972,7 @@
 </p:sld>
 </file>
 
-<file path=ppt/slides/slide17.xml><?xml version="1.0" encoding="utf-8"?>
+<file path=ppt/slides/slide18.xml><?xml version="1.0" encoding="utf-8"?>
 <p:sld xmlns:a="http://schemas.openxmlformats.org/drawingml/2006/main" xmlns:p="http://schemas.openxmlformats.org/presentationml/2006/main" xmlns:r="http://schemas.openxmlformats.org/officeDocument/2006/relationships">
   <p:cSld>
     <p:spTree>
@@ -5598,186 +6203,6 @@
                 <a:latin typeface="Arial"/>
               </a:rPr>
               <a:t>The geometric bench: eight off-axis parabolas and two DMs, with the beam footprints the diffraction models inherit.</a:t>
-            </a:r>
-          </a:p>
-        </p:txBody>
-      </p:sp>
-    </p:spTree>
-  </p:cSld>
-  <p:clrMapOvr>
-    <a:masterClrMapping/>
-  </p:clrMapOvr>
-</p:sld>
-</file>
-
-<file path=ppt/slides/slide18.xml><?xml version="1.0" encoding="utf-8"?>
-<p:sld xmlns:a="http://schemas.openxmlformats.org/drawingml/2006/main" xmlns:p="http://schemas.openxmlformats.org/presentationml/2006/main" xmlns:r="http://schemas.openxmlformats.org/officeDocument/2006/relationships">
-  <p:cSld>
-    <p:spTree>
-      <p:nvGrpSpPr>
-        <p:cNvPr id="1" name=""/>
-        <p:cNvGrpSpPr/>
-        <p:nvPr/>
-      </p:nvGrpSpPr>
-      <p:grpSpPr/>
-      <p:sp>
-        <p:nvSpPr>
-          <p:cNvPr id="2" name="TextBox 1"/>
-          <p:cNvSpPr txBox="1"/>
-          <p:nvPr/>
-        </p:nvSpPr>
-        <p:spPr>
-          <a:xfrm>
-            <a:off x="411480" y="201168"/>
-            <a:ext cx="11368735" cy="914400"/>
-          </a:xfrm>
-          <a:prstGeom prst="rect">
-            <a:avLst/>
-          </a:prstGeom>
-          <a:noFill/>
-        </p:spPr>
-        <p:txBody>
-          <a:bodyPr wrap="square">
-            <a:spAutoFit/>
-          </a:bodyPr>
-          <a:lstStyle/>
-          <a:p>
-            <a:pPr>
-              <a:spcAft>
-                <a:spcPts val="400"/>
-              </a:spcAft>
-            </a:pPr>
-            <a:r>
-              <a:rPr sz="2400" b="1">
-                <a:solidFill>
-                  <a:srgbClr val="1F4E79"/>
-                </a:solidFill>
-                <a:latin typeface="Arial"/>
-              </a:rPr>
-              <a:t>Per-leg replay check</a:t>
-            </a:r>
-          </a:p>
-          <a:p>
-            <a:pPr>
-              <a:spcAft>
-                <a:spcPts val="0"/>
-              </a:spcAft>
-            </a:pPr>
-            <a:r>
-              <a:rPr sz="1250" b="0">
-                <a:solidFill>
-                  <a:srgbClr val="6E6E6E"/>
-                </a:solidFill>
-                <a:latin typeface="Arial"/>
-              </a:rPr>
-              <a:t>Every station reproduced when each leg starts from the exported field</a:t>
-            </a:r>
-          </a:p>
-        </p:txBody>
-      </p:sp>
-      <p:sp>
-        <p:nvSpPr>
-          <p:cNvPr id="3" name="Rectangle 2"/>
-          <p:cNvSpPr/>
-          <p:nvPr/>
-        </p:nvSpPr>
-        <p:spPr>
-          <a:xfrm>
-            <a:off x="411480" y="1133856"/>
-            <a:ext cx="11368735" cy="20320"/>
-          </a:xfrm>
-          <a:prstGeom prst="rect">
-            <a:avLst/>
-          </a:prstGeom>
-          <a:solidFill>
-            <a:srgbClr val="B8C6D4"/>
-          </a:solidFill>
-          <a:ln>
-            <a:noFill/>
-          </a:ln>
-          <a:effectLst/>
-        </p:spPr>
-        <p:style>
-          <a:lnRef idx="1">
-            <a:schemeClr val="accent1"/>
-          </a:lnRef>
-          <a:fillRef idx="3">
-            <a:schemeClr val="accent1"/>
-          </a:fillRef>
-          <a:effectRef idx="2">
-            <a:schemeClr val="accent1"/>
-          </a:effectRef>
-          <a:fontRef idx="minor">
-            <a:schemeClr val="lt1"/>
-          </a:fontRef>
-        </p:style>
-        <p:txBody>
-          <a:bodyPr rtlCol="0" anchor="ctr"/>
-          <a:lstStyle/>
-          <a:p>
-            <a:pPr algn="ctr"/>
-          </a:p>
-        </p:txBody>
-      </p:sp>
-      <p:pic>
-        <p:nvPicPr>
-          <p:cNvPr id="4" name="Picture 3" descr="proper_ctb_check_s2s.png"/>
-          <p:cNvPicPr>
-            <a:picLocks noChangeAspect="1"/>
-          </p:cNvPicPr>
-          <p:nvPr/>
-        </p:nvPicPr>
-        <p:blipFill>
-          <a:blip r:embed="rId2"/>
-          <a:stretch>
-            <a:fillRect/>
-          </a:stretch>
-        </p:blipFill>
-        <p:spPr>
-          <a:xfrm>
-            <a:off x="3103244" y="1298448"/>
-            <a:ext cx="5985206" cy="2879852"/>
-          </a:xfrm>
-          <a:prstGeom prst="rect">
-            <a:avLst/>
-          </a:prstGeom>
-        </p:spPr>
-      </p:pic>
-      <p:sp>
-        <p:nvSpPr>
-          <p:cNvPr id="5" name="TextBox 4"/>
-          <p:cNvSpPr txBox="1"/>
-          <p:nvPr/>
-        </p:nvSpPr>
-        <p:spPr>
-          <a:xfrm>
-            <a:off x="411480" y="4196588"/>
-            <a:ext cx="11368735" cy="229107"/>
-          </a:xfrm>
-          <a:prstGeom prst="rect">
-            <a:avLst/>
-          </a:prstGeom>
-          <a:noFill/>
-        </p:spPr>
-        <p:txBody>
-          <a:bodyPr wrap="square">
-            <a:spAutoFit/>
-          </a:bodyPr>
-          <a:lstStyle/>
-          <a:p>
-            <a:pPr algn="ctr">
-              <a:spcAft>
-                <a:spcPts val="0"/>
-              </a:spcAft>
-            </a:pPr>
-            <a:r>
-              <a:rPr sz="1000" b="0">
-                <a:solidFill>
-                  <a:srgbClr val="6E6E6E"/>
-                </a:solidFill>
-                <a:latin typeface="Arial"/>
-              </a:rPr>
-              <a:t>Station-by-station intensity correlation, per-leg replay mode: focus stations at correlation 1.000000, gated pupils ≥ 0.9998; grey bars are ungated mid-beam planes.</a:t>
             </a:r>
           </a:p>
         </p:txBody>
@@ -5834,7 +6259,7 @@
                 </a:solidFill>
                 <a:latin typeface="Arial"/>
               </a:rPr>
-              <a:t>Control-loop diagnostics</a:t>
+              <a:t>Per-leg replay check</a:t>
             </a:r>
           </a:p>
           <a:p>
@@ -5850,7 +6275,7 @@
                 </a:solidFill>
                 <a:latin typeface="Arial"/>
               </a:rPr>
-              <a:t>Two silent failure modes, found and pinned by regression tests</a:t>
+              <a:t>Every station reproduced when each leg starts from the exported field</a:t>
             </a:r>
           </a:p>
         </p:txBody>
@@ -5899,16 +6324,40 @@
           </a:p>
         </p:txBody>
       </p:sp>
-      <p:sp>
-        <p:nvSpPr>
-          <p:cNvPr id="4" name="TextBox 3"/>
+      <p:pic>
+        <p:nvPicPr>
+          <p:cNvPr id="4" name="Picture 3" descr="proper_ctb_check_s2s.png"/>
+          <p:cNvPicPr>
+            <a:picLocks noChangeAspect="1"/>
+          </p:cNvPicPr>
+          <p:nvPr/>
+        </p:nvPicPr>
+        <p:blipFill>
+          <a:blip r:embed="rId2"/>
+          <a:stretch>
+            <a:fillRect/>
+          </a:stretch>
+        </p:blipFill>
+        <p:spPr>
+          <a:xfrm>
+            <a:off x="3103244" y="1298448"/>
+            <a:ext cx="5985206" cy="2879852"/>
+          </a:xfrm>
+          <a:prstGeom prst="rect">
+            <a:avLst/>
+          </a:prstGeom>
+        </p:spPr>
+      </p:pic>
+      <p:sp>
+        <p:nvSpPr>
+          <p:cNvPr id="5" name="TextBox 4"/>
           <p:cNvSpPr txBox="1"/>
           <p:nvPr/>
         </p:nvSpPr>
         <p:spPr>
           <a:xfrm>
-            <a:off x="411480" y="1298448"/>
-            <a:ext cx="11368735" cy="274320"/>
+            <a:off x="411480" y="4196588"/>
+            <a:ext cx="11368735" cy="229107"/>
           </a:xfrm>
           <a:prstGeom prst="rect">
             <a:avLst/>
@@ -5921,51 +6370,19 @@
           </a:bodyPr>
           <a:lstStyle/>
           <a:p>
-            <a:pPr>
-              <a:spcAft>
-                <a:spcPts val="600"/>
-              </a:spcAft>
-            </a:pPr>
-            <a:r>
-              <a:rPr sz="1200" b="0">
-                <a:solidFill>
-                  <a:srgbClr val="282828"/>
-                </a:solidFill>
-                <a:latin typeface="Arial"/>
-              </a:rPr>
-              <a:t>•  Commands are real numbers. The correction solve must treat the real and imaginary parts of the field as separate equations; a complex-valued solve returns complex commands whose imaginary half the MATLAB-to-engine interface silently discards. The symptom is quiet: the loop still improves, but crawls at 3% per iteration with the achieved field nearly uncorrelated with the prediction (correlation 0.13). Solved in the split form, the same loop digs 16× in two iterations. The DM model now rejects complex commands outright.</a:t>
-            </a:r>
-          </a:p>
-          <a:p>
-            <a:pPr>
-              <a:spcAft>
-                <a:spcPts val="600"/>
-              </a:spcAft>
-            </a:pPr>
-            <a:r>
-              <a:rPr sz="1200" b="0">
-                <a:solidFill>
-                  <a:srgbClr val="282828"/>
-                </a:solidFill>
-                <a:latin typeface="Arial"/>
-              </a:rPr>
-              <a:t>•  Pupil wavefront maps must be read at the exit pupil. Read at the camera (the default), a DM bump smears into a smooth error ten times its physical size — it looks exactly like a surface-amplitude bug in the model and is not. At the exit pupil the response is 2·cos(incidence) times the commanded surface within 2%, at the commanded position to a pixel, with mirror symmetry exact.</a:t>
-            </a:r>
-          </a:p>
-          <a:p>
-            <a:pPr>
-              <a:spcAft>
-                <a:spcPts val="600"/>
-              </a:spcAft>
-            </a:pPr>
-            <a:r>
-              <a:rPr sz="1200" b="0">
-                <a:solidFill>
-                  <a:srgbClr val="282828"/>
-                </a:solidFill>
-                <a:latin typeface="Arial"/>
-              </a:rPr>
-              <a:t>•  The validation ladder under the loop, all pinned by the regression suite: commanded surface read back bit-exact; two-poke superposition to 1 part in 10¹²; the propagation chain bit-repeatable run to run; poke response step-size-independent to 5%.</a:t>
+            <a:pPr algn="ctr">
+              <a:spcAft>
+                <a:spcPts val="0"/>
+              </a:spcAft>
+            </a:pPr>
+            <a:r>
+              <a:rPr sz="1000" b="0">
+                <a:solidFill>
+                  <a:srgbClr val="6E6E6E"/>
+                </a:solidFill>
+                <a:latin typeface="Arial"/>
+              </a:rPr>
+              <a:t>Station-by-station intensity correlation, per-leg replay mode: focus stations at correlation 1.000000, gated pupils ≥ 0.9998; grey bars are ungated mid-beam planes.</a:t>
             </a:r>
           </a:p>
         </p:txBody>
@@ -6272,6 +6689,194 @@
                 <a:latin typeface="Arial"/>
               </a:rPr>
               <a:t>Masks (apodizer, focal-plane mask, Lyot, field stop) are applied in MATLAB by multiplying the propagated complex field at the passive mask planes — the prescription carries the propagation, the script carries the masks.</a:t>
+            </a:r>
+          </a:p>
+        </p:txBody>
+      </p:sp>
+    </p:spTree>
+  </p:cSld>
+  <p:clrMapOvr>
+    <a:masterClrMapping/>
+  </p:clrMapOvr>
+</p:sld>
+</file>
+
+<file path=ppt/slides/slide20.xml><?xml version="1.0" encoding="utf-8"?>
+<p:sld xmlns:a="http://schemas.openxmlformats.org/drawingml/2006/main" xmlns:p="http://schemas.openxmlformats.org/presentationml/2006/main" xmlns:r="http://schemas.openxmlformats.org/officeDocument/2006/relationships">
+  <p:cSld>
+    <p:spTree>
+      <p:nvGrpSpPr>
+        <p:cNvPr id="1" name=""/>
+        <p:cNvGrpSpPr/>
+        <p:nvPr/>
+      </p:nvGrpSpPr>
+      <p:grpSpPr/>
+      <p:sp>
+        <p:nvSpPr>
+          <p:cNvPr id="2" name="TextBox 1"/>
+          <p:cNvSpPr txBox="1"/>
+          <p:nvPr/>
+        </p:nvSpPr>
+        <p:spPr>
+          <a:xfrm>
+            <a:off x="411480" y="201168"/>
+            <a:ext cx="11368735" cy="914400"/>
+          </a:xfrm>
+          <a:prstGeom prst="rect">
+            <a:avLst/>
+          </a:prstGeom>
+          <a:noFill/>
+        </p:spPr>
+        <p:txBody>
+          <a:bodyPr wrap="square">
+            <a:spAutoFit/>
+          </a:bodyPr>
+          <a:lstStyle/>
+          <a:p>
+            <a:pPr>
+              <a:spcAft>
+                <a:spcPts val="400"/>
+              </a:spcAft>
+            </a:pPr>
+            <a:r>
+              <a:rPr sz="2400" b="1">
+                <a:solidFill>
+                  <a:srgbClr val="1F4E79"/>
+                </a:solidFill>
+                <a:latin typeface="Arial"/>
+              </a:rPr>
+              <a:t>Control-loop diagnostics</a:t>
+            </a:r>
+          </a:p>
+          <a:p>
+            <a:pPr>
+              <a:spcAft>
+                <a:spcPts val="0"/>
+              </a:spcAft>
+            </a:pPr>
+            <a:r>
+              <a:rPr sz="1250" b="0">
+                <a:solidFill>
+                  <a:srgbClr val="6E6E6E"/>
+                </a:solidFill>
+                <a:latin typeface="Arial"/>
+              </a:rPr>
+              <a:t>Two silent failure modes, found and pinned by regression tests</a:t>
+            </a:r>
+          </a:p>
+        </p:txBody>
+      </p:sp>
+      <p:sp>
+        <p:nvSpPr>
+          <p:cNvPr id="3" name="Rectangle 2"/>
+          <p:cNvSpPr/>
+          <p:nvPr/>
+        </p:nvSpPr>
+        <p:spPr>
+          <a:xfrm>
+            <a:off x="411480" y="1133856"/>
+            <a:ext cx="11368735" cy="20320"/>
+          </a:xfrm>
+          <a:prstGeom prst="rect">
+            <a:avLst/>
+          </a:prstGeom>
+          <a:solidFill>
+            <a:srgbClr val="B8C6D4"/>
+          </a:solidFill>
+          <a:ln>
+            <a:noFill/>
+          </a:ln>
+          <a:effectLst/>
+        </p:spPr>
+        <p:style>
+          <a:lnRef idx="1">
+            <a:schemeClr val="accent1"/>
+          </a:lnRef>
+          <a:fillRef idx="3">
+            <a:schemeClr val="accent1"/>
+          </a:fillRef>
+          <a:effectRef idx="2">
+            <a:schemeClr val="accent1"/>
+          </a:effectRef>
+          <a:fontRef idx="minor">
+            <a:schemeClr val="lt1"/>
+          </a:fontRef>
+        </p:style>
+        <p:txBody>
+          <a:bodyPr rtlCol="0" anchor="ctr"/>
+          <a:lstStyle/>
+          <a:p>
+            <a:pPr algn="ctr"/>
+          </a:p>
+        </p:txBody>
+      </p:sp>
+      <p:sp>
+        <p:nvSpPr>
+          <p:cNvPr id="4" name="TextBox 3"/>
+          <p:cNvSpPr txBox="1"/>
+          <p:nvPr/>
+        </p:nvSpPr>
+        <p:spPr>
+          <a:xfrm>
+            <a:off x="411480" y="1298448"/>
+            <a:ext cx="11368735" cy="274320"/>
+          </a:xfrm>
+          <a:prstGeom prst="rect">
+            <a:avLst/>
+          </a:prstGeom>
+          <a:noFill/>
+        </p:spPr>
+        <p:txBody>
+          <a:bodyPr wrap="square">
+            <a:spAutoFit/>
+          </a:bodyPr>
+          <a:lstStyle/>
+          <a:p>
+            <a:pPr>
+              <a:spcAft>
+                <a:spcPts val="600"/>
+              </a:spcAft>
+            </a:pPr>
+            <a:r>
+              <a:rPr sz="1200" b="0">
+                <a:solidFill>
+                  <a:srgbClr val="282828"/>
+                </a:solidFill>
+                <a:latin typeface="Arial"/>
+              </a:rPr>
+              <a:t>•  Commands are real numbers. The correction solve must treat the real and imaginary parts of the field as separate equations; a complex-valued solve returns complex commands whose imaginary half the MATLAB-to-engine interface silently discards. The symptom is quiet: the loop still improves, but crawls at 3% per iteration with the achieved field nearly uncorrelated with the prediction (correlation 0.13). Solved in the split form, the same loop digs 16× in two iterations. The DM model now rejects complex commands outright.</a:t>
+            </a:r>
+          </a:p>
+          <a:p>
+            <a:pPr>
+              <a:spcAft>
+                <a:spcPts val="600"/>
+              </a:spcAft>
+            </a:pPr>
+            <a:r>
+              <a:rPr sz="1200" b="0">
+                <a:solidFill>
+                  <a:srgbClr val="282828"/>
+                </a:solidFill>
+                <a:latin typeface="Arial"/>
+              </a:rPr>
+              <a:t>•  Pupil wavefront maps must be read at the exit pupil. Read at the camera (the default), a DM bump smears into a smooth error ten times its physical size — it looks exactly like a surface-amplitude bug in the model and is not. At the exit pupil the response is 2·cos(incidence) times the commanded surface within 2%, at the commanded position to a pixel, with mirror symmetry exact.</a:t>
+            </a:r>
+          </a:p>
+          <a:p>
+            <a:pPr>
+              <a:spcAft>
+                <a:spcPts val="600"/>
+              </a:spcAft>
+            </a:pPr>
+            <a:r>
+              <a:rPr sz="1200" b="0">
+                <a:solidFill>
+                  <a:srgbClr val="282828"/>
+                </a:solidFill>
+                <a:latin typeface="Arial"/>
+              </a:rPr>
+              <a:t>•  The validation ladder under the loop, all pinned by the regression suite: commanded surface read back bit-exact; two-poke superposition to 1 part in 10¹²; the propagation chain bit-repeatable run to run; poke response step-size-independent to 5%.</a:t>
             </a:r>
           </a:p>
         </p:txBody>

--- a/mmacos/templates/30_instruments/bench_ctb/deck_ctb.pptx
+++ b/mmacos/templates/30_instruments/bench_ctb/deck_ctb.pptx
@@ -25,6 +25,7 @@
     <p:sldId id="273" r:id="rId24"/>
     <p:sldId id="274" r:id="rId25"/>
     <p:sldId id="275" r:id="rId26"/>
+    <p:sldId id="276" r:id="rId27"/>
   </p:sldIdLst>
   <p:sldSz cx="12191695" cy="6858000" type="screen4x3"/>
   <p:notesSz cx="6858000" cy="9144000"/>
@@ -4202,7 +4203,7 @@
                 </a:solidFill>
                 <a:latin typeface="Arial"/>
               </a:rPr>
-              <a:t>11 — Next</a:t>
+              <a:t>11 — The physics layers: band and polarization</a:t>
             </a:r>
           </a:p>
           <a:p>
@@ -4218,7 +4219,7 @@
                 </a:solidFill>
                 <a:latin typeface="Arial"/>
               </a:rPr>
-              <a:t>Toward a real coronagraph model, in dependency order</a:t>
+              <a:t>The 10% band floors the loop at 2×10⁻¹¹; coating polarization at these angles contributes 10⁻¹⁵ — chromaticity owns the floor</a:t>
             </a:r>
           </a:p>
         </p:txBody>
@@ -4276,7 +4277,7 @@
         <p:spPr>
           <a:xfrm>
             <a:off x="411480" y="1298448"/>
-            <a:ext cx="11368735" cy="274320"/>
+            <a:ext cx="5806440" cy="274320"/>
           </a:xfrm>
           <a:prstGeom prst="rect">
             <a:avLst/>
@@ -4301,7 +4302,7 @@
                 </a:solidFill>
                 <a:latin typeface="Arial"/>
               </a:rPr>
-              <a:t>•  Real mirror surfaces. Add measured-quality surface error maps to each of the eight parabolas — random roughness with realistic spatial statistics — so the model scatters light the way real optics do.</a:t>
+              <a:t>•  The models: per-wavelength propagation at 0.95/1.00/1.05 λ₀ (the vortex mask is a pure angle map, so nothing rebuilds; the target is the fixed physical annulus), and polarization as the coated train's ray-traced Jones pupil — a quarter-wave magnesium-fluoride overcoat on aluminum, all ten mirrors — applied as per-component pupil screens: each of the four Jones components propagates as its own scalar chain, unpolarized input is their half-weighted sum. One control matrix per wavelength drives the co-polarized mean; the component spread about that mean is the measured, uncontrollable polarization part.</a:t>
             </a:r>
           </a:p>
           <a:p>
@@ -4317,55 +4318,7 @@
                 </a:solidFill>
                 <a:latin typeface="Arial"/>
               </a:rPr>
-              <a:t>•  Deeper control. The native loop is delivered (slide 9); next come re-measuring the control matrix around the corrected state, image-based field estimation (pairwise probing), and driving the same DMs with FALCO, the community's standard wavefront-control software — the hybrid Lyot mask enters there, since its design comes from that control loop.</a:t>
-            </a:r>
-          </a:p>
-          <a:p>
-            <a:pPr>
-              <a:spcAft>
-                <a:spcPts val="600"/>
-              </a:spcAft>
-            </a:pPr>
-            <a:r>
-              <a:rPr sz="1200" b="0">
-                <a:solidFill>
-                  <a:srgbClr val="282828"/>
-                </a:solidFill>
-                <a:latin typeface="Arial"/>
-              </a:rPr>
-              <a:t>•  Motion over time. Apply alignment drifts as a time series and report contrast versus time — how long the dark zone survives between corrections, now measurable against the delivered control loop.</a:t>
-            </a:r>
-          </a:p>
-          <a:p>
-            <a:pPr>
-              <a:spcAft>
-                <a:spcPts val="600"/>
-              </a:spcAft>
-            </a:pPr>
-            <a:r>
-              <a:rPr sz="1200" b="0">
-                <a:solidFill>
-                  <a:srgbClr val="282828"/>
-                </a:solidFill>
-                <a:latin typeface="Arial"/>
-              </a:rPr>
-              <a:t>•  Polarized light. Propagate the two polarization components separately, with the phase and amplitude changes each mirror coating imposes; polarization sets the contrast floor no deformable mirror can correct.</a:t>
-            </a:r>
-          </a:p>
-          <a:p>
-            <a:pPr>
-              <a:spcAft>
-                <a:spcPts val="600"/>
-              </a:spcAft>
-            </a:pPr>
-            <a:r>
-              <a:rPr sz="1200" b="0">
-                <a:solidFill>
-                  <a:srgbClr val="282828"/>
-                </a:solidFill>
-                <a:latin typeface="Arial"/>
-              </a:rPr>
-              <a:t>•  Validation against testbed data — the capstone. Needs a named dataset from a real bench and the measured (not design) parameters that produced it.</a:t>
+              <a:t>•  The floors (charge 4, Lyot 0.60): polarization alone reaches 5.8×10⁻¹³ — indistinguishable from the scalar loop — with the uncontrollable part at 1.1×10⁻¹⁵. The 10% band alone floors at 1.9×10⁻¹¹; together 2.9×10⁻¹¹, and re-measuring the matrix about the corrected state gains only 1.5× more — a converged, genuinely chromatic floor: one mirror setting cannot null three wavelengths.</a:t>
             </a:r>
           </a:p>
         </p:txBody>
@@ -4378,8 +4331,8 @@
         </p:nvSpPr>
         <p:spPr>
           <a:xfrm>
-            <a:off x="411480" y="4017264"/>
-            <a:ext cx="11368735" cy="274320"/>
+            <a:off x="6400800" y="1298448"/>
+            <a:ext cx="5394960" cy="274320"/>
           </a:xfrm>
           <a:prstGeom prst="rect">
             <a:avLst/>
@@ -4398,13 +4351,108 @@
               </a:spcAft>
             </a:pPr>
             <a:r>
-              <a:rPr sz="1050" b="0">
+              <a:rPr sz="1200" b="0">
+                <a:solidFill>
+                  <a:srgbClr val="282828"/>
+                </a:solidFill>
+                <a:latin typeface="Arial"/>
+              </a:rPr>
+              <a:t>•  Rebalancing the Lyot under full physics: the stop can open for throughput — 0.70 holds 6.5×10⁻¹¹ at 49%, 0.80 holds 1.2×10⁻¹⁰ at 64% — every operating point decades below the hard-occulter chain's mono floor.</a:t>
+            </a:r>
+          </a:p>
+          <a:p>
+            <a:pPr>
+              <a:spcAft>
+                <a:spcPts val="600"/>
+              </a:spcAft>
+            </a:pPr>
+            <a:r>
+              <a:rPr sz="1200" b="0">
+                <a:solidFill>
+                  <a:srgbClr val="282828"/>
+                </a:solidFill>
+                <a:latin typeface="Arial"/>
+              </a:rPr>
+              <a:t>•  A measurement lesson, recorded with the drivers: the Jones screens must be normalized by the COMPLEX mean of their co-polarized element. Magnitude-only normalization leaves the coatings' global reflection phase in the screens; the loop's corrections then land rotated by twice that phase and add energy (measured: achieved-vs-predicted correlation −0.80). The global phase is common piston — removing it is exact for contrast.</a:t>
+            </a:r>
+          </a:p>
+          <a:p>
+            <a:pPr>
+              <a:spcAft>
+                <a:spcPts val="600"/>
+              </a:spcAft>
+            </a:pPr>
+            <a:r>
+              <a:rPr sz="1200" b="0">
+                <a:solidFill>
+                  <a:srgbClr val="282828"/>
+                </a:solidFill>
+                <a:latin typeface="Arial"/>
+              </a:rPr>
+              <a:t>•  What polarization does NOT do here is the finding: at this bench's gentle incidence angles, protected-aluminum coating polarization is a 10⁻¹⁵-class effect — which is exactly why coronagraph testbeds are folded gently.</a:t>
+            </a:r>
+          </a:p>
+        </p:txBody>
+      </p:sp>
+      <p:pic>
+        <p:nvPicPr>
+          <p:cNvPr id="6" name="Picture 5" descr="ctb_phys_summary.png"/>
+          <p:cNvPicPr>
+            <a:picLocks noChangeAspect="1"/>
+          </p:cNvPicPr>
+          <p:nvPr/>
+        </p:nvPicPr>
+        <p:blipFill>
+          <a:blip r:embed="rId2"/>
+          <a:stretch>
+            <a:fillRect/>
+          </a:stretch>
+        </p:blipFill>
+        <p:spPr>
+          <a:xfrm>
+            <a:off x="3985131" y="4587240"/>
+            <a:ext cx="4221431" cy="1711960"/>
+          </a:xfrm>
+          <a:prstGeom prst="rect">
+            <a:avLst/>
+          </a:prstGeom>
+        </p:spPr>
+      </p:pic>
+      <p:sp>
+        <p:nvSpPr>
+          <p:cNvPr id="7" name="TextBox 6"/>
+          <p:cNvSpPr txBox="1"/>
+          <p:nvPr/>
+        </p:nvSpPr>
+        <p:spPr>
+          <a:xfrm>
+            <a:off x="411480" y="6317488"/>
+            <a:ext cx="11368735" cy="394208"/>
+          </a:xfrm>
+          <a:prstGeom prst="rect">
+            <a:avLst/>
+          </a:prstGeom>
+          <a:noFill/>
+        </p:spPr>
+        <p:txBody>
+          <a:bodyPr wrap="square">
+            <a:spAutoFit/>
+          </a:bodyPr>
+          <a:lstStyle/>
+          <a:p>
+            <a:pPr algn="ctr">
+              <a:spcAft>
+                <a:spcPts val="0"/>
+              </a:spcAft>
+            </a:pPr>
+            <a:r>
+              <a:rPr sz="1000" b="0">
                 <a:solidFill>
                   <a:srgbClr val="6E6E6E"/>
                 </a:solidFill>
                 <a:latin typeface="Arial"/>
               </a:rPr>
-              <a:t>Mechanical layer delivered and merged: a prescription generator that reproduces both hand-built models to round-off, regression tests pinning the validated numbers (two suites, 16 checks green), the example README, and the exit-pupil-finder guard in the engine (pushed).</a:t>
+              <a:t>Left: convergence of each physics configuration at Lyot 0.60, with the monochromatic floor marked. Right: the floor against throughput as the Lyot opens, with the hard-occulter reference.</a:t>
             </a:r>
           </a:p>
         </p:txBody>
@@ -4461,7 +4509,7 @@
                 </a:solidFill>
                 <a:latin typeface="Arial"/>
               </a:rPr>
-              <a:t>12 — References</a:t>
+              <a:t>12 — Next</a:t>
             </a:r>
           </a:p>
           <a:p>
@@ -4477,7 +4525,7 @@
                 </a:solidFill>
                 <a:latin typeface="Arial"/>
               </a:rPr>
-              <a:t>Sources for the mask families and the control method; every formula taken from the paper itself</a:t>
+              <a:t>Toward a real coronagraph model, in dependency order</a:t>
             </a:r>
           </a:p>
         </p:txBody>
@@ -4560,7 +4608,7 @@
                 </a:solidFill>
                 <a:latin typeface="Arial"/>
               </a:rPr>
-              <a:t>•  Band-limited masks: Kuchner &amp; Traub 2002, ApJ 570, 900 (4th order); Kuchner, Crepp &amp; Ge 2005, ApJ 628, 466 (8th order).</a:t>
+              <a:t>•  Realistic sensing. The loop reads the model's complex field directly; a testbed estimates it from camera images (pairwise probing). That estimator is the remaining step between these floors and lab-representative ones — and FALCO, the community's standard wavefront-control software, can then drive the same DMs (the hybrid Lyot mask enters there, since its design comes from that control loop).</a:t>
             </a:r>
           </a:p>
           <a:p>
@@ -4576,7 +4624,7 @@
                 </a:solidFill>
                 <a:latin typeface="Arial"/>
               </a:rPr>
-              <a:t>•  Apodized-pupil Lyot: Soummer 2005, ApJ 618, L161 (the prolate apodizer); Soummer et al. 2011, ApJ 729, 144 (the GPI instrument configuration used here).</a:t>
+              <a:t>•  Aberrations and drifts. As-built mirror surface maps (measured-quality power spectra), then alignment drifts as a time series against the delivered control loop — dark-zone maintenance, and how long the hole survives between corrections.</a:t>
             </a:r>
           </a:p>
           <a:p>
@@ -4592,55 +4640,7 @@
                 </a:solidFill>
                 <a:latin typeface="Arial"/>
               </a:rPr>
-              <a:t>•  Phase masks: Roddier &amp; Roddier 1997, PASP 109, 815 (the π-spot); N'Diaye et al. 2012, A&amp;A 538, A55 (the achromatic dual-zone); Soummer, Dohlen &amp; Aime 2003, A&amp;A 403, 369.</a:t>
-            </a:r>
-          </a:p>
-          <a:p>
-            <a:pPr>
-              <a:spcAft>
-                <a:spcPts val="600"/>
-              </a:spcAft>
-            </a:pPr>
-            <a:r>
-              <a:rPr sz="1200" b="0">
-                <a:solidFill>
-                  <a:srgbClr val="282828"/>
-                </a:solidFill>
-                <a:latin typeface="Arial"/>
-              </a:rPr>
-              <a:t>•  Vortex: Mawet et al. 2005, ApJ 633, 1191; Foo, Palacios &amp; Swartzlander 2005, Opt. Lett. 30, 3308; Jenkins 2008, MNRAS 384, 515 (the even-charge rejection property).</a:t>
-            </a:r>
-          </a:p>
-          <a:p>
-            <a:pPr>
-              <a:spcAft>
-                <a:spcPts val="600"/>
-              </a:spcAft>
-            </a:pPr>
-            <a:r>
-              <a:rPr sz="1200" b="0">
-                <a:solidFill>
-                  <a:srgbClr val="282828"/>
-                </a:solidFill>
-                <a:latin typeface="Arial"/>
-              </a:rPr>
-              <a:t>•  Wavefront control: Give'on et al. 2007, Proc. SPIE 6691 (electric-field conjugation, the correction solve of slide 9).</a:t>
-            </a:r>
-          </a:p>
-          <a:p>
-            <a:pPr>
-              <a:spcAft>
-                <a:spcPts val="600"/>
-              </a:spcAft>
-            </a:pPr>
-            <a:r>
-              <a:rPr sz="1200" b="0">
-                <a:solidFill>
-                  <a:srgbClr val="282828"/>
-                </a:solidFill>
-                <a:latin typeface="Arial"/>
-              </a:rPr>
-              <a:t>•  Diffraction reference code: PROPER — Krist 2007, Proc. SPIE 6675 (the arbiter for every propagation cross-check in this deck).</a:t>
+              <a:t>•  Validation against testbed data — the capstone. Needs a named dataset from a real bench and the measured (not design) parameters that produced it.</a:t>
             </a:r>
           </a:p>
         </p:txBody>
@@ -4653,7 +4653,7 @@
         </p:nvSpPr>
         <p:spPr>
           <a:xfrm>
-            <a:off x="411480" y="3959352"/>
+            <a:off x="411480" y="2944368"/>
             <a:ext cx="11368735" cy="274320"/>
           </a:xfrm>
           <a:prstGeom prst="rect">
@@ -4679,7 +4679,7 @@
                 </a:solidFill>
                 <a:latin typeface="Arial"/>
               </a:rPr>
-              <a:t>A companion three-slide deck (ctb_mask_families, committed beside the drivers) carries the code map: which script builds which mask, and the parameters a user can change.</a:t>
+              <a:t>Mechanical layer delivered and merged: a prescription generator that reproduces both hand-built models to round-off, regression tests pinning the validated numbers (two suites, 16 checks green), the example README, and the exit-pupil-finder guard in the engine (pushed).</a:t>
             </a:r>
           </a:p>
         </p:txBody>
@@ -4736,7 +4736,23 @@
                 </a:solidFill>
                 <a:latin typeface="Arial"/>
               </a:rPr>
-              <a:t>Backup Slides</a:t>
+              <a:t>13 — References</a:t>
+            </a:r>
+          </a:p>
+          <a:p>
+            <a:pPr>
+              <a:spcAft>
+                <a:spcPts val="0"/>
+              </a:spcAft>
+            </a:pPr>
+            <a:r>
+              <a:rPr sz="1250" b="0">
+                <a:solidFill>
+                  <a:srgbClr val="6E6E6E"/>
+                </a:solidFill>
+                <a:latin typeface="Arial"/>
+              </a:rPr>
+              <a:t>Sources for the mask families and the control method; every formula taken from the paper itself</a:t>
             </a:r>
           </a:p>
         </p:txBody>
@@ -4749,7 +4765,7 @@
         </p:nvSpPr>
         <p:spPr>
           <a:xfrm>
-            <a:off x="411480" y="914400"/>
+            <a:off x="411480" y="1133856"/>
             <a:ext cx="11368735" cy="20320"/>
           </a:xfrm>
           <a:prstGeom prst="rect">
@@ -4793,7 +4809,7 @@
         </p:nvSpPr>
         <p:spPr>
           <a:xfrm>
-            <a:off x="411480" y="1078992"/>
+            <a:off x="411480" y="1298448"/>
             <a:ext cx="11368735" cy="274320"/>
           </a:xfrm>
           <a:prstGeom prst="rect">
@@ -4819,7 +4835,126 @@
                 </a:solidFill>
                 <a:latin typeface="Arial"/>
               </a:rPr>
-              <a:t>•  Galleries, per-family detail, the per-leg replay check, and the control-loop diagnostics.</a:t>
+              <a:t>•  Band-limited masks: Kuchner &amp; Traub 2002, ApJ 570, 900 (4th order); Kuchner, Crepp &amp; Ge 2005, ApJ 628, 466 (8th order).</a:t>
+            </a:r>
+          </a:p>
+          <a:p>
+            <a:pPr>
+              <a:spcAft>
+                <a:spcPts val="600"/>
+              </a:spcAft>
+            </a:pPr>
+            <a:r>
+              <a:rPr sz="1200" b="0">
+                <a:solidFill>
+                  <a:srgbClr val="282828"/>
+                </a:solidFill>
+                <a:latin typeface="Arial"/>
+              </a:rPr>
+              <a:t>•  Apodized-pupil Lyot: Soummer 2005, ApJ 618, L161 (the prolate apodizer); Soummer et al. 2011, ApJ 729, 144 (the GPI instrument configuration used here).</a:t>
+            </a:r>
+          </a:p>
+          <a:p>
+            <a:pPr>
+              <a:spcAft>
+                <a:spcPts val="600"/>
+              </a:spcAft>
+            </a:pPr>
+            <a:r>
+              <a:rPr sz="1200" b="0">
+                <a:solidFill>
+                  <a:srgbClr val="282828"/>
+                </a:solidFill>
+                <a:latin typeface="Arial"/>
+              </a:rPr>
+              <a:t>•  Phase masks: Roddier &amp; Roddier 1997, PASP 109, 815 (the π-spot); N'Diaye et al. 2012, A&amp;A 538, A55 (the achromatic dual-zone); Soummer, Dohlen &amp; Aime 2003, A&amp;A 403, 369.</a:t>
+            </a:r>
+          </a:p>
+          <a:p>
+            <a:pPr>
+              <a:spcAft>
+                <a:spcPts val="600"/>
+              </a:spcAft>
+            </a:pPr>
+            <a:r>
+              <a:rPr sz="1200" b="0">
+                <a:solidFill>
+                  <a:srgbClr val="282828"/>
+                </a:solidFill>
+                <a:latin typeface="Arial"/>
+              </a:rPr>
+              <a:t>•  Vortex: Mawet et al. 2005, ApJ 633, 1191; Foo, Palacios &amp; Swartzlander 2005, Opt. Lett. 30, 3308; Jenkins 2008, MNRAS 384, 515 (the even-charge rejection property).</a:t>
+            </a:r>
+          </a:p>
+          <a:p>
+            <a:pPr>
+              <a:spcAft>
+                <a:spcPts val="600"/>
+              </a:spcAft>
+            </a:pPr>
+            <a:r>
+              <a:rPr sz="1200" b="0">
+                <a:solidFill>
+                  <a:srgbClr val="282828"/>
+                </a:solidFill>
+                <a:latin typeface="Arial"/>
+              </a:rPr>
+              <a:t>•  Wavefront control: Give'on et al. 2007, Proc. SPIE 6691 (electric-field conjugation, the correction solve of slide 9).</a:t>
+            </a:r>
+          </a:p>
+          <a:p>
+            <a:pPr>
+              <a:spcAft>
+                <a:spcPts val="600"/>
+              </a:spcAft>
+            </a:pPr>
+            <a:r>
+              <a:rPr sz="1200" b="0">
+                <a:solidFill>
+                  <a:srgbClr val="282828"/>
+                </a:solidFill>
+                <a:latin typeface="Arial"/>
+              </a:rPr>
+              <a:t>•  Diffraction reference code: PROPER — Krist 2007, Proc. SPIE 6675 (the arbiter for every propagation cross-check in this deck).</a:t>
+            </a:r>
+          </a:p>
+        </p:txBody>
+      </p:sp>
+      <p:sp>
+        <p:nvSpPr>
+          <p:cNvPr id="5" name="TextBox 4"/>
+          <p:cNvSpPr txBox="1"/>
+          <p:nvPr/>
+        </p:nvSpPr>
+        <p:spPr>
+          <a:xfrm>
+            <a:off x="411480" y="3959352"/>
+            <a:ext cx="11368735" cy="274320"/>
+          </a:xfrm>
+          <a:prstGeom prst="rect">
+            <a:avLst/>
+          </a:prstGeom>
+          <a:noFill/>
+        </p:spPr>
+        <p:txBody>
+          <a:bodyPr wrap="square">
+            <a:spAutoFit/>
+          </a:bodyPr>
+          <a:lstStyle/>
+          <a:p>
+            <a:pPr>
+              <a:spcAft>
+                <a:spcPts val="600"/>
+              </a:spcAft>
+            </a:pPr>
+            <a:r>
+              <a:rPr sz="1050" b="0">
+                <a:solidFill>
+                  <a:srgbClr val="6E6E6E"/>
+                </a:solidFill>
+                <a:latin typeface="Arial"/>
+              </a:rPr>
+              <a:t>A companion three-slide deck (ctb_mask_families, committed beside the drivers) carries the code map: which script builds which mask, and the parameters a user can change.</a:t>
             </a:r>
           </a:p>
         </p:txBody>
@@ -4876,23 +5011,7 @@
                 </a:solidFill>
                 <a:latin typeface="Arial"/>
               </a:rPr>
-              <a:t>The mask families, one by one (1 of 2)</a:t>
-            </a:r>
-          </a:p>
-          <a:p>
-            <a:pPr>
-              <a:spcAft>
-                <a:spcPts val="0"/>
-              </a:spcAft>
-            </a:pPr>
-            <a:r>
-              <a:rPr sz="1250" b="0">
-                <a:solidFill>
-                  <a:srgbClr val="6E6E6E"/>
-                </a:solidFill>
-                <a:latin typeface="Arial"/>
-              </a:rPr>
-              <a:t>Apodized-pupil Lyot and band-limited</a:t>
+              <a:t>Backup Slides</a:t>
             </a:r>
           </a:p>
         </p:txBody>
@@ -4905,7 +5024,7 @@
         </p:nvSpPr>
         <p:spPr>
           <a:xfrm>
-            <a:off x="411480" y="1133856"/>
+            <a:off x="411480" y="914400"/>
             <a:ext cx="11368735" cy="20320"/>
           </a:xfrm>
           <a:prstGeom prst="rect">
@@ -4941,40 +5060,16 @@
           </a:p>
         </p:txBody>
       </p:sp>
-      <p:pic>
-        <p:nvPicPr>
-          <p:cNvPr id="4" name="Picture 3" descr="ctb_aplc.png"/>
-          <p:cNvPicPr>
-            <a:picLocks noChangeAspect="1"/>
-          </p:cNvPicPr>
-          <p:nvPr/>
-        </p:nvPicPr>
-        <p:blipFill>
-          <a:blip r:embed="rId2"/>
-          <a:stretch>
-            <a:fillRect/>
-          </a:stretch>
-        </p:blipFill>
-        <p:spPr>
-          <a:xfrm>
-            <a:off x="1404046" y="1298448"/>
-            <a:ext cx="3821307" cy="2440432"/>
-          </a:xfrm>
-          <a:prstGeom prst="rect">
-            <a:avLst/>
-          </a:prstGeom>
-        </p:spPr>
-      </p:pic>
-      <p:sp>
-        <p:nvSpPr>
-          <p:cNvPr id="5" name="TextBox 4"/>
+      <p:sp>
+        <p:nvSpPr>
+          <p:cNvPr id="4" name="TextBox 3"/>
           <p:cNvSpPr txBox="1"/>
           <p:nvPr/>
         </p:nvSpPr>
         <p:spPr>
           <a:xfrm>
-            <a:off x="411480" y="3757167"/>
-            <a:ext cx="5806440" cy="394208"/>
+            <a:off x="411480" y="1078992"/>
+            <a:ext cx="11368735" cy="274320"/>
           </a:xfrm>
           <a:prstGeom prst="rect">
             <a:avLst/>
@@ -4987,82 +5082,19 @@
           </a:bodyPr>
           <a:lstStyle/>
           <a:p>
-            <a:pPr algn="ctr">
-              <a:spcAft>
-                <a:spcPts val="0"/>
-              </a:spcAft>
-            </a:pPr>
-            <a:r>
-              <a:rPr sz="1000" b="0">
-                <a:solidFill>
-                  <a:srgbClr val="6E6E6E"/>
-                </a:solidFill>
-                <a:latin typeface="Arial"/>
-              </a:rPr>
-              <a:t>The apodized-pupil Lyot configuration: prolate apodizer, occulter, Lyot stop, and its dark zone.</a:t>
-            </a:r>
-          </a:p>
-        </p:txBody>
-      </p:sp>
-      <p:pic>
-        <p:nvPicPr>
-          <p:cNvPr id="6" name="Picture 5" descr="ctb_bandlimited.png"/>
-          <p:cNvPicPr>
-            <a:picLocks noChangeAspect="1"/>
-          </p:cNvPicPr>
-          <p:nvPr/>
-        </p:nvPicPr>
-        <p:blipFill>
-          <a:blip r:embed="rId3"/>
-          <a:stretch>
-            <a:fillRect/>
-          </a:stretch>
-        </p:blipFill>
-        <p:spPr>
-          <a:xfrm>
-            <a:off x="6957009" y="1298448"/>
-            <a:ext cx="4282541" cy="2605532"/>
-          </a:xfrm>
-          <a:prstGeom prst="rect">
-            <a:avLst/>
-          </a:prstGeom>
-        </p:spPr>
-      </p:pic>
-      <p:sp>
-        <p:nvSpPr>
-          <p:cNvPr id="7" name="TextBox 6"/>
-          <p:cNvSpPr txBox="1"/>
-          <p:nvPr/>
-        </p:nvSpPr>
-        <p:spPr>
-          <a:xfrm>
-            <a:off x="6400800" y="3922267"/>
-            <a:ext cx="5394960" cy="229107"/>
-          </a:xfrm>
-          <a:prstGeom prst="rect">
-            <a:avLst/>
-          </a:prstGeom>
-          <a:noFill/>
-        </p:spPr>
-        <p:txBody>
-          <a:bodyPr wrap="square">
-            <a:spAutoFit/>
-          </a:bodyPr>
-          <a:lstStyle/>
-          <a:p>
-            <a:pPr algn="ctr">
-              <a:spcAft>
-                <a:spcPts val="0"/>
-              </a:spcAft>
-            </a:pPr>
-            <a:r>
-              <a:rPr sz="1000" b="0">
-                <a:solidFill>
-                  <a:srgbClr val="6E6E6E"/>
-                </a:solidFill>
-                <a:latin typeface="Arial"/>
-              </a:rPr>
-              <a:t>The 4th-order band-limited mask: amplitude profile and its dark zone.</a:t>
+            <a:pPr>
+              <a:spcAft>
+                <a:spcPts val="600"/>
+              </a:spcAft>
+            </a:pPr>
+            <a:r>
+              <a:rPr sz="1200" b="0">
+                <a:solidFill>
+                  <a:srgbClr val="282828"/>
+                </a:solidFill>
+                <a:latin typeface="Arial"/>
+              </a:rPr>
+              <a:t>•  Galleries, per-family detail, the per-leg replay check, and the control-loop diagnostics.</a:t>
             </a:r>
           </a:p>
         </p:txBody>
@@ -5119,7 +5151,7 @@
                 </a:solidFill>
                 <a:latin typeface="Arial"/>
               </a:rPr>
-              <a:t>The mask families, one by one (2 of 2)</a:t>
+              <a:t>The mask families, one by one (1 of 2)</a:t>
             </a:r>
           </a:p>
           <a:p>
@@ -5135,7 +5167,7 @@
                 </a:solidFill>
                 <a:latin typeface="Arial"/>
               </a:rPr>
-              <a:t>Phase masks and the vortex</a:t>
+              <a:t>Apodized-pupil Lyot and band-limited</a:t>
             </a:r>
           </a:p>
         </p:txBody>
@@ -5186,7 +5218,7 @@
       </p:sp>
       <p:pic>
         <p:nvPicPr>
-          <p:cNvPr id="4" name="Picture 3" descr="ctb_phase_masks.png"/>
+          <p:cNvPr id="4" name="Picture 3" descr="ctb_aplc.png"/>
           <p:cNvPicPr>
             <a:picLocks noChangeAspect="1"/>
           </p:cNvPicPr>
@@ -5200,8 +5232,8 @@
         </p:blipFill>
         <p:spPr>
           <a:xfrm>
-            <a:off x="1426422" y="1298448"/>
-            <a:ext cx="3776554" cy="2440432"/>
+            <a:off x="1404046" y="1298448"/>
+            <a:ext cx="3821307" cy="2440432"/>
           </a:xfrm>
           <a:prstGeom prst="rect">
             <a:avLst/>
@@ -5242,14 +5274,14 @@
                 </a:solidFill>
                 <a:latin typeface="Arial"/>
               </a:rPr>
-              <a:t>The Roddier π-spot and dual-zone phase masks; both need their matched entrance apodizer to go deep.</a:t>
+              <a:t>The apodized-pupil Lyot configuration: prolate apodizer, occulter, Lyot stop, and its dark zone.</a:t>
             </a:r>
           </a:p>
         </p:txBody>
       </p:sp>
       <p:pic>
         <p:nvPicPr>
-          <p:cNvPr id="6" name="Picture 5" descr="ctb_vortex_matched.png"/>
+          <p:cNvPr id="6" name="Picture 5" descr="ctb_bandlimited.png"/>
           <p:cNvPicPr>
             <a:picLocks noChangeAspect="1"/>
           </p:cNvPicPr>
@@ -5263,8 +5295,8 @@
         </p:blipFill>
         <p:spPr>
           <a:xfrm>
-            <a:off x="7057750" y="1298448"/>
-            <a:ext cx="4081058" cy="2440432"/>
+            <a:off x="6957009" y="1298448"/>
+            <a:ext cx="4282541" cy="2605532"/>
           </a:xfrm>
           <a:prstGeom prst="rect">
             <a:avLst/>
@@ -5279,8 +5311,8 @@
         </p:nvSpPr>
         <p:spPr>
           <a:xfrm>
-            <a:off x="6400800" y="3757167"/>
-            <a:ext cx="5394960" cy="394208"/>
+            <a:off x="6400800" y="3922267"/>
+            <a:ext cx="5394960" cy="229107"/>
           </a:xfrm>
           <a:prstGeom prst="rect">
             <a:avLst/>
@@ -5305,7 +5337,7 @@
                 </a:solidFill>
                 <a:latin typeface="Arial"/>
               </a:rPr>
-              <a:t>The vortex with matched Lyot: even winding number on a clear pupil sends starlight outside the reimaged pupil.</a:t>
+              <a:t>The 4th-order band-limited mask: amplitude profile and its dark zone.</a:t>
             </a:r>
           </a:p>
         </p:txBody>
@@ -5319,6 +5351,249 @@
 </file>
 
 <file path=ppt/slides/slide17.xml><?xml version="1.0" encoding="utf-8"?>
+<p:sld xmlns:a="http://schemas.openxmlformats.org/drawingml/2006/main" xmlns:p="http://schemas.openxmlformats.org/presentationml/2006/main" xmlns:r="http://schemas.openxmlformats.org/officeDocument/2006/relationships">
+  <p:cSld>
+    <p:spTree>
+      <p:nvGrpSpPr>
+        <p:cNvPr id="1" name=""/>
+        <p:cNvGrpSpPr/>
+        <p:nvPr/>
+      </p:nvGrpSpPr>
+      <p:grpSpPr/>
+      <p:sp>
+        <p:nvSpPr>
+          <p:cNvPr id="2" name="TextBox 1"/>
+          <p:cNvSpPr txBox="1"/>
+          <p:nvPr/>
+        </p:nvSpPr>
+        <p:spPr>
+          <a:xfrm>
+            <a:off x="411480" y="201168"/>
+            <a:ext cx="11368735" cy="914400"/>
+          </a:xfrm>
+          <a:prstGeom prst="rect">
+            <a:avLst/>
+          </a:prstGeom>
+          <a:noFill/>
+        </p:spPr>
+        <p:txBody>
+          <a:bodyPr wrap="square">
+            <a:spAutoFit/>
+          </a:bodyPr>
+          <a:lstStyle/>
+          <a:p>
+            <a:pPr>
+              <a:spcAft>
+                <a:spcPts val="400"/>
+              </a:spcAft>
+            </a:pPr>
+            <a:r>
+              <a:rPr sz="2400" b="1">
+                <a:solidFill>
+                  <a:srgbClr val="1F4E79"/>
+                </a:solidFill>
+                <a:latin typeface="Arial"/>
+              </a:rPr>
+              <a:t>The mask families, one by one (2 of 2)</a:t>
+            </a:r>
+          </a:p>
+          <a:p>
+            <a:pPr>
+              <a:spcAft>
+                <a:spcPts val="0"/>
+              </a:spcAft>
+            </a:pPr>
+            <a:r>
+              <a:rPr sz="1250" b="0">
+                <a:solidFill>
+                  <a:srgbClr val="6E6E6E"/>
+                </a:solidFill>
+                <a:latin typeface="Arial"/>
+              </a:rPr>
+              <a:t>Phase masks and the vortex</a:t>
+            </a:r>
+          </a:p>
+        </p:txBody>
+      </p:sp>
+      <p:sp>
+        <p:nvSpPr>
+          <p:cNvPr id="3" name="Rectangle 2"/>
+          <p:cNvSpPr/>
+          <p:nvPr/>
+        </p:nvSpPr>
+        <p:spPr>
+          <a:xfrm>
+            <a:off x="411480" y="1133856"/>
+            <a:ext cx="11368735" cy="20320"/>
+          </a:xfrm>
+          <a:prstGeom prst="rect">
+            <a:avLst/>
+          </a:prstGeom>
+          <a:solidFill>
+            <a:srgbClr val="B8C6D4"/>
+          </a:solidFill>
+          <a:ln>
+            <a:noFill/>
+          </a:ln>
+          <a:effectLst/>
+        </p:spPr>
+        <p:style>
+          <a:lnRef idx="1">
+            <a:schemeClr val="accent1"/>
+          </a:lnRef>
+          <a:fillRef idx="3">
+            <a:schemeClr val="accent1"/>
+          </a:fillRef>
+          <a:effectRef idx="2">
+            <a:schemeClr val="accent1"/>
+          </a:effectRef>
+          <a:fontRef idx="minor">
+            <a:schemeClr val="lt1"/>
+          </a:fontRef>
+        </p:style>
+        <p:txBody>
+          <a:bodyPr rtlCol="0" anchor="ctr"/>
+          <a:lstStyle/>
+          <a:p>
+            <a:pPr algn="ctr"/>
+          </a:p>
+        </p:txBody>
+      </p:sp>
+      <p:pic>
+        <p:nvPicPr>
+          <p:cNvPr id="4" name="Picture 3" descr="ctb_phase_masks.png"/>
+          <p:cNvPicPr>
+            <a:picLocks noChangeAspect="1"/>
+          </p:cNvPicPr>
+          <p:nvPr/>
+        </p:nvPicPr>
+        <p:blipFill>
+          <a:blip r:embed="rId2"/>
+          <a:stretch>
+            <a:fillRect/>
+          </a:stretch>
+        </p:blipFill>
+        <p:spPr>
+          <a:xfrm>
+            <a:off x="1426422" y="1298448"/>
+            <a:ext cx="3776554" cy="2440432"/>
+          </a:xfrm>
+          <a:prstGeom prst="rect">
+            <a:avLst/>
+          </a:prstGeom>
+        </p:spPr>
+      </p:pic>
+      <p:sp>
+        <p:nvSpPr>
+          <p:cNvPr id="5" name="TextBox 4"/>
+          <p:cNvSpPr txBox="1"/>
+          <p:nvPr/>
+        </p:nvSpPr>
+        <p:spPr>
+          <a:xfrm>
+            <a:off x="411480" y="3757167"/>
+            <a:ext cx="5806440" cy="394208"/>
+          </a:xfrm>
+          <a:prstGeom prst="rect">
+            <a:avLst/>
+          </a:prstGeom>
+          <a:noFill/>
+        </p:spPr>
+        <p:txBody>
+          <a:bodyPr wrap="square">
+            <a:spAutoFit/>
+          </a:bodyPr>
+          <a:lstStyle/>
+          <a:p>
+            <a:pPr algn="ctr">
+              <a:spcAft>
+                <a:spcPts val="0"/>
+              </a:spcAft>
+            </a:pPr>
+            <a:r>
+              <a:rPr sz="1000" b="0">
+                <a:solidFill>
+                  <a:srgbClr val="6E6E6E"/>
+                </a:solidFill>
+                <a:latin typeface="Arial"/>
+              </a:rPr>
+              <a:t>The Roddier π-spot and dual-zone phase masks; both need their matched entrance apodizer to go deep.</a:t>
+            </a:r>
+          </a:p>
+        </p:txBody>
+      </p:sp>
+      <p:pic>
+        <p:nvPicPr>
+          <p:cNvPr id="6" name="Picture 5" descr="ctb_vortex_matched.png"/>
+          <p:cNvPicPr>
+            <a:picLocks noChangeAspect="1"/>
+          </p:cNvPicPr>
+          <p:nvPr/>
+        </p:nvPicPr>
+        <p:blipFill>
+          <a:blip r:embed="rId3"/>
+          <a:stretch>
+            <a:fillRect/>
+          </a:stretch>
+        </p:blipFill>
+        <p:spPr>
+          <a:xfrm>
+            <a:off x="7057750" y="1298448"/>
+            <a:ext cx="4081058" cy="2440432"/>
+          </a:xfrm>
+          <a:prstGeom prst="rect">
+            <a:avLst/>
+          </a:prstGeom>
+        </p:spPr>
+      </p:pic>
+      <p:sp>
+        <p:nvSpPr>
+          <p:cNvPr id="7" name="TextBox 6"/>
+          <p:cNvSpPr txBox="1"/>
+          <p:nvPr/>
+        </p:nvSpPr>
+        <p:spPr>
+          <a:xfrm>
+            <a:off x="6400800" y="3757167"/>
+            <a:ext cx="5394960" cy="394208"/>
+          </a:xfrm>
+          <a:prstGeom prst="rect">
+            <a:avLst/>
+          </a:prstGeom>
+          <a:noFill/>
+        </p:spPr>
+        <p:txBody>
+          <a:bodyPr wrap="square">
+            <a:spAutoFit/>
+          </a:bodyPr>
+          <a:lstStyle/>
+          <a:p>
+            <a:pPr algn="ctr">
+              <a:spcAft>
+                <a:spcPts val="0"/>
+              </a:spcAft>
+            </a:pPr>
+            <a:r>
+              <a:rPr sz="1000" b="0">
+                <a:solidFill>
+                  <a:srgbClr val="6E6E6E"/>
+                </a:solidFill>
+                <a:latin typeface="Arial"/>
+              </a:rPr>
+              <a:t>The vortex with matched Lyot: even winding number on a clear pupil sends starlight outside the reimaged pupil.</a:t>
+            </a:r>
+          </a:p>
+        </p:txBody>
+      </p:sp>
+    </p:spTree>
+  </p:cSld>
+  <p:clrMapOvr>
+    <a:masterClrMapping/>
+  </p:clrMapOvr>
+</p:sld>
+</file>
+
+<file path=ppt/slides/slide18.xml><?xml version="1.0" encoding="utf-8"?>
 <p:sld xmlns:a="http://schemas.openxmlformats.org/drawingml/2006/main" xmlns:p="http://schemas.openxmlformats.org/presentationml/2006/main" xmlns:r="http://schemas.openxmlformats.org/officeDocument/2006/relationships">
   <p:cSld>
     <p:spTree>
@@ -5972,7 +6247,7 @@
 </p:sld>
 </file>
 
-<file path=ppt/slides/slide18.xml><?xml version="1.0" encoding="utf-8"?>
+<file path=ppt/slides/slide19.xml><?xml version="1.0" encoding="utf-8"?>
 <p:sld xmlns:a="http://schemas.openxmlformats.org/drawingml/2006/main" xmlns:p="http://schemas.openxmlformats.org/presentationml/2006/main" xmlns:r="http://schemas.openxmlformats.org/officeDocument/2006/relationships">
   <p:cSld>
     <p:spTree>
@@ -6203,186 +6478,6 @@
                 <a:latin typeface="Arial"/>
               </a:rPr>
               <a:t>The geometric bench: eight off-axis parabolas and two DMs, with the beam footprints the diffraction models inherit.</a:t>
-            </a:r>
-          </a:p>
-        </p:txBody>
-      </p:sp>
-    </p:spTree>
-  </p:cSld>
-  <p:clrMapOvr>
-    <a:masterClrMapping/>
-  </p:clrMapOvr>
-</p:sld>
-</file>
-
-<file path=ppt/slides/slide19.xml><?xml version="1.0" encoding="utf-8"?>
-<p:sld xmlns:a="http://schemas.openxmlformats.org/drawingml/2006/main" xmlns:p="http://schemas.openxmlformats.org/presentationml/2006/main" xmlns:r="http://schemas.openxmlformats.org/officeDocument/2006/relationships">
-  <p:cSld>
-    <p:spTree>
-      <p:nvGrpSpPr>
-        <p:cNvPr id="1" name=""/>
-        <p:cNvGrpSpPr/>
-        <p:nvPr/>
-      </p:nvGrpSpPr>
-      <p:grpSpPr/>
-      <p:sp>
-        <p:nvSpPr>
-          <p:cNvPr id="2" name="TextBox 1"/>
-          <p:cNvSpPr txBox="1"/>
-          <p:nvPr/>
-        </p:nvSpPr>
-        <p:spPr>
-          <a:xfrm>
-            <a:off x="411480" y="201168"/>
-            <a:ext cx="11368735" cy="914400"/>
-          </a:xfrm>
-          <a:prstGeom prst="rect">
-            <a:avLst/>
-          </a:prstGeom>
-          <a:noFill/>
-        </p:spPr>
-        <p:txBody>
-          <a:bodyPr wrap="square">
-            <a:spAutoFit/>
-          </a:bodyPr>
-          <a:lstStyle/>
-          <a:p>
-            <a:pPr>
-              <a:spcAft>
-                <a:spcPts val="400"/>
-              </a:spcAft>
-            </a:pPr>
-            <a:r>
-              <a:rPr sz="2400" b="1">
-                <a:solidFill>
-                  <a:srgbClr val="1F4E79"/>
-                </a:solidFill>
-                <a:latin typeface="Arial"/>
-              </a:rPr>
-              <a:t>Per-leg replay check</a:t>
-            </a:r>
-          </a:p>
-          <a:p>
-            <a:pPr>
-              <a:spcAft>
-                <a:spcPts val="0"/>
-              </a:spcAft>
-            </a:pPr>
-            <a:r>
-              <a:rPr sz="1250" b="0">
-                <a:solidFill>
-                  <a:srgbClr val="6E6E6E"/>
-                </a:solidFill>
-                <a:latin typeface="Arial"/>
-              </a:rPr>
-              <a:t>Every station reproduced when each leg starts from the exported field</a:t>
-            </a:r>
-          </a:p>
-        </p:txBody>
-      </p:sp>
-      <p:sp>
-        <p:nvSpPr>
-          <p:cNvPr id="3" name="Rectangle 2"/>
-          <p:cNvSpPr/>
-          <p:nvPr/>
-        </p:nvSpPr>
-        <p:spPr>
-          <a:xfrm>
-            <a:off x="411480" y="1133856"/>
-            <a:ext cx="11368735" cy="20320"/>
-          </a:xfrm>
-          <a:prstGeom prst="rect">
-            <a:avLst/>
-          </a:prstGeom>
-          <a:solidFill>
-            <a:srgbClr val="B8C6D4"/>
-          </a:solidFill>
-          <a:ln>
-            <a:noFill/>
-          </a:ln>
-          <a:effectLst/>
-        </p:spPr>
-        <p:style>
-          <a:lnRef idx="1">
-            <a:schemeClr val="accent1"/>
-          </a:lnRef>
-          <a:fillRef idx="3">
-            <a:schemeClr val="accent1"/>
-          </a:fillRef>
-          <a:effectRef idx="2">
-            <a:schemeClr val="accent1"/>
-          </a:effectRef>
-          <a:fontRef idx="minor">
-            <a:schemeClr val="lt1"/>
-          </a:fontRef>
-        </p:style>
-        <p:txBody>
-          <a:bodyPr rtlCol="0" anchor="ctr"/>
-          <a:lstStyle/>
-          <a:p>
-            <a:pPr algn="ctr"/>
-          </a:p>
-        </p:txBody>
-      </p:sp>
-      <p:pic>
-        <p:nvPicPr>
-          <p:cNvPr id="4" name="Picture 3" descr="proper_ctb_check_s2s.png"/>
-          <p:cNvPicPr>
-            <a:picLocks noChangeAspect="1"/>
-          </p:cNvPicPr>
-          <p:nvPr/>
-        </p:nvPicPr>
-        <p:blipFill>
-          <a:blip r:embed="rId2"/>
-          <a:stretch>
-            <a:fillRect/>
-          </a:stretch>
-        </p:blipFill>
-        <p:spPr>
-          <a:xfrm>
-            <a:off x="3103244" y="1298448"/>
-            <a:ext cx="5985206" cy="2879852"/>
-          </a:xfrm>
-          <a:prstGeom prst="rect">
-            <a:avLst/>
-          </a:prstGeom>
-        </p:spPr>
-      </p:pic>
-      <p:sp>
-        <p:nvSpPr>
-          <p:cNvPr id="5" name="TextBox 4"/>
-          <p:cNvSpPr txBox="1"/>
-          <p:nvPr/>
-        </p:nvSpPr>
-        <p:spPr>
-          <a:xfrm>
-            <a:off x="411480" y="4196588"/>
-            <a:ext cx="11368735" cy="229107"/>
-          </a:xfrm>
-          <a:prstGeom prst="rect">
-            <a:avLst/>
-          </a:prstGeom>
-          <a:noFill/>
-        </p:spPr>
-        <p:txBody>
-          <a:bodyPr wrap="square">
-            <a:spAutoFit/>
-          </a:bodyPr>
-          <a:lstStyle/>
-          <a:p>
-            <a:pPr algn="ctr">
-              <a:spcAft>
-                <a:spcPts val="0"/>
-              </a:spcAft>
-            </a:pPr>
-            <a:r>
-              <a:rPr sz="1000" b="0">
-                <a:solidFill>
-                  <a:srgbClr val="6E6E6E"/>
-                </a:solidFill>
-                <a:latin typeface="Arial"/>
-              </a:rPr>
-              <a:t>Station-by-station intensity correlation, per-leg replay mode: focus stations at correlation 1.000000, gated pupils ≥ 0.9998; grey bars are ungated mid-beam planes.</a:t>
             </a:r>
           </a:p>
         </p:txBody>
@@ -6702,6 +6797,186 @@
 </file>
 
 <file path=ppt/slides/slide20.xml><?xml version="1.0" encoding="utf-8"?>
+<p:sld xmlns:a="http://schemas.openxmlformats.org/drawingml/2006/main" xmlns:p="http://schemas.openxmlformats.org/presentationml/2006/main" xmlns:r="http://schemas.openxmlformats.org/officeDocument/2006/relationships">
+  <p:cSld>
+    <p:spTree>
+      <p:nvGrpSpPr>
+        <p:cNvPr id="1" name=""/>
+        <p:cNvGrpSpPr/>
+        <p:nvPr/>
+      </p:nvGrpSpPr>
+      <p:grpSpPr/>
+      <p:sp>
+        <p:nvSpPr>
+          <p:cNvPr id="2" name="TextBox 1"/>
+          <p:cNvSpPr txBox="1"/>
+          <p:nvPr/>
+        </p:nvSpPr>
+        <p:spPr>
+          <a:xfrm>
+            <a:off x="411480" y="201168"/>
+            <a:ext cx="11368735" cy="914400"/>
+          </a:xfrm>
+          <a:prstGeom prst="rect">
+            <a:avLst/>
+          </a:prstGeom>
+          <a:noFill/>
+        </p:spPr>
+        <p:txBody>
+          <a:bodyPr wrap="square">
+            <a:spAutoFit/>
+          </a:bodyPr>
+          <a:lstStyle/>
+          <a:p>
+            <a:pPr>
+              <a:spcAft>
+                <a:spcPts val="400"/>
+              </a:spcAft>
+            </a:pPr>
+            <a:r>
+              <a:rPr sz="2400" b="1">
+                <a:solidFill>
+                  <a:srgbClr val="1F4E79"/>
+                </a:solidFill>
+                <a:latin typeface="Arial"/>
+              </a:rPr>
+              <a:t>Per-leg replay check</a:t>
+            </a:r>
+          </a:p>
+          <a:p>
+            <a:pPr>
+              <a:spcAft>
+                <a:spcPts val="0"/>
+              </a:spcAft>
+            </a:pPr>
+            <a:r>
+              <a:rPr sz="1250" b="0">
+                <a:solidFill>
+                  <a:srgbClr val="6E6E6E"/>
+                </a:solidFill>
+                <a:latin typeface="Arial"/>
+              </a:rPr>
+              <a:t>Every station reproduced when each leg starts from the exported field</a:t>
+            </a:r>
+          </a:p>
+        </p:txBody>
+      </p:sp>
+      <p:sp>
+        <p:nvSpPr>
+          <p:cNvPr id="3" name="Rectangle 2"/>
+          <p:cNvSpPr/>
+          <p:nvPr/>
+        </p:nvSpPr>
+        <p:spPr>
+          <a:xfrm>
+            <a:off x="411480" y="1133856"/>
+            <a:ext cx="11368735" cy="20320"/>
+          </a:xfrm>
+          <a:prstGeom prst="rect">
+            <a:avLst/>
+          </a:prstGeom>
+          <a:solidFill>
+            <a:srgbClr val="B8C6D4"/>
+          </a:solidFill>
+          <a:ln>
+            <a:noFill/>
+          </a:ln>
+          <a:effectLst/>
+        </p:spPr>
+        <p:style>
+          <a:lnRef idx="1">
+            <a:schemeClr val="accent1"/>
+          </a:lnRef>
+          <a:fillRef idx="3">
+            <a:schemeClr val="accent1"/>
+          </a:fillRef>
+          <a:effectRef idx="2">
+            <a:schemeClr val="accent1"/>
+          </a:effectRef>
+          <a:fontRef idx="minor">
+            <a:schemeClr val="lt1"/>
+          </a:fontRef>
+        </p:style>
+        <p:txBody>
+          <a:bodyPr rtlCol="0" anchor="ctr"/>
+          <a:lstStyle/>
+          <a:p>
+            <a:pPr algn="ctr"/>
+          </a:p>
+        </p:txBody>
+      </p:sp>
+      <p:pic>
+        <p:nvPicPr>
+          <p:cNvPr id="4" name="Picture 3" descr="proper_ctb_check_s2s.png"/>
+          <p:cNvPicPr>
+            <a:picLocks noChangeAspect="1"/>
+          </p:cNvPicPr>
+          <p:nvPr/>
+        </p:nvPicPr>
+        <p:blipFill>
+          <a:blip r:embed="rId2"/>
+          <a:stretch>
+            <a:fillRect/>
+          </a:stretch>
+        </p:blipFill>
+        <p:spPr>
+          <a:xfrm>
+            <a:off x="3103244" y="1298448"/>
+            <a:ext cx="5985206" cy="2879852"/>
+          </a:xfrm>
+          <a:prstGeom prst="rect">
+            <a:avLst/>
+          </a:prstGeom>
+        </p:spPr>
+      </p:pic>
+      <p:sp>
+        <p:nvSpPr>
+          <p:cNvPr id="5" name="TextBox 4"/>
+          <p:cNvSpPr txBox="1"/>
+          <p:nvPr/>
+        </p:nvSpPr>
+        <p:spPr>
+          <a:xfrm>
+            <a:off x="411480" y="4196588"/>
+            <a:ext cx="11368735" cy="229107"/>
+          </a:xfrm>
+          <a:prstGeom prst="rect">
+            <a:avLst/>
+          </a:prstGeom>
+          <a:noFill/>
+        </p:spPr>
+        <p:txBody>
+          <a:bodyPr wrap="square">
+            <a:spAutoFit/>
+          </a:bodyPr>
+          <a:lstStyle/>
+          <a:p>
+            <a:pPr algn="ctr">
+              <a:spcAft>
+                <a:spcPts val="0"/>
+              </a:spcAft>
+            </a:pPr>
+            <a:r>
+              <a:rPr sz="1000" b="0">
+                <a:solidFill>
+                  <a:srgbClr val="6E6E6E"/>
+                </a:solidFill>
+                <a:latin typeface="Arial"/>
+              </a:rPr>
+              <a:t>Station-by-station intensity correlation, per-leg replay mode: focus stations at correlation 1.000000, gated pupils ≥ 0.9998; grey bars are ungated mid-beam planes.</a:t>
+            </a:r>
+          </a:p>
+        </p:txBody>
+      </p:sp>
+    </p:spTree>
+  </p:cSld>
+  <p:clrMapOvr>
+    <a:masterClrMapping/>
+  </p:clrMapOvr>
+</p:sld>
+</file>
+
+<file path=ppt/slides/slide21.xml><?xml version="1.0" encoding="utf-8"?>
 <p:sld xmlns:a="http://schemas.openxmlformats.org/drawingml/2006/main" xmlns:p="http://schemas.openxmlformats.org/presentationml/2006/main" xmlns:r="http://schemas.openxmlformats.org/officeDocument/2006/relationships">
   <p:cSld>
     <p:spTree>

--- a/mmacos/templates/30_instruments/bench_ctb/deck_ctb.pptx
+++ b/mmacos/templates/30_instruments/bench_ctb/deck_ctb.pptx
@@ -8182,7 +8182,7 @@
                 </a:solidFill>
                 <a:latin typeface="Arial"/>
               </a:rPr>
-              <a:t>The apodized-pupil Lyot design is deepest; the pixel-averaged vortex is second, at three times its throughput</a:t>
+              <a:t>Static masks, before any DM control: the apodized-pupil Lyot is deepest; the pixel-averaged vortex second, at three times its throughput</a:t>
             </a:r>
           </a:p>
         </p:txBody>
@@ -8296,7 +8296,7 @@
         </p:nvGraphicFramePr>
         <p:xfrm>
           <a:off x="411480" y="3398519"/>
-          <a:ext cx="5806438" cy="1960245"/>
+          <a:ext cx="5806437" cy="1960245"/>
         </p:xfrm>
         <a:graphic>
           <a:graphicData uri="http://schemas.openxmlformats.org/drawingml/2006/table">
@@ -8305,9 +8305,9 @@
                 <a:tableStyleId>{5C22544A-7EE6-4342-B048-85BDC9FD1C3A}</a:tableStyleId>
               </a:tblPr>
               <a:tblGrid>
-                <a:gridCol w="3177108"/>
-                <a:gridCol w="1533776"/>
-                <a:gridCol w="1095554"/>
+                <a:gridCol w="2806445"/>
+                <a:gridCol w="2032253"/>
+                <a:gridCol w="967739"/>
               </a:tblGrid>
               <a:tr h="280035">
                 <a:tc>
@@ -8344,7 +8344,7 @@
                           </a:solidFill>
                           <a:latin typeface="Arial"/>
                         </a:rPr>
-                        <a:t>dark-zone mean</a:t>
+                        <a:t>static dark-zone mean</a:t>
                       </a:r>
                     </a:p>
                   </a:txBody>
@@ -8844,8 +8844,8 @@
         </p:blipFill>
         <p:spPr>
           <a:xfrm>
-            <a:off x="6720188" y="1298448"/>
-            <a:ext cx="4756183" cy="2549652"/>
+            <a:off x="7061337" y="1298448"/>
+            <a:ext cx="4073885" cy="2183892"/>
           </a:xfrm>
           <a:prstGeom prst="rect">
             <a:avLst/>
@@ -8860,7 +8860,7 @@
         </p:nvSpPr>
         <p:spPr>
           <a:xfrm>
-            <a:off x="6400800" y="3866387"/>
+            <a:off x="6400800" y="3500628"/>
             <a:ext cx="5394960" cy="559307"/>
           </a:xfrm>
           <a:prstGeom prst="rect">
@@ -8886,7 +8886,7 @@
                 </a:solidFill>
                 <a:latin typeface="Arial"/>
               </a:rPr>
-              <a:t>Contrast against throughput for all six families — lower-right is better; the apodized-pupil Lyot deepest, the pixel-averaged vortex second at three times its throughput.</a:t>
+              <a:t>Contrast against throughput for all six families, STATIC — lower-right is better; the apodized-pupil Lyot deepest, the pixel-averaged vortex second at three times its throughput.</a:t>
             </a:r>
           </a:p>
         </p:txBody>
@@ -8899,7 +8899,345 @@
         </p:nvSpPr>
         <p:spPr>
           <a:xfrm>
-            <a:off x="6400800" y="4462272"/>
+            <a:off x="6400800" y="4096512"/>
+            <a:ext cx="5394960" cy="274320"/>
+          </a:xfrm>
+          <a:prstGeom prst="rect">
+            <a:avLst/>
+          </a:prstGeom>
+          <a:noFill/>
+        </p:spPr>
+        <p:txBody>
+          <a:bodyPr wrap="square">
+            <a:spAutoFit/>
+          </a:bodyPr>
+          <a:lstStyle/>
+          <a:p>
+            <a:pPr>
+              <a:spcAft>
+                <a:spcPts val="600"/>
+              </a:spcAft>
+            </a:pPr>
+            <a:r>
+              <a:rPr sz="1200" b="0">
+                <a:solidFill>
+                  <a:srgbClr val="282828"/>
+                </a:solidFill>
+                <a:latin typeface="Arial"/>
+              </a:rPr>
+              <a:t>•  Everything above is the mask alone. With the two deformable mirrors closed-loop (slides 9–11, control at N=512), the floors drop by decades:</a:t>
+            </a:r>
+          </a:p>
+        </p:txBody>
+      </p:sp>
+      <p:graphicFrame>
+        <p:nvGraphicFramePr>
+          <p:cNvPr id="10" name="Table 9"/>
+          <p:cNvGraphicFramePr>
+            <a:graphicFrameLocks noGrp="1"/>
+          </p:cNvGraphicFramePr>
+          <p:nvPr/>
+        </p:nvGraphicFramePr>
+        <p:xfrm>
+          <a:off x="6400800" y="4867656"/>
+          <a:ext cx="5394958" cy="1051560"/>
+        </p:xfrm>
+        <a:graphic>
+          <a:graphicData uri="http://schemas.openxmlformats.org/drawingml/2006/table">
+            <a:tbl>
+              <a:tblPr firstRow="1" bandRow="1">
+                <a:tableStyleId>{5C22544A-7EE6-4342-B048-85BDC9FD1C3A}</a:tableStyleId>
+              </a:tblPr>
+              <a:tblGrid>
+                <a:gridCol w="3468188"/>
+                <a:gridCol w="616566"/>
+                <a:gridCol w="1310204"/>
+              </a:tblGrid>
+              <a:tr h="262890">
+                <a:tc>
+                  <a:txBody>
+                    <a:bodyPr wrap="square"/>
+                    <a:lstStyle/>
+                    <a:p>
+                      <a:r>
+                        <a:rPr sz="1000" b="1">
+                          <a:solidFill>
+                            <a:srgbClr val="FFFFFF"/>
+                          </a:solidFill>
+                          <a:latin typeface="Arial"/>
+                        </a:rPr>
+                        <a:t>controlled chain</a:t>
+                      </a:r>
+                    </a:p>
+                  </a:txBody>
+                  <a:tcPr marL="54864" marR="54864" marT="18288" marB="18288">
+                    <a:solidFill>
+                      <a:srgbClr val="1F4E79"/>
+                    </a:solidFill>
+                  </a:tcPr>
+                </a:tc>
+                <a:tc>
+                  <a:txBody>
+                    <a:bodyPr wrap="square"/>
+                    <a:lstStyle/>
+                    <a:p>
+                      <a:r>
+                        <a:rPr sz="1000" b="1">
+                          <a:solidFill>
+                            <a:srgbClr val="FFFFFF"/>
+                          </a:solidFill>
+                          <a:latin typeface="Arial"/>
+                        </a:rPr>
+                        <a:t>static</a:t>
+                      </a:r>
+                    </a:p>
+                  </a:txBody>
+                  <a:tcPr marL="54864" marR="54864" marT="18288" marB="18288">
+                    <a:solidFill>
+                      <a:srgbClr val="1F4E79"/>
+                    </a:solidFill>
+                  </a:tcPr>
+                </a:tc>
+                <a:tc>
+                  <a:txBody>
+                    <a:bodyPr wrap="square"/>
+                    <a:lstStyle/>
+                    <a:p>
+                      <a:r>
+                        <a:rPr sz="1000" b="1">
+                          <a:solidFill>
+                            <a:srgbClr val="FFFFFF"/>
+                          </a:solidFill>
+                          <a:latin typeface="Arial"/>
+                        </a:rPr>
+                        <a:t>closed-loop floor</a:t>
+                      </a:r>
+                    </a:p>
+                  </a:txBody>
+                  <a:tcPr marL="54864" marR="54864" marT="18288" marB="18288">
+                    <a:solidFill>
+                      <a:srgbClr val="1F4E79"/>
+                    </a:solidFill>
+                  </a:tcPr>
+                </a:tc>
+              </a:tr>
+              <a:tr h="262890">
+                <a:tc>
+                  <a:txBody>
+                    <a:bodyPr wrap="square"/>
+                    <a:lstStyle/>
+                    <a:p>
+                      <a:r>
+                        <a:rPr sz="1000" b="0">
+                          <a:solidFill>
+                            <a:srgbClr val="282828"/>
+                          </a:solidFill>
+                          <a:latin typeface="Arial"/>
+                        </a:rPr>
+                        <a:t>hard occulter, Lyot 0.50 (mono)</a:t>
+                      </a:r>
+                    </a:p>
+                  </a:txBody>
+                  <a:tcPr marL="54864" marR="54864" marT="18288" marB="18288">
+                    <a:solidFill>
+                      <a:srgbClr val="FFFFFF"/>
+                    </a:solidFill>
+                  </a:tcPr>
+                </a:tc>
+                <a:tc>
+                  <a:txBody>
+                    <a:bodyPr wrap="square"/>
+                    <a:lstStyle/>
+                    <a:p>
+                      <a:r>
+                        <a:rPr sz="1000" b="0">
+                          <a:solidFill>
+                            <a:srgbClr val="282828"/>
+                          </a:solidFill>
+                          <a:latin typeface="Arial"/>
+                        </a:rPr>
+                        <a:t>2.9×10⁻⁷</a:t>
+                      </a:r>
+                    </a:p>
+                  </a:txBody>
+                  <a:tcPr marL="54864" marR="54864" marT="18288" marB="18288">
+                    <a:solidFill>
+                      <a:srgbClr val="FFFFFF"/>
+                    </a:solidFill>
+                  </a:tcPr>
+                </a:tc>
+                <a:tc>
+                  <a:txBody>
+                    <a:bodyPr wrap="square"/>
+                    <a:lstStyle/>
+                    <a:p>
+                      <a:r>
+                        <a:rPr sz="1000" b="0">
+                          <a:solidFill>
+                            <a:srgbClr val="282828"/>
+                          </a:solidFill>
+                          <a:latin typeface="Arial"/>
+                        </a:rPr>
+                        <a:t>3.8×10⁻⁹</a:t>
+                      </a:r>
+                    </a:p>
+                  </a:txBody>
+                  <a:tcPr marL="54864" marR="54864" marT="18288" marB="18288">
+                    <a:solidFill>
+                      <a:srgbClr val="FFFFFF"/>
+                    </a:solidFill>
+                  </a:tcPr>
+                </a:tc>
+              </a:tr>
+              <a:tr h="262890">
+                <a:tc>
+                  <a:txBody>
+                    <a:bodyPr wrap="square"/>
+                    <a:lstStyle/>
+                    <a:p>
+                      <a:r>
+                        <a:rPr sz="1000" b="0">
+                          <a:solidFill>
+                            <a:srgbClr val="282828"/>
+                          </a:solidFill>
+                          <a:latin typeface="Arial"/>
+                        </a:rPr>
+                        <a:t>vortex charge 4, Lyot 0.60 (mono)</a:t>
+                      </a:r>
+                    </a:p>
+                  </a:txBody>
+                  <a:tcPr marL="54864" marR="54864" marT="18288" marB="18288">
+                    <a:solidFill>
+                      <a:srgbClr val="ECF1F6"/>
+                    </a:solidFill>
+                  </a:tcPr>
+                </a:tc>
+                <a:tc>
+                  <a:txBody>
+                    <a:bodyPr wrap="square"/>
+                    <a:lstStyle/>
+                    <a:p>
+                      <a:r>
+                        <a:rPr sz="1000" b="0">
+                          <a:solidFill>
+                            <a:srgbClr val="282828"/>
+                          </a:solidFill>
+                          <a:latin typeface="Arial"/>
+                        </a:rPr>
+                        <a:t>1.7×10⁻⁸</a:t>
+                      </a:r>
+                    </a:p>
+                  </a:txBody>
+                  <a:tcPr marL="54864" marR="54864" marT="18288" marB="18288">
+                    <a:solidFill>
+                      <a:srgbClr val="ECF1F6"/>
+                    </a:solidFill>
+                  </a:tcPr>
+                </a:tc>
+                <a:tc>
+                  <a:txBody>
+                    <a:bodyPr wrap="square"/>
+                    <a:lstStyle/>
+                    <a:p>
+                      <a:r>
+                        <a:rPr sz="1000" b="0">
+                          <a:solidFill>
+                            <a:srgbClr val="282828"/>
+                          </a:solidFill>
+                          <a:latin typeface="Arial"/>
+                        </a:rPr>
+                        <a:t>6.8×10⁻¹⁵</a:t>
+                      </a:r>
+                    </a:p>
+                  </a:txBody>
+                  <a:tcPr marL="54864" marR="54864" marT="18288" marB="18288">
+                    <a:solidFill>
+                      <a:srgbClr val="ECF1F6"/>
+                    </a:solidFill>
+                  </a:tcPr>
+                </a:tc>
+              </a:tr>
+              <a:tr h="262890">
+                <a:tc>
+                  <a:txBody>
+                    <a:bodyPr wrap="square"/>
+                    <a:lstStyle/>
+                    <a:p>
+                      <a:r>
+                        <a:rPr sz="1000" b="0">
+                          <a:solidFill>
+                            <a:srgbClr val="282828"/>
+                          </a:solidFill>
+                          <a:latin typeface="Arial"/>
+                        </a:rPr>
+                        <a:t>vortex charge 4, Lyot 0.60 (10% band, unpol.)</a:t>
+                      </a:r>
+                    </a:p>
+                  </a:txBody>
+                  <a:tcPr marL="54864" marR="54864" marT="18288" marB="18288">
+                    <a:solidFill>
+                      <a:srgbClr val="FFFFFF"/>
+                    </a:solidFill>
+                  </a:tcPr>
+                </a:tc>
+                <a:tc>
+                  <a:txBody>
+                    <a:bodyPr wrap="square"/>
+                    <a:lstStyle/>
+                    <a:p>
+                      <a:r>
+                        <a:rPr sz="1000" b="0">
+                          <a:solidFill>
+                            <a:srgbClr val="282828"/>
+                          </a:solidFill>
+                          <a:latin typeface="Arial"/>
+                        </a:rPr>
+                        <a:t>2.2×10⁻⁸</a:t>
+                      </a:r>
+                    </a:p>
+                  </a:txBody>
+                  <a:tcPr marL="54864" marR="54864" marT="18288" marB="18288">
+                    <a:solidFill>
+                      <a:srgbClr val="FFFFFF"/>
+                    </a:solidFill>
+                  </a:tcPr>
+                </a:tc>
+                <a:tc>
+                  <a:txBody>
+                    <a:bodyPr wrap="square"/>
+                    <a:lstStyle/>
+                    <a:p>
+                      <a:r>
+                        <a:rPr sz="1000" b="0">
+                          <a:solidFill>
+                            <a:srgbClr val="282828"/>
+                          </a:solidFill>
+                          <a:latin typeface="Arial"/>
+                        </a:rPr>
+                        <a:t>2.0×10⁻¹¹</a:t>
+                      </a:r>
+                    </a:p>
+                  </a:txBody>
+                  <a:tcPr marL="54864" marR="54864" marT="18288" marB="18288">
+                    <a:solidFill>
+                      <a:srgbClr val="FFFFFF"/>
+                    </a:solidFill>
+                  </a:tcPr>
+                </a:tc>
+              </a:tr>
+            </a:tbl>
+          </a:graphicData>
+        </a:graphic>
+      </p:graphicFrame>
+      <p:sp>
+        <p:nvSpPr>
+          <p:cNvPr id="11" name="TextBox 10"/>
+          <p:cNvSpPr txBox="1"/>
+          <p:nvPr/>
+        </p:nvSpPr>
+        <p:spPr>
+          <a:xfrm>
+            <a:off x="6400800" y="6065520"/>
             <a:ext cx="5394960" cy="274320"/>
           </a:xfrm>
           <a:prstGeom prst="rect">
